--- a/presentation.pptx
+++ b/presentation.pptx
@@ -3675,7 +3675,7 @@
                 </a:solidFill>
                 <a:latin typeface="Consolas"/>
               </a:rPr>
-              <a:t>ML2 — ANALYSIS</a:t>
+              <a:t>ML2 — GENERALISATION  (UNSEEN EXCITATION)</a:t>
             </a:r>
           </a:p>
         </p:txBody>
@@ -3714,13 +3714,13 @@
               </a:spcAft>
             </a:pPr>
             <a:r>
-              <a:rPr b="1" sz="3000">
+              <a:rPr b="1" sz="2600">
                 <a:solidFill>
                   <a:srgbClr val="1D3557"/>
                 </a:solidFill>
                 <a:latin typeface="Georgia"/>
               </a:rPr>
-              <a:t>The gear spring never fires.</a:t>
+              <a:t>Classical filters break on unseen inputs.</a:t>
             </a:r>
           </a:p>
         </p:txBody>
@@ -3733,282 +3733,8 @@
         </p:nvSpPr>
         <p:spPr>
           <a:xfrm>
-            <a:off x="868680" y="1828800"/>
-            <a:ext cx="5669280" cy="804672"/>
-          </a:xfrm>
-          <a:prstGeom prst="rect">
-            <a:avLst/>
-          </a:prstGeom>
-          <a:noFill/>
-        </p:spPr>
-        <p:txBody>
-          <a:bodyPr wrap="square" anchor="t" lIns="0" rIns="0" tIns="0" bIns="0">
-            <a:spAutoFit/>
-          </a:bodyPr>
-          <a:lstStyle/>
-          <a:p>
-            <a:pPr>
-              <a:lnSpc>
-                <a:spcPct val="120000"/>
-              </a:lnSpc>
-            </a:pPr>
-            <a:r>
-              <a:rPr b="0" sz="1500">
-                <a:solidFill>
-                  <a:srgbClr val="4A5A66"/>
-                </a:solidFill>
-                <a:latin typeface="Calibri"/>
-              </a:rPr>
-              <a:t>In the simulation, </a:t>
-            </a:r>
-            <a:r>
-              <a:rPr b="0" sz="1380">
-                <a:solidFill>
-                  <a:srgbClr val="1D3557"/>
-                </a:solidFill>
-                <a:latin typeface="Consolas"/>
-              </a:rPr>
-              <a:t>T_mesh = kg·dz + cg·(ω_m − N·ω_l)</a:t>
-            </a:r>
-            <a:r>
-              <a:rPr b="0" sz="1500">
-                <a:solidFill>
-                  <a:srgbClr val="4A5A66"/>
-                </a:solidFill>
-                <a:latin typeface="Calibri"/>
-              </a:rPr>
-              <a:t>. The spring </a:t>
-            </a:r>
-            <a:r>
-              <a:rPr b="0" sz="1380">
-                <a:solidFill>
-                  <a:srgbClr val="1D3557"/>
-                </a:solidFill>
-                <a:latin typeface="Consolas"/>
-              </a:rPr>
-              <a:t>kg·dz</a:t>
-            </a:r>
-            <a:r>
-              <a:rPr b="0" sz="1500">
-                <a:solidFill>
-                  <a:srgbClr val="4A5A66"/>
-                </a:solidFill>
-                <a:latin typeface="Calibri"/>
-              </a:rPr>
-              <a:t> fires only when |φ| &gt; gap_motor = 1 rad. But φ = θ_m − N·θ_l stays within </a:t>
-            </a:r>
-            <a:r>
-              <a:rPr b="1" sz="1500">
-                <a:solidFill>
-                  <a:srgbClr val="1C2B36"/>
-                </a:solidFill>
-                <a:latin typeface="Calibri"/>
-              </a:rPr>
-              <a:t>±0.03 rad</a:t>
-            </a:r>
-            <a:r>
-              <a:rPr b="0" sz="1500">
-                <a:solidFill>
-                  <a:srgbClr val="4A5A66"/>
-                </a:solidFill>
-                <a:latin typeface="Calibri"/>
-              </a:rPr>
-              <a:t> throughout all runs.</a:t>
-            </a:r>
-          </a:p>
-        </p:txBody>
-      </p:sp>
-      <p:sp>
-        <p:nvSpPr>
-          <p:cNvPr id="7" name="Rounded Rectangle 6"/>
-          <p:cNvSpPr/>
-          <p:nvPr/>
-        </p:nvSpPr>
-        <p:spPr>
-          <a:xfrm>
-            <a:off x="6949440" y="1828800"/>
-            <a:ext cx="4297680" cy="1225296"/>
-          </a:xfrm>
-          <a:prstGeom prst="roundRect">
-            <a:avLst>
-              <a:gd name="adj" fmla="val 6000"/>
-            </a:avLst>
-          </a:prstGeom>
-          <a:solidFill>
-            <a:srgbClr val="F4F1E9"/>
-          </a:solidFill>
-          <a:ln w="12700">
-            <a:solidFill>
-              <a:srgbClr val="D9D2C4"/>
-            </a:solidFill>
-          </a:ln>
-          <a:effectLst/>
-        </p:spPr>
-        <p:style>
-          <a:lnRef idx="1">
-            <a:schemeClr val="accent1"/>
-          </a:lnRef>
-          <a:fillRef idx="3">
-            <a:schemeClr val="accent1"/>
-          </a:fillRef>
-          <a:effectRef idx="2">
-            <a:schemeClr val="accent1"/>
-          </a:effectRef>
-          <a:fontRef idx="minor">
-            <a:schemeClr val="lt1"/>
-          </a:fontRef>
-        </p:style>
-        <p:txBody>
-          <a:bodyPr rtlCol="0" anchor="ctr"/>
-          <a:lstStyle/>
-          <a:p>
-            <a:pPr algn="ctr"/>
-          </a:p>
-        </p:txBody>
-      </p:sp>
-      <p:sp>
-        <p:nvSpPr>
-          <p:cNvPr id="8" name="Rectangle 7"/>
-          <p:cNvSpPr/>
-          <p:nvPr/>
-        </p:nvSpPr>
-        <p:spPr>
-          <a:xfrm>
-            <a:off x="6949440" y="1828800"/>
-            <a:ext cx="38100" cy="1225296"/>
-          </a:xfrm>
-          <a:prstGeom prst="rect">
-            <a:avLst/>
-          </a:prstGeom>
-          <a:solidFill>
-            <a:srgbClr val="E07A5F"/>
-          </a:solidFill>
-          <a:ln>
-            <a:noFill/>
-          </a:ln>
-          <a:effectLst/>
-        </p:spPr>
-        <p:style>
-          <a:lnRef idx="1">
-            <a:schemeClr val="accent1"/>
-          </a:lnRef>
-          <a:fillRef idx="3">
-            <a:schemeClr val="accent1"/>
-          </a:fillRef>
-          <a:effectRef idx="2">
-            <a:schemeClr val="accent1"/>
-          </a:effectRef>
-          <a:fontRef idx="minor">
-            <a:schemeClr val="lt1"/>
-          </a:fontRef>
-        </p:style>
-        <p:txBody>
-          <a:bodyPr rtlCol="0" anchor="ctr"/>
-          <a:lstStyle/>
-          <a:p>
-            <a:pPr algn="ctr"/>
-          </a:p>
-        </p:txBody>
-      </p:sp>
-      <p:sp>
-        <p:nvSpPr>
-          <p:cNvPr id="9" name="TextBox 8"/>
-          <p:cNvSpPr txBox="1"/>
-          <p:nvPr/>
-        </p:nvSpPr>
-        <p:spPr>
-          <a:xfrm>
-            <a:off x="7150608" y="1938528"/>
-            <a:ext cx="3931920" cy="1042416"/>
-          </a:xfrm>
-          <a:prstGeom prst="rect">
-            <a:avLst/>
-          </a:prstGeom>
-          <a:noFill/>
-        </p:spPr>
-        <p:txBody>
-          <a:bodyPr wrap="square" anchor="ctr" lIns="0" rIns="0" tIns="0" bIns="0">
-            <a:spAutoFit/>
-          </a:bodyPr>
-          <a:lstStyle/>
-          <a:p>
-            <a:pPr>
-              <a:lnSpc>
-                <a:spcPct val="115000"/>
-              </a:lnSpc>
-              <a:spcBef>
-                <a:spcPts val="0"/>
-              </a:spcBef>
-              <a:spcAft>
-                <a:spcPts val="0"/>
-              </a:spcAft>
-            </a:pPr>
-            <a:r>
-              <a:rPr b="0" sz="1350">
-                <a:solidFill>
-                  <a:srgbClr val="1D3557"/>
-                </a:solidFill>
-                <a:latin typeface="Consolas"/>
-              </a:rPr>
-              <a:t>φ  =  θ_m − N·θ_l  ≤  0.03 rad   «   gap_motor = 1.0 rad</a:t>
-            </a:r>
-          </a:p>
-          <a:p>
-            <a:pPr>
-              <a:lnSpc>
-                <a:spcPct val="115000"/>
-              </a:lnSpc>
-              <a:spcBef>
-                <a:spcPts val="400"/>
-              </a:spcBef>
-              <a:spcAft>
-                <a:spcPts val="0"/>
-              </a:spcAft>
-            </a:pPr>
-            <a:r>
-              <a:rPr b="0" sz="1350">
-                <a:solidFill>
-                  <a:srgbClr val="1D3557"/>
-                </a:solidFill>
-                <a:latin typeface="Consolas"/>
-              </a:rPr>
-              <a:t>→  dz = 0   →   T_mesh = cg·(ω_m − N·ω_l)   always</a:t>
-            </a:r>
-          </a:p>
-          <a:p>
-            <a:pPr>
-              <a:lnSpc>
-                <a:spcPct val="115000"/>
-              </a:lnSpc>
-              <a:spcBef>
-                <a:spcPts val="400"/>
-              </a:spcBef>
-              <a:spcAft>
-                <a:spcPts val="0"/>
-              </a:spcAft>
-            </a:pPr>
-            <a:r>
-              <a:rPr b="0" sz="1350">
-                <a:solidFill>
-                  <a:srgbClr val="1D3557"/>
-                </a:solidFill>
-                <a:latin typeface="Consolas"/>
-              </a:rPr>
-              <a:t>τ_l = Jl / (N²·η·cg)  =  5e-3 / 42.5  ≈  0.12 ms</a:t>
-            </a:r>
-          </a:p>
-        </p:txBody>
-      </p:sp>
-      <p:sp>
-        <p:nvSpPr>
-          <p:cNvPr id="10" name="TextBox 9"/>
-          <p:cNvSpPr txBox="1"/>
-          <p:nvPr/>
-        </p:nvSpPr>
-        <p:spPr>
-          <a:xfrm>
-            <a:off x="868680" y="3108960"/>
-            <a:ext cx="5486400" cy="2468880"/>
+            <a:off x="868680" y="1965960"/>
+            <a:ext cx="4114800" cy="2743200"/>
           </a:xfrm>
           <a:prstGeom prst="rect">
             <a:avLst/>
@@ -4035,7 +3761,7 @@
             <a:r>
               <a:rPr sz="1500" b="1">
                 <a:solidFill>
-                  <a:srgbClr val="E07A5F"/>
+                  <a:srgbClr val="1D3557"/>
                 </a:solidFill>
                 <a:latin typeface="Calibri"/>
               </a:rPr>
@@ -4048,7 +3774,7 @@
                 </a:solidFill>
                 <a:latin typeface="Calibri"/>
               </a:rPr>
-              <a:t>The task is </a:t>
+              <a:t>Tested on a </a:t>
             </a:r>
             <a:r>
               <a:rPr b="1" sz="1500">
@@ -4057,7 +3783,7 @@
                 </a:solidFill>
                 <a:latin typeface="Calibri"/>
               </a:rPr>
-              <a:t>predicting damper lag</a:t>
+              <a:t>chirp</a:t>
             </a:r>
             <a:r>
               <a:rPr b="0" sz="1500">
@@ -4066,7 +3792,7 @@
                 </a:solidFill>
                 <a:latin typeface="Calibri"/>
               </a:rPr>
-              <a:t> — proportional to velocity — not dead-zone hysteresis.</a:t>
+              <a:t> sweep never seen in training (only step/ramp/random/mixed were).</a:t>
             </a:r>
           </a:p>
           <a:p>
@@ -4075,7 +3801,7 @@
                 <a:spcPct val="110000"/>
               </a:lnSpc>
               <a:spcBef>
-                <a:spcPts val="1200"/>
+                <a:spcPts val="1400"/>
               </a:spcBef>
               <a:spcAft>
                 <a:spcPts val="0"/>
@@ -4084,7 +3810,7 @@
             <a:r>
               <a:rPr sz="1500" b="1">
                 <a:solidFill>
-                  <a:srgbClr val="1D3557"/>
+                  <a:srgbClr val="E07A5F"/>
                 </a:solidFill>
                 <a:latin typeface="Calibri"/>
               </a:rPr>
@@ -4097,7 +3823,7 @@
                 </a:solidFill>
                 <a:latin typeface="Calibri"/>
               </a:rPr>
-              <a:t>Longer context</a:t>
+              <a:t>EMA collapses</a:t>
             </a:r>
             <a:r>
               <a:rPr b="0" sz="1500">
@@ -4106,7 +3832,61 @@
                 </a:solidFill>
                 <a:latin typeface="Calibri"/>
               </a:rPr>
-              <a:t> improves the velocity estimate from noisy quantised encoder data.</a:t>
+              <a:t> +64% → </a:t>
+            </a:r>
+            <a:r>
+              <a:rPr b="1" sz="1500">
+                <a:solidFill>
+                  <a:srgbClr val="1C2B36"/>
+                </a:solidFill>
+                <a:latin typeface="Calibri"/>
+              </a:rPr>
+              <a:t>+12%</a:t>
+            </a:r>
+            <a:r>
+              <a:rPr b="0" sz="1500">
+                <a:solidFill>
+                  <a:srgbClr val="4A5A66"/>
+                </a:solidFill>
+                <a:latin typeface="Calibri"/>
+              </a:rPr>
+              <a:t>; </a:t>
+            </a:r>
+            <a:r>
+              <a:rPr b="1" sz="1500">
+                <a:solidFill>
+                  <a:srgbClr val="1C2B36"/>
+                </a:solidFill>
+                <a:latin typeface="Calibri"/>
+              </a:rPr>
+              <a:t>Kalman</a:t>
+            </a:r>
+            <a:r>
+              <a:rPr b="0" sz="1500">
+                <a:solidFill>
+                  <a:srgbClr val="4A5A66"/>
+                </a:solidFill>
+                <a:latin typeface="Calibri"/>
+              </a:rPr>
+              <a:t> +56% → </a:t>
+            </a:r>
+            <a:r>
+              <a:rPr b="1" sz="1500">
+                <a:solidFill>
+                  <a:srgbClr val="1C2B36"/>
+                </a:solidFill>
+                <a:latin typeface="Calibri"/>
+              </a:rPr>
+              <a:t>+24%</a:t>
+            </a:r>
+            <a:r>
+              <a:rPr b="0" sz="1500">
+                <a:solidFill>
+                  <a:srgbClr val="4A5A66"/>
+                </a:solidFill>
+                <a:latin typeface="Calibri"/>
+              </a:rPr>
+              <a:t> — they were implicitly tuned to the training spectrum.</a:t>
             </a:r>
           </a:p>
           <a:p>
@@ -4115,7 +3895,7 @@
                 <a:spcPct val="110000"/>
               </a:lnSpc>
               <a:spcBef>
-                <a:spcPts val="1200"/>
+                <a:spcPts val="1400"/>
               </a:spcBef>
               <a:spcAft>
                 <a:spcPts val="0"/>
@@ -4131,27 +3911,36 @@
               <a:t>—  </a:t>
             </a:r>
             <a:r>
+              <a:rPr b="1" sz="1500">
+                <a:solidFill>
+                  <a:srgbClr val="1C2B36"/>
+                </a:solidFill>
+                <a:latin typeface="Calibri"/>
+              </a:rPr>
+              <a:t>Neural filters hold</a:t>
+            </a:r>
+            <a:r>
               <a:rPr b="0" sz="1500">
                 <a:solidFill>
                   <a:srgbClr val="4A5A66"/>
                 </a:solidFill>
                 <a:latin typeface="Calibri"/>
               </a:rPr>
-              <a:t>TCN (91 ms) &gt; GRU (64 ms) &gt; CNN (15 ms) — result follows directly from context length.</a:t>
-            </a:r>
-          </a:p>
-        </p:txBody>
-      </p:sp>
-      <p:sp>
-        <p:nvSpPr>
-          <p:cNvPr id="11" name="Rounded Rectangle 10"/>
+              <a:t>: CNN +73%, GRU +69%, TCN +67% — they learned the dynamics, not the excitation.</a:t>
+            </a:r>
+          </a:p>
+        </p:txBody>
+      </p:sp>
+      <p:sp>
+        <p:nvSpPr>
+          <p:cNvPr id="7" name="Rounded Rectangle 6"/>
           <p:cNvSpPr/>
           <p:nvPr/>
         </p:nvSpPr>
         <p:spPr>
           <a:xfrm>
-            <a:off x="868680" y="5806440"/>
-            <a:ext cx="10607040" cy="868680"/>
+            <a:off x="5212080" y="1783080"/>
+            <a:ext cx="6126480" cy="2993604"/>
           </a:xfrm>
           <a:prstGeom prst="roundRect">
             <a:avLst>
@@ -4159,11 +3948,11 @@
             </a:avLst>
           </a:prstGeom>
           <a:solidFill>
-            <a:srgbClr val="E7F2F0"/>
+            <a:srgbClr val="FFFFFF"/>
           </a:solidFill>
           <a:ln w="12700">
             <a:solidFill>
-              <a:srgbClr val="E7F2F0"/>
+              <a:srgbClr val="D9D2C4"/>
             </a:solidFill>
           </a:ln>
           <a:effectLst/>
@@ -4190,60 +3979,40 @@
           </a:p>
         </p:txBody>
       </p:sp>
-      <p:sp>
-        <p:nvSpPr>
-          <p:cNvPr id="12" name="Rectangle 11"/>
-          <p:cNvSpPr/>
+      <p:pic>
+        <p:nvPicPr>
+          <p:cNvPr id="8" name="Picture 7" descr="ood_chirp.png"/>
+          <p:cNvPicPr>
+            <a:picLocks noChangeAspect="1"/>
+          </p:cNvPicPr>
           <p:nvPr/>
-        </p:nvSpPr>
-        <p:spPr>
-          <a:xfrm>
-            <a:off x="868680" y="5806440"/>
-            <a:ext cx="38100" cy="868680"/>
+        </p:nvPicPr>
+        <p:blipFill>
+          <a:blip r:embed="rId2"/>
+          <a:stretch>
+            <a:fillRect/>
+          </a:stretch>
+        </p:blipFill>
+        <p:spPr>
+          <a:xfrm>
+            <a:off x="5358384" y="1929384"/>
+            <a:ext cx="5833872" cy="2243796"/>
           </a:xfrm>
           <a:prstGeom prst="rect">
             <a:avLst/>
           </a:prstGeom>
-          <a:solidFill>
-            <a:srgbClr val="2A9D8F"/>
-          </a:solidFill>
-          <a:ln>
-            <a:noFill/>
-          </a:ln>
-          <a:effectLst/>
-        </p:spPr>
-        <p:style>
-          <a:lnRef idx="1">
-            <a:schemeClr val="accent1"/>
-          </a:lnRef>
-          <a:fillRef idx="3">
-            <a:schemeClr val="accent1"/>
-          </a:fillRef>
-          <a:effectRef idx="2">
-            <a:schemeClr val="accent1"/>
-          </a:effectRef>
-          <a:fontRef idx="minor">
-            <a:schemeClr val="lt1"/>
-          </a:fontRef>
-        </p:style>
-        <p:txBody>
-          <a:bodyPr rtlCol="0" anchor="ctr"/>
-          <a:lstStyle/>
-          <a:p>
-            <a:pPr algn="ctr"/>
-          </a:p>
-        </p:txBody>
-      </p:sp>
-      <p:sp>
-        <p:nvSpPr>
-          <p:cNvPr id="13" name="TextBox 12"/>
+        </p:spPr>
+      </p:pic>
+      <p:sp>
+        <p:nvSpPr>
+          <p:cNvPr id="9" name="TextBox 8"/>
           <p:cNvSpPr txBox="1"/>
           <p:nvPr/>
         </p:nvSpPr>
         <p:spPr>
           <a:xfrm>
-            <a:off x="1069848" y="5897880"/>
-            <a:ext cx="10222992" cy="685800"/>
+            <a:off x="5358384" y="4218900"/>
+            <a:ext cx="5833872" cy="457200"/>
           </a:xfrm>
           <a:prstGeom prst="rect">
             <a:avLst/>
@@ -4251,51 +4020,30 @@
           <a:noFill/>
         </p:spPr>
         <p:txBody>
-          <a:bodyPr wrap="square" anchor="ctr" lIns="0" rIns="0" tIns="0" bIns="0">
+          <a:bodyPr wrap="square" anchor="t" lIns="0" rIns="0" tIns="0" bIns="0">
             <a:spAutoFit/>
           </a:bodyPr>
           <a:lstStyle/>
           <a:p>
-            <a:pPr>
+            <a:pPr algn="l">
               <a:lnSpc>
-                <a:spcPct val="112000"/>
+                <a:spcPct val="110000"/>
               </a:lnSpc>
+              <a:spcBef>
+                <a:spcPts val="0"/>
+              </a:spcBef>
+              <a:spcAft>
+                <a:spcPts val="600"/>
+              </a:spcAft>
             </a:pPr>
             <a:r>
-              <a:rPr b="1" sz="1500">
-                <a:solidFill>
-                  <a:srgbClr val="1D3557"/>
-                </a:solidFill>
-                <a:latin typeface="Georgia"/>
-              </a:rPr>
-              <a:t>Next step.  </a:t>
-            </a:r>
-            <a:r>
-              <a:rPr b="0" sz="1500">
+              <a:rPr b="0" sz="1100">
                 <a:solidFill>
                   <a:srgbClr val="4A5A66"/>
                 </a:solidFill>
-                <a:latin typeface="Calibri"/>
-              </a:rPr>
-              <a:t>Reduce the output gap to 0.001 rad so the spring activates — that would stress-test </a:t>
-            </a:r>
-            <a:r>
-              <a:rPr b="1" sz="1500">
-                <a:solidFill>
-                  <a:srgbClr val="1C2B36"/>
-                </a:solidFill>
-                <a:latin typeface="Calibri"/>
-              </a:rPr>
-              <a:t>hysteresis learning</a:t>
-            </a:r>
-            <a:r>
-              <a:rPr b="0" sz="1500">
-                <a:solidFill>
-                  <a:srgbClr val="4A5A66"/>
-                </a:solidFill>
-                <a:latin typeface="Calibri"/>
-              </a:rPr>
-              <a:t> and likely widen the gap between GRU and TCN.</a:t>
+                <a:latin typeface="Consolas"/>
+              </a:rPr>
+              <a:t>Fig. 2 — chirp (OOD) trajectory: GRU tracks truth; Kalman lags.</a:t>
             </a:r>
           </a:p>
         </p:txBody>
@@ -4860,7 +4608,7 @@
                 </a:solidFill>
                 <a:latin typeface="Calibri"/>
               </a:rPr>
-              <a:t>Two-inertia servo ODE, chirp training excitation, multisine test.</a:t>
+              <a:t>Brushed DC motor + vertical rod load; excitation &amp; sensor-noise design.</a:t>
             </a:r>
           </a:p>
         </p:txBody>
@@ -5020,7 +4768,7 @@
                 </a:solidFill>
                 <a:latin typeface="Calibri"/>
               </a:rPr>
-              <a:t>[Friend's section] Sparse identification of motor dynamics.</a:t>
+              <a:t>[Friend's section] Identification of motor dynamics.</a:t>
             </a:r>
           </a:p>
         </p:txBody>
@@ -5158,7 +4906,7 @@
                 </a:solidFill>
                 <a:latin typeface="Georgia"/>
               </a:rPr>
-              <a:t>ML2 — Backlash compensation</a:t>
+              <a:t>ML2 — Speed filtering</a:t>
             </a:r>
           </a:p>
           <a:p>
@@ -5180,7 +4928,7 @@
                 </a:solidFill>
                 <a:latin typeface="Calibri"/>
               </a:rPr>
-              <a:t>GRU, CNN, TCN: per-window normalisation, architectures, results.</a:t>
+              <a:t>Neural filter (GRU / CNN / TCN) vs EMA &amp; Kalman; nonlinear-plant gain.</a:t>
             </a:r>
           </a:p>
         </p:txBody>
@@ -6123,7 +5871,7 @@
                 </a:solidFill>
                 <a:latin typeface="Consolas"/>
               </a:rPr>
-              <a:t>ML2 — FEATURE ENGINEERING</a:t>
+              <a:t>ML2 — SPEED FILTER: TASK &amp; DATA</a:t>
             </a:r>
           </a:p>
         </p:txBody>
@@ -6168,7 +5916,7 @@
                 </a:solidFill>
                 <a:latin typeface="Georgia"/>
               </a:rPr>
-              <a:t>Per-window velocity normalisation.</a:t>
+              <a:t>Denoise the speed of a nonlinear plant.</a:t>
             </a:r>
           </a:p>
         </p:txBody>
@@ -6207,16 +5955,16 @@
                 </a:solidFill>
                 <a:latin typeface="Calibri"/>
               </a:rPr>
-              <a:t>Backlash error ≈ damper lag ∝ motor velocity. The chirp (train) is 2.4× faster than the multisine (test). A fixed </a:t>
-            </a:r>
-            <a:r>
-              <a:rPr b="0" sz="1380">
-                <a:solidFill>
-                  <a:srgbClr val="1D3557"/>
-                </a:solidFill>
-                <a:latin typeface="Consolas"/>
-              </a:rPr>
-              <a:t>error_std</a:t>
+              <a:t>Recover the true motor speed from a noisy speed sensor and the known command voltage. The vertical rod adds a gravity torque </a:t>
+            </a:r>
+            <a:r>
+              <a:rPr b="1" sz="1500">
+                <a:solidFill>
+                  <a:srgbClr val="1C2B36"/>
+                </a:solidFill>
+                <a:latin typeface="Calibri"/>
+              </a:rPr>
+              <a:t>∝ sin θ</a:t>
             </a:r>
             <a:r>
               <a:rPr b="0" sz="1500">
@@ -6225,7 +5973,7 @@
                 </a:solidFill>
                 <a:latin typeface="Calibri"/>
               </a:rPr>
-              <a:t> from training causes 2.3× over-correction on test — all models score </a:t>
+              <a:t>, making the mechanics </a:t>
             </a:r>
             <a:r>
               <a:rPr b="1" sz="1500">
@@ -6234,7 +5982,7 @@
                 </a:solidFill>
                 <a:latin typeface="Calibri"/>
               </a:rPr>
-              <a:t>worse than rigid coupling</a:t>
+              <a:t>nonlinear and state-dependent</a:t>
             </a:r>
             <a:r>
               <a:rPr b="0" sz="1500">
@@ -6243,7 +5991,7 @@
                 </a:solidFill>
                 <a:latin typeface="Calibri"/>
               </a:rPr>
-              <a:t>.</a:t>
+              <a:t> — the property a learned filter can exploit.</a:t>
             </a:r>
           </a:p>
         </p:txBody>
@@ -6256,8 +6004,8 @@
         </p:nvSpPr>
         <p:spPr>
           <a:xfrm>
-            <a:off x="868680" y="2633472"/>
-            <a:ext cx="10607040" cy="1463040"/>
+            <a:off x="868680" y="2788920"/>
+            <a:ext cx="10607040" cy="896112"/>
           </a:xfrm>
           <a:prstGeom prst="roundRect">
             <a:avLst>
@@ -6304,8 +6052,8 @@
         </p:nvSpPr>
         <p:spPr>
           <a:xfrm>
-            <a:off x="868680" y="2633472"/>
-            <a:ext cx="38100" cy="1463040"/>
+            <a:off x="868680" y="2788920"/>
+            <a:ext cx="38100" cy="896112"/>
           </a:xfrm>
           <a:prstGeom prst="rect">
             <a:avLst/>
@@ -6348,8 +6096,8 @@
         </p:nvSpPr>
         <p:spPr>
           <a:xfrm>
-            <a:off x="1069848" y="2743200"/>
-            <a:ext cx="10241280" cy="1280160"/>
+            <a:off x="1069848" y="2898648"/>
+            <a:ext cx="10241280" cy="713232"/>
           </a:xfrm>
           <a:prstGeom prst="rect">
             <a:avLst/>
@@ -6380,7 +6128,7 @@
                 </a:solidFill>
                 <a:latin typeface="Consolas"/>
               </a:rPr>
-              <a:t>local_vel  =  std( diff(enc_m_window) )          ← velocity proxy per window</a:t>
+              <a:t>(J + I_rod)·dω/dt  =  Kt·i − B·ω − m·g·l_cm·sin(θ)     ← gravity = nonlinearity</a:t>
             </a:r>
           </a:p>
           <a:p>
@@ -6402,51 +6150,7 @@
                 </a:solidFill>
                 <a:latin typeface="Consolas"/>
               </a:rPr>
-              <a:t>enc_m_rel[t]  =  (enc_m[t] − enc_m[t₀]) / local_vel   ← input feature</a:t>
-            </a:r>
-          </a:p>
-          <a:p>
-            <a:pPr>
-              <a:lnSpc>
-                <a:spcPct val="115000"/>
-              </a:lnSpc>
-              <a:spcBef>
-                <a:spcPts val="400"/>
-              </a:spcBef>
-              <a:spcAft>
-                <a:spcPts val="0"/>
-              </a:spcAft>
-            </a:pPr>
-            <a:r>
-              <a:rPr b="0" sz="1350">
-                <a:solidFill>
-                  <a:srgbClr val="1D3557"/>
-                </a:solidFill>
-                <a:latin typeface="Consolas"/>
-              </a:rPr>
-              <a:t>y_norm  =  (θ_l − enc_m/N) / (local_vel / N)            ← target</a:t>
-            </a:r>
-          </a:p>
-          <a:p>
-            <a:pPr>
-              <a:lnSpc>
-                <a:spcPct val="115000"/>
-              </a:lnSpc>
-              <a:spcBef>
-                <a:spcPts val="400"/>
-              </a:spcBef>
-              <a:spcAft>
-                <a:spcPts val="0"/>
-              </a:spcAft>
-            </a:pPr>
-            <a:r>
-              <a:rPr b="0" sz="1350">
-                <a:solidFill>
-                  <a:srgbClr val="1D3557"/>
-                </a:solidFill>
-                <a:latin typeface="Consolas"/>
-              </a:rPr>
-              <a:t>pred_error  =  model_output × (local_vel / N)            ← denorm at inference</a:t>
+              <a:t>input   x = [ omega_noisy , voltage ]        target   y = omega_true</a:t>
             </a:r>
           </a:p>
         </p:txBody>
@@ -6459,8 +6163,8 @@
         </p:nvSpPr>
         <p:spPr>
           <a:xfrm>
-            <a:off x="868680" y="4315968"/>
-            <a:ext cx="10607040" cy="1920240"/>
+            <a:off x="868680" y="3977639"/>
+            <a:ext cx="10607040" cy="2377440"/>
           </a:xfrm>
           <a:prstGeom prst="rect">
             <a:avLst/>
@@ -6494,13 +6198,22 @@
               <a:t>—  </a:t>
             </a:r>
             <a:r>
+              <a:rPr b="1" sz="1500">
+                <a:solidFill>
+                  <a:srgbClr val="1C2B36"/>
+                </a:solidFill>
+                <a:latin typeface="Calibri"/>
+              </a:rPr>
+              <a:t>210 trajectories</a:t>
+            </a:r>
+            <a:r>
               <a:rPr b="0" sz="1500">
                 <a:solidFill>
                   <a:srgbClr val="4A5A66"/>
                 </a:solidFill>
                 <a:latin typeface="Calibri"/>
               </a:rPr>
-              <a:t>Both input and target scale with the </a:t>
+              <a:t>, 6 s @ 1 ms, split </a:t>
             </a:r>
             <a:r>
               <a:rPr b="1" sz="1500">
@@ -6509,7 +6222,7 @@
                 </a:solidFill>
                 <a:latin typeface="Calibri"/>
               </a:rPr>
-              <a:t>same local speed</a:t>
+              <a:t>70/15/15 by trajectory</a:t>
             </a:r>
             <a:r>
               <a:rPr b="0" sz="1500">
@@ -6518,7 +6231,7 @@
                 </a:solidFill>
                 <a:latin typeface="Calibri"/>
               </a:rPr>
-              <a:t> — the ratio is constant across train and test.</a:t>
+              <a:t> — no time-step leaks between train and test.</a:t>
             </a:r>
           </a:p>
           <a:p>
@@ -6527,7 +6240,7 @@
                 <a:spcPct val="110000"/>
               </a:lnSpc>
               <a:spcBef>
-                <a:spcPts val="1200"/>
+                <a:spcPts val="1100"/>
               </a:spcBef>
               <a:spcAft>
                 <a:spcPts val="0"/>
@@ -6549,7 +6262,7 @@
                 </a:solidFill>
                 <a:latin typeface="Calibri"/>
               </a:rPr>
-              <a:t>After the fix, normalised-target std ratio train vs test: </a:t>
+              <a:t>Excitation cycles </a:t>
             </a:r>
             <a:r>
               <a:rPr b="1" sz="1500">
@@ -6558,7 +6271,7 @@
                 </a:solidFill>
                 <a:latin typeface="Calibri"/>
               </a:rPr>
-              <a:t>1.06×</a:t>
+              <a:t>step / ramp / random / mixed</a:t>
             </a:r>
             <a:r>
               <a:rPr b="0" sz="1500">
@@ -6567,7 +6280,7 @@
                 </a:solidFill>
                 <a:latin typeface="Calibri"/>
               </a:rPr>
-              <a:t>  (was 2.3×).</a:t>
+              <a:t> bipolar voltage; motor R, J, B jittered ±12% per run.</a:t>
             </a:r>
           </a:p>
           <a:p>
@@ -6576,7 +6289,7 @@
                 <a:spcPct val="110000"/>
               </a:lnSpc>
               <a:spcBef>
-                <a:spcPts val="1200"/>
+                <a:spcPts val="1100"/>
               </a:spcBef>
               <a:spcAft>
                 <a:spcPts val="0"/>
@@ -6598,7 +6311,83 @@
                 </a:solidFill>
                 <a:latin typeface="Calibri"/>
               </a:rPr>
-              <a:t>Window W = 64 steps = 64 ms provides enough velocity history without excessive delay.</a:t>
+              <a:t>Sensor noise std 2–4 rad/s on a </a:t>
+            </a:r>
+            <a:r>
+              <a:rPr b="0" sz="1500">
+                <a:solidFill>
+                  <a:srgbClr val="4A5A66"/>
+                </a:solidFill>
+                <a:latin typeface="Calibri"/>
+              </a:rPr>
+              <a:t>21 rad/s swing → </a:t>
+            </a:r>
+            <a:r>
+              <a:rPr b="1" sz="1500">
+                <a:solidFill>
+                  <a:srgbClr val="1C2B36"/>
+                </a:solidFill>
+                <a:latin typeface="Calibri"/>
+              </a:rPr>
+              <a:t>SNR ≈ 7× (14% noise)</a:t>
+            </a:r>
+            <a:r>
+              <a:rPr b="0" sz="1500">
+                <a:solidFill>
+                  <a:srgbClr val="4A5A66"/>
+                </a:solidFill>
+                <a:latin typeface="Calibri"/>
+              </a:rPr>
+              <a:t>.</a:t>
+            </a:r>
+          </a:p>
+          <a:p>
+            <a:pPr>
+              <a:lnSpc>
+                <a:spcPct val="110000"/>
+              </a:lnSpc>
+              <a:spcBef>
+                <a:spcPts val="1100"/>
+              </a:spcBef>
+              <a:spcAft>
+                <a:spcPts val="0"/>
+              </a:spcAft>
+            </a:pPr>
+            <a:r>
+              <a:rPr sz="1500" b="1">
+                <a:solidFill>
+                  <a:srgbClr val="C99A2E"/>
+                </a:solidFill>
+                <a:latin typeface="Calibri"/>
+              </a:rPr>
+              <a:t>—  </a:t>
+            </a:r>
+            <a:r>
+              <a:rPr b="0" sz="1500">
+                <a:solidFill>
+                  <a:srgbClr val="4A5A66"/>
+                </a:solidFill>
+                <a:latin typeface="Calibri"/>
+              </a:rPr>
+              <a:t>A </a:t>
+            </a:r>
+            <a:r>
+              <a:rPr b="1" sz="1500">
+                <a:solidFill>
+                  <a:srgbClr val="1C2B36"/>
+                </a:solidFill>
+                <a:latin typeface="Calibri"/>
+              </a:rPr>
+              <a:t>chirp</a:t>
+            </a:r>
+            <a:r>
+              <a:rPr b="0" sz="1500">
+                <a:solidFill>
+                  <a:srgbClr val="4A5A66"/>
+                </a:solidFill>
+                <a:latin typeface="Calibri"/>
+              </a:rPr>
+              <a:t> excitation is held out entirely for an out-of-distribution generalisation test.</a:t>
             </a:r>
           </a:p>
         </p:txBody>
@@ -6760,7 +6549,7 @@
                 </a:solidFill>
                 <a:latin typeface="Consolas"/>
               </a:rPr>
-              <a:t>ML2 — MODEL ARCHITECTURES</a:t>
+              <a:t>ML2 — METHODS</a:t>
             </a:r>
           </a:p>
         </p:txBody>
@@ -6805,20 +6594,149 @@
                 </a:solidFill>
                 <a:latin typeface="Georgia"/>
               </a:rPr>
-              <a:t>Three architectures, three context lengths.</a:t>
-            </a:r>
-          </a:p>
-        </p:txBody>
-      </p:sp>
-      <p:sp>
-        <p:nvSpPr>
-          <p:cNvPr id="6" name="Rounded Rectangle 5"/>
+              <a:t>Classical baselines vs learned filters.</a:t>
+            </a:r>
+          </a:p>
+        </p:txBody>
+      </p:sp>
+      <p:sp>
+        <p:nvSpPr>
+          <p:cNvPr id="6" name="TextBox 5"/>
+          <p:cNvSpPr txBox="1"/>
+          <p:nvPr/>
+        </p:nvSpPr>
+        <p:spPr>
+          <a:xfrm>
+            <a:off x="868680" y="1828800"/>
+            <a:ext cx="10607040" cy="603504"/>
+          </a:xfrm>
+          <a:prstGeom prst="rect">
+            <a:avLst/>
+          </a:prstGeom>
+          <a:noFill/>
+        </p:spPr>
+        <p:txBody>
+          <a:bodyPr wrap="square" anchor="t" lIns="0" rIns="0" tIns="0" bIns="0">
+            <a:spAutoFit/>
+          </a:bodyPr>
+          <a:lstStyle/>
+          <a:p>
+            <a:pPr>
+              <a:lnSpc>
+                <a:spcPct val="120000"/>
+              </a:lnSpc>
+            </a:pPr>
+            <a:r>
+              <a:rPr b="0" sz="1500">
+                <a:solidFill>
+                  <a:srgbClr val="4A5A66"/>
+                </a:solidFill>
+                <a:latin typeface="Calibri"/>
+              </a:rPr>
+              <a:t>Baselines tuned on validation, evaluated on test: </a:t>
+            </a:r>
+            <a:r>
+              <a:rPr b="1" sz="1500">
+                <a:solidFill>
+                  <a:srgbClr val="1C2B36"/>
+                </a:solidFill>
+                <a:latin typeface="Calibri"/>
+              </a:rPr>
+              <a:t>EMA</a:t>
+            </a:r>
+            <a:r>
+              <a:rPr b="0" sz="1500">
+                <a:solidFill>
+                  <a:srgbClr val="4A5A66"/>
+                </a:solidFill>
+                <a:latin typeface="Calibri"/>
+              </a:rPr>
+              <a:t> (α tuned) and a steady-state </a:t>
+            </a:r>
+            <a:r>
+              <a:rPr b="1" sz="1500">
+                <a:solidFill>
+                  <a:srgbClr val="1C2B36"/>
+                </a:solidFill>
+                <a:latin typeface="Calibri"/>
+              </a:rPr>
+              <a:t>Kalman</a:t>
+            </a:r>
+            <a:r>
+              <a:rPr b="0" sz="1500">
+                <a:solidFill>
+                  <a:srgbClr val="4A5A66"/>
+                </a:solidFill>
+                <a:latin typeface="Calibri"/>
+              </a:rPr>
+              <a:t> filter on the nominal linear </a:t>
+            </a:r>
+            <a:r>
+              <a:rPr b="0" sz="1380">
+                <a:solidFill>
+                  <a:srgbClr val="1D3557"/>
+                </a:solidFill>
+                <a:latin typeface="Consolas"/>
+              </a:rPr>
+              <a:t>[i, ω]</a:t>
+            </a:r>
+            <a:r>
+              <a:rPr b="0" sz="1500">
+                <a:solidFill>
+                  <a:srgbClr val="4A5A66"/>
+                </a:solidFill>
+                <a:latin typeface="Calibri"/>
+              </a:rPr>
+              <a:t> model — whose model </a:t>
+            </a:r>
+            <a:r>
+              <a:rPr b="1" sz="1500">
+                <a:solidFill>
+                  <a:srgbClr val="1C2B36"/>
+                </a:solidFill>
+                <a:latin typeface="Calibri"/>
+              </a:rPr>
+              <a:t>omits the gravity term</a:t>
+            </a:r>
+            <a:r>
+              <a:rPr b="0" sz="1500">
+                <a:solidFill>
+                  <a:srgbClr val="4A5A66"/>
+                </a:solidFill>
+                <a:latin typeface="Calibri"/>
+              </a:rPr>
+              <a:t>. Three learned filters share the same causal </a:t>
+            </a:r>
+            <a:r>
+              <a:rPr b="1" sz="1500">
+                <a:solidFill>
+                  <a:srgbClr val="1C2B36"/>
+                </a:solidFill>
+                <a:latin typeface="Calibri"/>
+              </a:rPr>
+              <a:t>64 ms</a:t>
+            </a:r>
+            <a:r>
+              <a:rPr b="0" sz="1500">
+                <a:solidFill>
+                  <a:srgbClr val="4A5A66"/>
+                </a:solidFill>
+                <a:latin typeface="Calibri"/>
+              </a:rPr>
+              <a:t> window over [omega_noisy, voltage].</a:t>
+            </a:r>
+          </a:p>
+        </p:txBody>
+      </p:sp>
+      <p:sp>
+        <p:nvSpPr>
+          <p:cNvPr id="7" name="Rounded Rectangle 6"/>
           <p:cNvSpPr/>
           <p:nvPr/>
         </p:nvSpPr>
         <p:spPr>
           <a:xfrm>
-            <a:off x="868680" y="2331720"/>
+            <a:off x="868680" y="2697480"/>
             <a:ext cx="3383280" cy="1874519"/>
           </a:xfrm>
           <a:prstGeom prst="roundRect">
@@ -6860,13 +6778,13 @@
       </p:sp>
       <p:sp>
         <p:nvSpPr>
-          <p:cNvPr id="7" name="Rectangle 6"/>
+          <p:cNvPr id="8" name="Rectangle 7"/>
           <p:cNvSpPr/>
           <p:nvPr/>
         </p:nvSpPr>
         <p:spPr>
           <a:xfrm>
-            <a:off x="868680" y="2331720"/>
+            <a:off x="868680" y="2697480"/>
             <a:ext cx="38100" cy="1874519"/>
           </a:xfrm>
           <a:prstGeom prst="rect">
@@ -6904,13 +6822,13 @@
       </p:sp>
       <p:sp>
         <p:nvSpPr>
-          <p:cNvPr id="8" name="TextBox 7"/>
+          <p:cNvPr id="9" name="TextBox 8"/>
           <p:cNvSpPr txBox="1"/>
           <p:nvPr/>
         </p:nvSpPr>
         <p:spPr>
           <a:xfrm>
-            <a:off x="1069848" y="2496312"/>
+            <a:off x="1069848" y="2862072"/>
             <a:ext cx="3017520" cy="1600199"/>
           </a:xfrm>
           <a:prstGeom prst="rect">
@@ -6986,7 +6904,7 @@
                 </a:solidFill>
                 <a:latin typeface="Calibri"/>
               </a:rPr>
-              <a:t>Recurrent hidden state h accumulates </a:t>
+              <a:t>Recurrent hidden state accumulates </a:t>
             </a:r>
             <a:r>
               <a:rPr b="1" sz="1200">
@@ -7011,13 +6929,13 @@
       </p:sp>
       <p:sp>
         <p:nvSpPr>
-          <p:cNvPr id="9" name="Rounded Rectangle 8"/>
+          <p:cNvPr id="10" name="Rounded Rectangle 9"/>
           <p:cNvSpPr/>
           <p:nvPr/>
         </p:nvSpPr>
         <p:spPr>
           <a:xfrm>
-            <a:off x="4480560" y="2331720"/>
+            <a:off x="4480560" y="2697480"/>
             <a:ext cx="3383280" cy="1874519"/>
           </a:xfrm>
           <a:prstGeom prst="roundRect">
@@ -7059,13 +6977,13 @@
       </p:sp>
       <p:sp>
         <p:nvSpPr>
-          <p:cNvPr id="10" name="Rectangle 9"/>
+          <p:cNvPr id="11" name="Rectangle 10"/>
           <p:cNvSpPr/>
           <p:nvPr/>
         </p:nvSpPr>
         <p:spPr>
           <a:xfrm>
-            <a:off x="4480560" y="2331720"/>
+            <a:off x="4480560" y="2697480"/>
             <a:ext cx="38100" cy="1874519"/>
           </a:xfrm>
           <a:prstGeom prst="rect">
@@ -7103,13 +7021,13 @@
       </p:sp>
       <p:sp>
         <p:nvSpPr>
-          <p:cNvPr id="11" name="TextBox 10"/>
+          <p:cNvPr id="12" name="TextBox 11"/>
           <p:cNvSpPr txBox="1"/>
           <p:nvPr/>
         </p:nvSpPr>
         <p:spPr>
           <a:xfrm>
-            <a:off x="4681728" y="2496312"/>
+            <a:off x="4681728" y="2862072"/>
             <a:ext cx="3017520" cy="1600199"/>
           </a:xfrm>
           <a:prstGeom prst="rect">
@@ -7185,38 +7103,20 @@
                 </a:solidFill>
                 <a:latin typeface="Calibri"/>
               </a:rPr>
-              <a:t>Stack of valid 1-D convolutions. Receptive field = </a:t>
-            </a:r>
-            <a:r>
-              <a:rPr b="1" sz="1200">
-                <a:solidFill>
-                  <a:srgbClr val="1C2B36"/>
-                </a:solidFill>
-                <a:latin typeface="Calibri"/>
-              </a:rPr>
-              <a:t>15 ms</a:t>
-            </a:r>
-            <a:r>
-              <a:rPr b="0" sz="1200">
-                <a:solidFill>
-                  <a:srgbClr val="4A5A66"/>
-                </a:solidFill>
-                <a:latin typeface="Calibri"/>
-              </a:rPr>
-              <a:t>. channels = 32, k = 8, depth = 2.</a:t>
-            </a:r>
-          </a:p>
-        </p:txBody>
-      </p:sp>
-      <p:sp>
-        <p:nvSpPr>
-          <p:cNvPr id="12" name="Rounded Rectangle 11"/>
+              <a:t>Stacked causal 1-D convolutions. channels = 32, k = 8, depth = 2.</a:t>
+            </a:r>
+          </a:p>
+        </p:txBody>
+      </p:sp>
+      <p:sp>
+        <p:nvSpPr>
+          <p:cNvPr id="13" name="Rounded Rectangle 12"/>
           <p:cNvSpPr/>
           <p:nvPr/>
         </p:nvSpPr>
         <p:spPr>
           <a:xfrm>
-            <a:off x="8092440" y="2331720"/>
+            <a:off x="8092440" y="2697480"/>
             <a:ext cx="3383280" cy="1874519"/>
           </a:xfrm>
           <a:prstGeom prst="roundRect">
@@ -7258,13 +7158,13 @@
       </p:sp>
       <p:sp>
         <p:nvSpPr>
-          <p:cNvPr id="13" name="Rectangle 12"/>
+          <p:cNvPr id="14" name="Rectangle 13"/>
           <p:cNvSpPr/>
           <p:nvPr/>
         </p:nvSpPr>
         <p:spPr>
           <a:xfrm>
-            <a:off x="8092440" y="2331720"/>
+            <a:off x="8092440" y="2697480"/>
             <a:ext cx="38100" cy="1874519"/>
           </a:xfrm>
           <a:prstGeom prst="rect">
@@ -7302,13 +7202,13 @@
       </p:sp>
       <p:sp>
         <p:nvSpPr>
-          <p:cNvPr id="14" name="TextBox 13"/>
+          <p:cNvPr id="15" name="TextBox 14"/>
           <p:cNvSpPr txBox="1"/>
           <p:nvPr/>
         </p:nvSpPr>
         <p:spPr>
           <a:xfrm>
-            <a:off x="8293608" y="2496312"/>
+            <a:off x="8293608" y="2862072"/>
             <a:ext cx="3017520" cy="1600199"/>
           </a:xfrm>
           <a:prstGeom prst="rect">
@@ -7409,71 +7309,14 @@
       </p:sp>
       <p:sp>
         <p:nvSpPr>
-          <p:cNvPr id="15" name="TextBox 14"/>
-          <p:cNvSpPr txBox="1"/>
-          <p:nvPr/>
-        </p:nvSpPr>
-        <p:spPr>
-          <a:xfrm>
-            <a:off x="868680" y="4681728"/>
-            <a:ext cx="10607040" cy="502920"/>
-          </a:xfrm>
-          <a:prstGeom prst="rect">
-            <a:avLst/>
-          </a:prstGeom>
-          <a:noFill/>
-        </p:spPr>
-        <p:txBody>
-          <a:bodyPr wrap="square" anchor="t" lIns="0" rIns="0" tIns="0" bIns="0">
-            <a:spAutoFit/>
-          </a:bodyPr>
-          <a:lstStyle/>
-          <a:p>
-            <a:pPr>
-              <a:lnSpc>
-                <a:spcPct val="120000"/>
-              </a:lnSpc>
-            </a:pPr>
-            <a:r>
-              <a:rPr b="0" sz="1400">
-                <a:solidFill>
-                  <a:srgbClr val="4A5A66"/>
-                </a:solidFill>
-                <a:latin typeface="Calibri"/>
-              </a:rPr>
-              <a:t>All models: input </a:t>
-            </a:r>
-            <a:r>
-              <a:rPr b="0" sz="1288">
-                <a:solidFill>
-                  <a:srgbClr val="1D3557"/>
-                </a:solidFill>
-                <a:latin typeface="Consolas"/>
-              </a:rPr>
-              <a:t>(B, 64, 2)</a:t>
-            </a:r>
-            <a:r>
-              <a:rPr b="0" sz="1400">
-                <a:solidFill>
-                  <a:srgbClr val="4A5A66"/>
-                </a:solidFill>
-                <a:latin typeface="Calibri"/>
-              </a:rPr>
-              <a:t> — [enc_m_rel, pwm_norm] — output scalar per-window normalised error. Loss: MSE. Optimiser: Adam lr = 1e-3.</a:t>
-            </a:r>
-          </a:p>
-        </p:txBody>
-      </p:sp>
-      <p:sp>
-        <p:nvSpPr>
           <p:cNvPr id="16" name="Rounded Rectangle 15"/>
           <p:cNvSpPr/>
           <p:nvPr/>
         </p:nvSpPr>
         <p:spPr>
           <a:xfrm>
-            <a:off x="868680" y="5376672"/>
-            <a:ext cx="10607040" cy="804672"/>
+            <a:off x="868680" y="4892040"/>
+            <a:ext cx="10607040" cy="896112"/>
           </a:xfrm>
           <a:prstGeom prst="roundRect">
             <a:avLst>
@@ -7520,14 +7363,14 @@
         </p:nvSpPr>
         <p:spPr>
           <a:xfrm>
-            <a:off x="868680" y="5376672"/>
-            <a:ext cx="38100" cy="804672"/>
+            <a:off x="868680" y="4892040"/>
+            <a:ext cx="38100" cy="896112"/>
           </a:xfrm>
           <a:prstGeom prst="rect">
             <a:avLst/>
           </a:prstGeom>
           <a:solidFill>
-            <a:srgbClr val="E07A5F"/>
+            <a:srgbClr val="1D3557"/>
           </a:solidFill>
           <a:ln>
             <a:noFill/>
@@ -7564,8 +7407,8 @@
         </p:nvSpPr>
         <p:spPr>
           <a:xfrm>
-            <a:off x="1069848" y="5486400"/>
-            <a:ext cx="10241280" cy="621792"/>
+            <a:off x="1069848" y="5001768"/>
+            <a:ext cx="10241280" cy="713232"/>
           </a:xfrm>
           <a:prstGeom prst="rect">
             <a:avLst/>
@@ -7596,7 +7439,7 @@
                 </a:solidFill>
                 <a:latin typeface="Consolas"/>
               </a:rPr>
-              <a:t>RF_CNN  =  (k−1) × depth × 2 + 1  =  15 steps</a:t>
+              <a:t>all learned filters:   x = (B, 64, 2)  →  scalar omega_true</a:t>
             </a:r>
           </a:p>
           <a:p>
@@ -7618,7 +7461,7 @@
                 </a:solidFill>
                 <a:latin typeface="Consolas"/>
               </a:rPr>
-              <a:t>RF_TCN  =  (k−1) × (2^levels − 1) × 2 + 1  =  91 steps</a:t>
+              <a:t>loss = MSE        optimiser = Adam (lr 1e-3)        early stop on val</a:t>
             </a:r>
           </a:p>
         </p:txBody>
@@ -7780,7 +7623,7 @@
                 </a:solidFill>
                 <a:latin typeface="Consolas"/>
               </a:rPr>
-              <a:t>ML2 — RESULTS  (TEST SET, 30 S MULTISINE)</a:t>
+              <a:t>ML2 — RESULTS  (IN-DISTRIBUTION TEST SET)</a:t>
             </a:r>
           </a:p>
         </p:txBody>
@@ -7819,13 +7662,22 @@
               </a:spcAft>
             </a:pPr>
             <a:r>
-              <a:rPr b="1" sz="2800">
+              <a:rPr b="1" sz="2700">
                 <a:solidFill>
                   <a:srgbClr val="1D3557"/>
                 </a:solidFill>
                 <a:latin typeface="Georgia"/>
               </a:rPr>
-              <a:t>TCN +48 %, GRU +29 % vs rigid coupling.</a:t>
+              <a:t>Learned filters cut error </a:t>
+            </a:r>
+            <a:r>
+              <a:rPr b="1" sz="2700">
+                <a:solidFill>
+                  <a:srgbClr val="1D3557"/>
+                </a:solidFill>
+                <a:latin typeface="Georgia"/>
+              </a:rPr>
+              <a:t>51% below Kalman.</a:t>
             </a:r>
           </a:p>
         </p:txBody>
@@ -7840,7 +7692,7 @@
         </p:nvGraphicFramePr>
         <p:xfrm>
           <a:off x="868680" y="2011680"/>
-          <a:ext cx="10607040" cy="2057400"/>
+          <a:ext cx="10607040" cy="2468880"/>
         </p:xfrm>
         <a:graphic>
           <a:graphicData uri="http://schemas.openxmlformats.org/drawingml/2006/table">
@@ -7865,7 +7717,7 @@
                           </a:solidFill>
                           <a:latin typeface="Consolas"/>
                         </a:rPr>
-                        <a:t>Rigid coupling  —  enc_m / N</a:t>
+                        <a:t>Raw  —  no filter</a:t>
                       </a:r>
                     </a:p>
                   </a:txBody>
@@ -7887,7 +7739,7 @@
                           </a:solidFill>
                           <a:latin typeface="Calibri"/>
                         </a:rPr>
-                        <a:t>RMSE  0.102 mrad   (0.0058°)    —   reference</a:t>
+                        <a:t>RMSE  2.97 rad/s   (28.3 RPM)    —   reference</a:t>
                       </a:r>
                     </a:p>
                   </a:txBody>
@@ -7911,7 +7763,7 @@
                           </a:solidFill>
                           <a:latin typeface="Consolas"/>
                         </a:rPr>
-                        <a:t>Output encoder  —  enc_o</a:t>
+                        <a:t>MA  —  window 64</a:t>
                       </a:r>
                     </a:p>
                   </a:txBody>
@@ -7933,7 +7785,7 @@
                           </a:solidFill>
                           <a:latin typeface="Calibri"/>
                         </a:rPr>
-                        <a:t>RMSE  0.323 mrad   (0.0185°)   −217 %</a:t>
+                        <a:t>RMSE  3.00 rad/s   (28.6 RPM)   −1 %   (just lag)</a:t>
                       </a:r>
                     </a:p>
                   </a:txBody>
@@ -7957,7 +7809,7 @@
                           </a:solidFill>
                           <a:latin typeface="Consolas"/>
                         </a:rPr>
-                        <a:t>CNN  —  valid conv, RF = 15 ms</a:t>
+                        <a:t>Kalman  —  tuned, linear model</a:t>
                       </a:r>
                     </a:p>
                   </a:txBody>
@@ -7979,7 +7831,99 @@
                           </a:solidFill>
                           <a:latin typeface="Calibri"/>
                         </a:rPr>
-                        <a:t>RMSE  0.117 mrad   (0.0067°)   −14.8 %</a:t>
+                        <a:t>RMSE  1.32 rad/s   (12.6 RPM)   +56 %</a:t>
+                      </a:r>
+                    </a:p>
+                  </a:txBody>
+                  <a:tcPr marL="73152" marT="27432" marB="27432" anchor="ctr">
+                    <a:solidFill>
+                      <a:srgbClr val="FBFAF6"/>
+                    </a:solidFill>
+                  </a:tcPr>
+                </a:tc>
+              </a:tr>
+              <a:tr h="411480">
+                <a:tc>
+                  <a:txBody>
+                    <a:bodyPr/>
+                    <a:lstStyle/>
+                    <a:p>
+                      <a:r>
+                        <a:rPr b="0" sz="1200">
+                          <a:solidFill>
+                            <a:srgbClr val="1D3557"/>
+                          </a:solidFill>
+                          <a:latin typeface="Consolas"/>
+                        </a:rPr>
+                        <a:t>EMA  —  tuned α</a:t>
+                      </a:r>
+                    </a:p>
+                  </a:txBody>
+                  <a:tcPr marL="73152" marT="27432" marB="27432" anchor="ctr">
+                    <a:solidFill>
+                      <a:srgbClr val="FBFAF6"/>
+                    </a:solidFill>
+                  </a:tcPr>
+                </a:tc>
+                <a:tc>
+                  <a:txBody>
+                    <a:bodyPr/>
+                    <a:lstStyle/>
+                    <a:p>
+                      <a:r>
+                        <a:rPr b="0" sz="1300">
+                          <a:solidFill>
+                            <a:srgbClr val="4A5A66"/>
+                          </a:solidFill>
+                          <a:latin typeface="Calibri"/>
+                        </a:rPr>
+                        <a:t>RMSE  1.07 rad/s   (10.2 RPM)   +64 %</a:t>
+                      </a:r>
+                    </a:p>
+                  </a:txBody>
+                  <a:tcPr marL="73152" marT="27432" marB="27432" anchor="ctr">
+                    <a:solidFill>
+                      <a:srgbClr val="FBFAF6"/>
+                    </a:solidFill>
+                  </a:tcPr>
+                </a:tc>
+              </a:tr>
+              <a:tr h="411480">
+                <a:tc>
+                  <a:txBody>
+                    <a:bodyPr/>
+                    <a:lstStyle/>
+                    <a:p>
+                      <a:r>
+                        <a:rPr b="0" sz="1200">
+                          <a:solidFill>
+                            <a:srgbClr val="1D3557"/>
+                          </a:solidFill>
+                          <a:latin typeface="Consolas"/>
+                        </a:rPr>
+                        <a:t>CNN</a:t>
+                      </a:r>
+                    </a:p>
+                  </a:txBody>
+                  <a:tcPr marL="73152" marT="27432" marB="27432" anchor="ctr">
+                    <a:solidFill>
+                      <a:srgbClr val="FBFAF6"/>
+                    </a:solidFill>
+                  </a:tcPr>
+                </a:tc>
+                <a:tc>
+                  <a:txBody>
+                    <a:bodyPr/>
+                    <a:lstStyle/>
+                    <a:p>
+                      <a:r>
+                        <a:rPr b="0" sz="1300">
+                          <a:solidFill>
+                            <a:srgbClr val="4A5A66"/>
+                          </a:solidFill>
+                          <a:latin typeface="Calibri"/>
+                        </a:rPr>
+                        <a:t>RMSE  0.80 rad/s   ( 7.6 RPM)   +73 %</a:t>
                       </a:r>
                     </a:p>
                   </a:txBody>
@@ -8012,7 +7956,16 @@
                           </a:solidFill>
                           <a:latin typeface="Consolas"/>
                         </a:rPr>
-                        <a:t>  —  W = 64 ms, hidden 32</a:t>
+                        <a:t>  /  </a:t>
+                      </a:r>
+                      <a:r>
+                        <a:rPr b="1" sz="1200">
+                          <a:solidFill>
+                            <a:srgbClr val="1C2B36"/>
+                          </a:solidFill>
+                          <a:latin typeface="Consolas"/>
+                        </a:rPr>
+                        <a:t>TCN 🏆</a:t>
                       </a:r>
                     </a:p>
                   </a:txBody>
@@ -8034,7 +7987,7 @@
                           </a:solidFill>
                           <a:latin typeface="Calibri"/>
                         </a:rPr>
-                        <a:t>RMSE  0.072 mrad   (0.0041°)   </a:t>
+                        <a:t>RMSE  </a:t>
                       </a:r>
                       <a:r>
                         <a:rPr b="1" sz="1300">
@@ -8043,54 +7996,8 @@
                           </a:solidFill>
                           <a:latin typeface="Calibri"/>
                         </a:rPr>
-                        <a:t>+29.4 %</a:t>
+                        <a:t>0.65 rad/s</a:t>
                       </a:r>
-                    </a:p>
-                  </a:txBody>
-                  <a:tcPr marL="73152" marT="27432" marB="27432" anchor="ctr">
-                    <a:solidFill>
-                      <a:srgbClr val="FBFAF6"/>
-                    </a:solidFill>
-                  </a:tcPr>
-                </a:tc>
-              </a:tr>
-              <a:tr h="411480">
-                <a:tc>
-                  <a:txBody>
-                    <a:bodyPr/>
-                    <a:lstStyle/>
-                    <a:p>
-                      <a:r>
-                        <a:rPr b="1" sz="1200">
-                          <a:solidFill>
-                            <a:srgbClr val="1C2B36"/>
-                          </a:solidFill>
-                          <a:latin typeface="Consolas"/>
-                        </a:rPr>
-                        <a:t>TCN 🏆</a:t>
-                      </a:r>
-                      <a:r>
-                        <a:rPr b="0" sz="1200">
-                          <a:solidFill>
-                            <a:srgbClr val="1D3557"/>
-                          </a:solidFill>
-                          <a:latin typeface="Consolas"/>
-                        </a:rPr>
-                        <a:t>  —  dilated, RF = 91 ms</a:t>
-                      </a:r>
-                    </a:p>
-                  </a:txBody>
-                  <a:tcPr marL="73152" marT="27432" marB="27432" anchor="ctr">
-                    <a:solidFill>
-                      <a:srgbClr val="FBFAF6"/>
-                    </a:solidFill>
-                  </a:tcPr>
-                </a:tc>
-                <a:tc>
-                  <a:txBody>
-                    <a:bodyPr/>
-                    <a:lstStyle/>
-                    <a:p>
                       <a:r>
                         <a:rPr b="0" sz="1300">
                           <a:solidFill>
@@ -8098,7 +8005,7 @@
                           </a:solidFill>
                           <a:latin typeface="Calibri"/>
                         </a:rPr>
-                        <a:t>RMSE  0.052 mrad   (0.0030°)   </a:t>
+                        <a:t>   ( 6.2 RPM)   </a:t>
                       </a:r>
                       <a:r>
                         <a:rPr b="1" sz="1300">
@@ -8107,7 +8014,7 @@
                           </a:solidFill>
                           <a:latin typeface="Calibri"/>
                         </a:rPr>
-                        <a:t>+48.4 %</a:t>
+                        <a:t>+78 %</a:t>
                       </a:r>
                     </a:p>
                   </a:txBody>
@@ -8130,8 +8037,8 @@
         </p:nvSpPr>
         <p:spPr>
           <a:xfrm>
-            <a:off x="868680" y="4526280"/>
-            <a:ext cx="10607040" cy="868680"/>
+            <a:off x="868680" y="4892040"/>
+            <a:ext cx="10607040" cy="1005840"/>
           </a:xfrm>
           <a:prstGeom prst="roundRect">
             <a:avLst>
@@ -8178,8 +8085,8 @@
         </p:nvSpPr>
         <p:spPr>
           <a:xfrm>
-            <a:off x="868680" y="4526280"/>
-            <a:ext cx="38100" cy="868680"/>
+            <a:off x="868680" y="4892040"/>
+            <a:ext cx="38100" cy="1005840"/>
           </a:xfrm>
           <a:prstGeom prst="rect">
             <a:avLst/>
@@ -8222,8 +8129,8 @@
         </p:nvSpPr>
         <p:spPr>
           <a:xfrm>
-            <a:off x="1069848" y="4617720"/>
-            <a:ext cx="10222992" cy="685800"/>
+            <a:off x="1069848" y="4983480"/>
+            <a:ext cx="10222992" cy="822960"/>
           </a:xfrm>
           <a:prstGeom prst="rect">
             <a:avLst/>
@@ -8248,7 +8155,7 @@
                 </a:solidFill>
                 <a:latin typeface="Georgia"/>
               </a:rPr>
-              <a:t>Why CNN fails.  </a:t>
+              <a:t>Model-based ≠ better.  </a:t>
             </a:r>
             <a:r>
               <a:rPr b="0" sz="1500">
@@ -8257,7 +8164,7 @@
                 </a:solidFill>
                 <a:latin typeface="Calibri"/>
               </a:rPr>
-              <a:t>Its 15 ms receptive field cannot estimate velocity from a </a:t>
+              <a:t>The tuned linear </a:t>
             </a:r>
             <a:r>
               <a:rPr b="1" sz="1500">
@@ -8266,7 +8173,7 @@
                 </a:solidFill>
                 <a:latin typeface="Calibri"/>
               </a:rPr>
-              <a:t>noisy quantised encoder</a:t>
+              <a:t>Kalman (1.32)</a:t>
             </a:r>
             <a:r>
               <a:rPr b="0" sz="1500">
@@ -8275,64 +8182,25 @@
                 </a:solidFill>
                 <a:latin typeface="Calibri"/>
               </a:rPr>
-              <a:t>. GRU (64 ms) and TCN (91 ms) are long enough to smooth the quantisation noise and measure velocity accurately.</a:t>
-            </a:r>
-          </a:p>
-        </p:txBody>
-      </p:sp>
-      <p:sp>
-        <p:nvSpPr>
-          <p:cNvPr id="10" name="TextBox 9"/>
-          <p:cNvSpPr txBox="1"/>
-          <p:nvPr/>
-        </p:nvSpPr>
-        <p:spPr>
-          <a:xfrm>
-            <a:off x="868680" y="5623560"/>
-            <a:ext cx="10607040" cy="731520"/>
-          </a:xfrm>
-          <a:prstGeom prst="rect">
-            <a:avLst/>
-          </a:prstGeom>
-          <a:noFill/>
-        </p:spPr>
-        <p:txBody>
-          <a:bodyPr wrap="square" anchor="t" lIns="0" rIns="0" tIns="0" bIns="0">
-            <a:spAutoFit/>
-          </a:bodyPr>
-          <a:lstStyle/>
-          <a:p>
-            <a:pPr>
-              <a:lnSpc>
-                <a:spcPct val="120000"/>
-              </a:lnSpc>
-            </a:pPr>
-            <a:r>
-              <a:rPr b="0" sz="1400">
+              <a:t> actually loses to a plain tuned </a:t>
+            </a:r>
+            <a:r>
+              <a:rPr b="1" sz="1500">
+                <a:solidFill>
+                  <a:srgbClr val="1C2B36"/>
+                </a:solidFill>
+                <a:latin typeface="Calibri"/>
+              </a:rPr>
+              <a:t>EMA (1.07)</a:t>
+            </a:r>
+            <a:r>
+              <a:rPr b="0" sz="1500">
                 <a:solidFill>
                   <a:srgbClr val="4A5A66"/>
                 </a:solidFill>
                 <a:latin typeface="Calibri"/>
               </a:rPr>
-              <a:t>Error is </a:t>
-            </a:r>
-            <a:r>
-              <a:rPr b="1" sz="1400">
-                <a:solidFill>
-                  <a:srgbClr val="1C2B36"/>
-                </a:solidFill>
-                <a:latin typeface="Calibri"/>
-              </a:rPr>
-              <a:t>damper-induced lag</a:t>
-            </a:r>
-            <a:r>
-              <a:rPr b="0" sz="1400">
-                <a:solidFill>
-                  <a:srgbClr val="4A5A66"/>
-                </a:solidFill>
-                <a:latin typeface="Calibri"/>
-              </a:rPr>
-              <a:t> proportional to motor velocity. A longer context gives a better velocity estimate — which directly explains the receptive-field ordering.</a:t>
+              <a:t>: its linear model can't represent the rod's gravity torque, so its model-mismatch outweighs its model-based advantage.</a:t>
             </a:r>
           </a:p>
         </p:txBody>
@@ -8494,7 +8362,7 @@
                 </a:solidFill>
                 <a:latin typeface="Consolas"/>
               </a:rPr>
-              <a:t>ML2 — COMPARISON FIGURE  (ZOOM 2–5 S)</a:t>
+              <a:t>ML2 — COMPARISON</a:t>
             </a:r>
           </a:p>
         </p:txBody>
@@ -8533,13 +8401,13 @@
               </a:spcAft>
             </a:pPr>
             <a:r>
-              <a:rPr b="1" sz="2700">
+              <a:rPr b="1" sz="2600">
                 <a:solidFill>
                   <a:srgbClr val="1D3557"/>
                 </a:solidFill>
                 <a:latin typeface="Georgia"/>
               </a:rPr>
-              <a:t>TCN tracks the true backlash error closely.</a:t>
+              <a:t>Every neural filter beats every classical one.</a:t>
             </a:r>
           </a:p>
         </p:txBody>
@@ -8552,8 +8420,8 @@
         </p:nvSpPr>
         <p:spPr>
           <a:xfrm>
-            <a:off x="868680" y="2011680"/>
-            <a:ext cx="4114800" cy="2286000"/>
+            <a:off x="868680" y="1965960"/>
+            <a:ext cx="4114800" cy="2377440"/>
           </a:xfrm>
           <a:prstGeom prst="rect">
             <a:avLst/>
@@ -8593,7 +8461,7 @@
                 </a:solidFill>
                 <a:latin typeface="Calibri"/>
               </a:rPr>
-              <a:t>True backlash error (dashed) stays within </a:t>
+              <a:t>A 64-sample </a:t>
             </a:r>
             <a:r>
               <a:rPr b="1" sz="1500">
@@ -8602,7 +8470,7 @@
                 </a:solidFill>
                 <a:latin typeface="Calibri"/>
               </a:rPr>
-              <a:t>±0.6 mrad</a:t>
+              <a:t>moving average barely helps</a:t>
             </a:r>
             <a:r>
               <a:rPr b="0" sz="1500">
@@ -8611,7 +8479,7 @@
                 </a:solidFill>
                 <a:latin typeface="Calibri"/>
               </a:rPr>
-              <a:t> — damper lag, not dead-zone hysteresis.</a:t>
+              <a:t> — the rod swings fast enough that its lag cancels its smoothing.</a:t>
             </a:r>
           </a:p>
           <a:p>
@@ -8620,7 +8488,7 @@
                 <a:spcPct val="110000"/>
               </a:lnSpc>
               <a:spcBef>
-                <a:spcPts val="1300"/>
+                <a:spcPts val="1400"/>
               </a:spcBef>
               <a:spcAft>
                 <a:spcPts val="0"/>
@@ -8629,38 +8497,29 @@
             <a:r>
               <a:rPr sz="1500" b="1">
                 <a:solidFill>
-                  <a:srgbClr val="2A9D8F"/>
+                  <a:srgbClr val="E07A5F"/>
                 </a:solidFill>
                 <a:latin typeface="Calibri"/>
               </a:rPr>
               <a:t>—  </a:t>
             </a:r>
             <a:r>
+              <a:rPr b="1" sz="1500">
+                <a:solidFill>
+                  <a:srgbClr val="1C2B36"/>
+                </a:solidFill>
+                <a:latin typeface="Calibri"/>
+              </a:rPr>
+              <a:t>EMA and Kalman</a:t>
+            </a:r>
+            <a:r>
               <a:rPr b="0" sz="1500">
                 <a:solidFill>
                   <a:srgbClr val="4A5A66"/>
                 </a:solidFill>
                 <a:latin typeface="Calibri"/>
               </a:rPr>
-              <a:t>TCN </a:t>
-            </a:r>
-            <a:r>
-              <a:rPr b="1" sz="1500">
-                <a:solidFill>
-                  <a:srgbClr val="1C2B36"/>
-                </a:solidFill>
-                <a:latin typeface="Calibri"/>
-              </a:rPr>
-              <a:t>follows the oscillation</a:t>
-            </a:r>
-            <a:r>
-              <a:rPr b="0" sz="1500">
-                <a:solidFill>
-                  <a:srgbClr val="4A5A66"/>
-                </a:solidFill>
-                <a:latin typeface="Calibri"/>
-              </a:rPr>
-              <a:t>; GRU close behind; CNN adds noise instead of removing it.</a:t>
+              <a:t> land at 1.1–1.3 rad/s — a useful but limited linear fit.</a:t>
             </a:r>
           </a:p>
           <a:p>
@@ -8669,7 +8528,7 @@
                 <a:spcPct val="110000"/>
               </a:lnSpc>
               <a:spcBef>
-                <a:spcPts val="1300"/>
+                <a:spcPts val="1400"/>
               </a:spcBef>
               <a:spcAft>
                 <a:spcPts val="0"/>
@@ -8678,38 +8537,38 @@
             <a:r>
               <a:rPr sz="1500" b="1">
                 <a:solidFill>
-                  <a:srgbClr val="E07A5F"/>
+                  <a:srgbClr val="2A9D8F"/>
                 </a:solidFill>
                 <a:latin typeface="Calibri"/>
               </a:rPr>
               <a:t>—  </a:t>
             </a:r>
             <a:r>
+              <a:rPr b="1" sz="1500">
+                <a:solidFill>
+                  <a:srgbClr val="1C2B36"/>
+                </a:solidFill>
+                <a:latin typeface="Calibri"/>
+              </a:rPr>
+              <a:t>GRU / TCN reach 0.65 rad/s</a:t>
+            </a:r>
+            <a:r>
               <a:rPr b="0" sz="1500">
                 <a:solidFill>
                   <a:srgbClr val="4A5A66"/>
                 </a:solidFill>
                 <a:latin typeface="Calibri"/>
               </a:rPr>
-              <a:t>Rigid coupling error oscillates in phase with motor velocity — confirming the </a:t>
-            </a:r>
-            <a:r>
-              <a:rPr b="1" sz="1500">
-                <a:solidFill>
-                  <a:srgbClr val="1C2B36"/>
+              <a:t> — a 78% cut from the raw sensor and </a:t>
+            </a:r>
+            <a:r>
+              <a:rPr b="0" sz="1500">
+                <a:solidFill>
+                  <a:srgbClr val="4A5A66"/>
                 </a:solidFill>
                 <a:latin typeface="Calibri"/>
               </a:rPr>
-              <a:t>v-proportional</a:t>
-            </a:r>
-            <a:r>
-              <a:rPr b="0" sz="1500">
-                <a:solidFill>
-                  <a:srgbClr val="4A5A66"/>
-                </a:solidFill>
-                <a:latin typeface="Calibri"/>
-              </a:rPr>
-              <a:t> mechanism.</a:t>
+              <a:t>51% below the tuned Kalman.</a:t>
             </a:r>
           </a:p>
         </p:txBody>
@@ -8722,8 +8581,8 @@
         </p:nvSpPr>
         <p:spPr>
           <a:xfrm>
-            <a:off x="5212080" y="1234440"/>
-            <a:ext cx="6126480" cy="3685427"/>
+            <a:off x="5212080" y="1554480"/>
+            <a:ext cx="6126480" cy="3990848"/>
           </a:xfrm>
           <a:prstGeom prst="roundRect">
             <a:avLst>
@@ -8764,7 +8623,7 @@
       </p:sp>
       <p:pic>
         <p:nvPicPr>
-          <p:cNvPr id="8" name="Picture 7" descr="comparison_backlash_zoom.png"/>
+          <p:cNvPr id="8" name="Picture 7" descr="comparison_rmse.png"/>
           <p:cNvPicPr>
             <a:picLocks noChangeAspect="1"/>
           </p:cNvPicPr>
@@ -8778,8 +8637,8 @@
         </p:blipFill>
         <p:spPr>
           <a:xfrm>
-            <a:off x="5358384" y="1380744"/>
-            <a:ext cx="5833872" cy="2935619"/>
+            <a:off x="5358384" y="1700784"/>
+            <a:ext cx="5833872" cy="3241040"/>
           </a:xfrm>
           <a:prstGeom prst="rect">
             <a:avLst/>
@@ -8794,7 +8653,7 @@
         </p:nvSpPr>
         <p:spPr>
           <a:xfrm>
-            <a:off x="5358384" y="4362083"/>
+            <a:off x="5358384" y="4987544"/>
             <a:ext cx="5833872" cy="457200"/>
           </a:xfrm>
           <a:prstGeom prst="rect">
@@ -8826,7 +8685,7 @@
                 </a:solidFill>
                 <a:latin typeface="Consolas"/>
               </a:rPr>
-              <a:t>Fig. 1 — backlash residual and estimation error, zoom 2–5 s (test set, multisine).</a:t>
+              <a:t>Fig. 1 — test-set RMSE by method (motor + rod, lower is better).</a:t>
             </a:r>
           </a:p>
         </p:txBody>

--- a/presentation.pptx
+++ b/presentation.pptx
@@ -11,11 +11,6 @@
     <p:sldId id="259" r:id="rId10"/>
     <p:sldId id="260" r:id="rId11"/>
     <p:sldId id="261" r:id="rId12"/>
-    <p:sldId id="262" r:id="rId13"/>
-    <p:sldId id="263" r:id="rId14"/>
-    <p:sldId id="264" r:id="rId15"/>
-    <p:sldId id="265" r:id="rId16"/>
-    <p:sldId id="266" r:id="rId17"/>
   </p:sldIdLst>
   <p:sldSz cx="12191695" cy="6858000" type="screen4x3"/>
   <p:notesSz cx="6858000" cy="9144000"/>
@@ -3202,7 +3197,7 @@
         </p:nvSpPr>
         <p:spPr>
           <a:xfrm>
-            <a:off x="868680" y="822960"/>
+            <a:off x="868680" y="548640"/>
             <a:ext cx="10607040" cy="320040"/>
           </a:xfrm>
           <a:prstGeom prst="rect">
@@ -3228,7 +3223,7 @@
                 </a:solidFill>
                 <a:latin typeface="Consolas"/>
               </a:rPr>
-              <a:t>AI IN ELECTRICAL ENGINEERING</a:t>
+              <a:t>TABLE OF CONTENTS</a:t>
             </a:r>
           </a:p>
         </p:txBody>
@@ -3241,454 +3236,7 @@
         </p:nvSpPr>
         <p:spPr>
           <a:xfrm>
-            <a:off x="868680" y="1280160"/>
-            <a:ext cx="7589520" cy="1828800"/>
-          </a:xfrm>
-          <a:prstGeom prst="rect">
-            <a:avLst/>
-          </a:prstGeom>
-          <a:noFill/>
-        </p:spPr>
-        <p:txBody>
-          <a:bodyPr wrap="square" anchor="t" lIns="0" rIns="0" tIns="0" bIns="0">
-            <a:spAutoFit/>
-          </a:bodyPr>
-          <a:lstStyle/>
-          <a:p>
-            <a:pPr algn="l">
-              <a:lnSpc>
-                <a:spcPct val="104000"/>
-              </a:lnSpc>
-              <a:spcBef>
-                <a:spcPts val="0"/>
-              </a:spcBef>
-              <a:spcAft>
-                <a:spcPts val="600"/>
-              </a:spcAft>
-            </a:pPr>
-            <a:r>
-              <a:rPr b="1" sz="3800">
-                <a:solidFill>
-                  <a:srgbClr val="1D3557"/>
-                </a:solidFill>
-                <a:latin typeface="Georgia"/>
-              </a:rPr>
-              <a:t>[Presentation title]</a:t>
-            </a:r>
-          </a:p>
-        </p:txBody>
-      </p:sp>
-      <p:sp>
-        <p:nvSpPr>
-          <p:cNvPr id="6" name="TextBox 5"/>
-          <p:cNvSpPr txBox="1"/>
-          <p:nvPr/>
-        </p:nvSpPr>
-        <p:spPr>
-          <a:xfrm>
-            <a:off x="868680" y="3017520"/>
-            <a:ext cx="6858000" cy="640080"/>
-          </a:xfrm>
-          <a:prstGeom prst="rect">
-            <a:avLst/>
-          </a:prstGeom>
-          <a:noFill/>
-        </p:spPr>
-        <p:txBody>
-          <a:bodyPr wrap="square" anchor="t" lIns="0" rIns="0" tIns="0" bIns="0">
-            <a:spAutoFit/>
-          </a:bodyPr>
-          <a:lstStyle/>
-          <a:p>
-            <a:pPr>
-              <a:lnSpc>
-                <a:spcPct val="120000"/>
-              </a:lnSpc>
-            </a:pPr>
-            <a:r>
-              <a:rPr b="0" sz="1800">
-                <a:solidFill>
-                  <a:srgbClr val="4A5A66"/>
-                </a:solidFill>
-                <a:latin typeface="Calibri"/>
-              </a:rPr>
-              <a:t>[Short subtitle — one sentence describing the project]</a:t>
-            </a:r>
-          </a:p>
-        </p:txBody>
-      </p:sp>
-      <p:sp>
-        <p:nvSpPr>
-          <p:cNvPr id="7" name="TextBox 6"/>
-          <p:cNvSpPr txBox="1"/>
-          <p:nvPr/>
-        </p:nvSpPr>
-        <p:spPr>
-          <a:xfrm>
-            <a:off x="868680" y="4069080"/>
-            <a:ext cx="2560320" cy="731520"/>
-          </a:xfrm>
-          <a:prstGeom prst="rect">
-            <a:avLst/>
-          </a:prstGeom>
-          <a:noFill/>
-        </p:spPr>
-        <p:txBody>
-          <a:bodyPr wrap="square" anchor="t" lIns="0" rIns="0" tIns="0" bIns="0">
-            <a:spAutoFit/>
-          </a:bodyPr>
-          <a:lstStyle/>
-          <a:p>
-            <a:pPr algn="l">
-              <a:lnSpc>
-                <a:spcPct val="112000"/>
-              </a:lnSpc>
-              <a:spcBef>
-                <a:spcPts val="0"/>
-              </a:spcBef>
-              <a:spcAft>
-                <a:spcPts val="200"/>
-              </a:spcAft>
-            </a:pPr>
-            <a:r>
-              <a:rPr b="1" sz="1200">
-                <a:solidFill>
-                  <a:srgbClr val="1D3557"/>
-                </a:solidFill>
-                <a:latin typeface="Consolas"/>
-              </a:rPr>
-              <a:t>[Author 1]  ·  [Author 2]</a:t>
-            </a:r>
-          </a:p>
-          <a:p>
-            <a:pPr algn="l">
-              <a:lnSpc>
-                <a:spcPct val="110000"/>
-              </a:lnSpc>
-              <a:spcBef>
-                <a:spcPts val="0"/>
-              </a:spcBef>
-              <a:spcAft>
-                <a:spcPts val="600"/>
-              </a:spcAft>
-            </a:pPr>
-            <a:r>
-              <a:rPr b="0" sz="1100">
-                <a:solidFill>
-                  <a:srgbClr val="4A5A66"/>
-                </a:solidFill>
-                <a:latin typeface="Consolas"/>
-              </a:rPr>
-              <a:t>[Author 3]  ·  [Author 4]</a:t>
-            </a:r>
-          </a:p>
-        </p:txBody>
-      </p:sp>
-      <p:sp>
-        <p:nvSpPr>
-          <p:cNvPr id="8" name="TextBox 7"/>
-          <p:cNvSpPr txBox="1"/>
-          <p:nvPr/>
-        </p:nvSpPr>
-        <p:spPr>
-          <a:xfrm>
-            <a:off x="3611880" y="4069080"/>
-            <a:ext cx="2560320" cy="731520"/>
-          </a:xfrm>
-          <a:prstGeom prst="rect">
-            <a:avLst/>
-          </a:prstGeom>
-          <a:noFill/>
-        </p:spPr>
-        <p:txBody>
-          <a:bodyPr wrap="square" anchor="t" lIns="0" rIns="0" tIns="0" bIns="0">
-            <a:spAutoFit/>
-          </a:bodyPr>
-          <a:lstStyle/>
-          <a:p>
-            <a:pPr algn="l">
-              <a:lnSpc>
-                <a:spcPct val="112000"/>
-              </a:lnSpc>
-              <a:spcBef>
-                <a:spcPts val="0"/>
-              </a:spcBef>
-              <a:spcAft>
-                <a:spcPts val="200"/>
-              </a:spcAft>
-            </a:pPr>
-            <a:r>
-              <a:rPr b="1" sz="1200">
-                <a:solidFill>
-                  <a:srgbClr val="1D3557"/>
-                </a:solidFill>
-                <a:latin typeface="Consolas"/>
-              </a:rPr>
-              <a:t>Course</a:t>
-            </a:r>
-          </a:p>
-          <a:p>
-            <a:pPr algn="l">
-              <a:lnSpc>
-                <a:spcPct val="110000"/>
-              </a:lnSpc>
-              <a:spcBef>
-                <a:spcPts val="0"/>
-              </a:spcBef>
-              <a:spcAft>
-                <a:spcPts val="600"/>
-              </a:spcAft>
-            </a:pPr>
-            <a:r>
-              <a:rPr b="0" sz="1100">
-                <a:solidFill>
-                  <a:srgbClr val="4A5A66"/>
-                </a:solidFill>
-                <a:latin typeface="Consolas"/>
-              </a:rPr>
-              <a:t>AI in Electrical Engineering</a:t>
-            </a:r>
-          </a:p>
-        </p:txBody>
-      </p:sp>
-      <p:sp>
-        <p:nvSpPr>
-          <p:cNvPr id="9" name="TextBox 8"/>
-          <p:cNvSpPr txBox="1"/>
-          <p:nvPr/>
-        </p:nvSpPr>
-        <p:spPr>
-          <a:xfrm>
-            <a:off x="6355080" y="4069080"/>
-            <a:ext cx="2560320" cy="731520"/>
-          </a:xfrm>
-          <a:prstGeom prst="rect">
-            <a:avLst/>
-          </a:prstGeom>
-          <a:noFill/>
-        </p:spPr>
-        <p:txBody>
-          <a:bodyPr wrap="square" anchor="t" lIns="0" rIns="0" tIns="0" bIns="0">
-            <a:spAutoFit/>
-          </a:bodyPr>
-          <a:lstStyle/>
-          <a:p>
-            <a:pPr algn="l">
-              <a:lnSpc>
-                <a:spcPct val="112000"/>
-              </a:lnSpc>
-              <a:spcBef>
-                <a:spcPts val="0"/>
-              </a:spcBef>
-              <a:spcAft>
-                <a:spcPts val="200"/>
-              </a:spcAft>
-            </a:pPr>
-            <a:r>
-              <a:rPr b="1" sz="1200">
-                <a:solidFill>
-                  <a:srgbClr val="1D3557"/>
-                </a:solidFill>
-                <a:latin typeface="Consolas"/>
-              </a:rPr>
-              <a:t>[University]</a:t>
-            </a:r>
-          </a:p>
-          <a:p>
-            <a:pPr algn="l">
-              <a:lnSpc>
-                <a:spcPct val="110000"/>
-              </a:lnSpc>
-              <a:spcBef>
-                <a:spcPts val="0"/>
-              </a:spcBef>
-              <a:spcAft>
-                <a:spcPts val="600"/>
-              </a:spcAft>
-            </a:pPr>
-            <a:r>
-              <a:rPr b="0" sz="1100">
-                <a:solidFill>
-                  <a:srgbClr val="4A5A66"/>
-                </a:solidFill>
-                <a:latin typeface="Consolas"/>
-              </a:rPr>
-              <a:t>[Year]</a:t>
-            </a:r>
-          </a:p>
-        </p:txBody>
-      </p:sp>
-    </p:spTree>
-  </p:cSld>
-  <p:clrMapOvr>
-    <a:masterClrMapping/>
-  </p:clrMapOvr>
-</p:sld>
-</file>
-
-<file path=ppt/slides/slide10.xml><?xml version="1.0" encoding="utf-8"?>
-<p:sld xmlns:a="http://schemas.openxmlformats.org/drawingml/2006/main" xmlns:p="http://schemas.openxmlformats.org/presentationml/2006/main" xmlns:r="http://schemas.openxmlformats.org/officeDocument/2006/relationships">
-  <p:cSld>
-    <p:bg>
-      <p:bgPr>
-        <a:solidFill>
-          <a:srgbClr val="FBFAF6"/>
-        </a:solidFill>
-        <a:effectLst/>
-      </p:bgPr>
-    </p:bg>
-    <p:spTree>
-      <p:nvGrpSpPr>
-        <p:cNvPr id="1" name=""/>
-        <p:cNvGrpSpPr/>
-        <p:nvPr/>
-      </p:nvGrpSpPr>
-      <p:grpSpPr/>
-      <p:sp>
-        <p:nvSpPr>
-          <p:cNvPr id="2" name="Rectangle 1"/>
-          <p:cNvSpPr/>
-          <p:nvPr/>
-        </p:nvSpPr>
-        <p:spPr>
-          <a:xfrm>
-            <a:off x="566928" y="502920"/>
-            <a:ext cx="17780" cy="5852160"/>
-          </a:xfrm>
-          <a:prstGeom prst="rect">
-            <a:avLst/>
-          </a:prstGeom>
-          <a:solidFill>
-            <a:srgbClr val="D9D2C4"/>
-          </a:solidFill>
-          <a:ln>
-            <a:noFill/>
-          </a:ln>
-          <a:effectLst/>
-        </p:spPr>
-        <p:style>
-          <a:lnRef idx="1">
-            <a:schemeClr val="accent1"/>
-          </a:lnRef>
-          <a:fillRef idx="3">
-            <a:schemeClr val="accent1"/>
-          </a:fillRef>
-          <a:effectRef idx="2">
-            <a:schemeClr val="accent1"/>
-          </a:effectRef>
-          <a:fontRef idx="minor">
-            <a:schemeClr val="lt1"/>
-          </a:fontRef>
-        </p:style>
-        <p:txBody>
-          <a:bodyPr rtlCol="0" anchor="ctr"/>
-          <a:lstStyle/>
-          <a:p>
-            <a:pPr algn="ctr"/>
-          </a:p>
-        </p:txBody>
-      </p:sp>
-      <p:sp>
-        <p:nvSpPr>
-          <p:cNvPr id="3" name="Rectangle 2"/>
-          <p:cNvSpPr/>
-          <p:nvPr/>
-        </p:nvSpPr>
-        <p:spPr>
-          <a:xfrm>
-            <a:off x="566928" y="502920"/>
-            <a:ext cx="30480" cy="566928"/>
-          </a:xfrm>
-          <a:prstGeom prst="rect">
-            <a:avLst/>
-          </a:prstGeom>
-          <a:solidFill>
-            <a:srgbClr val="2A9D8F"/>
-          </a:solidFill>
-          <a:ln>
-            <a:noFill/>
-          </a:ln>
-          <a:effectLst/>
-        </p:spPr>
-        <p:style>
-          <a:lnRef idx="1">
-            <a:schemeClr val="accent1"/>
-          </a:lnRef>
-          <a:fillRef idx="3">
-            <a:schemeClr val="accent1"/>
-          </a:fillRef>
-          <a:effectRef idx="2">
-            <a:schemeClr val="accent1"/>
-          </a:effectRef>
-          <a:fontRef idx="minor">
-            <a:schemeClr val="lt1"/>
-          </a:fontRef>
-        </p:style>
-        <p:txBody>
-          <a:bodyPr rtlCol="0" anchor="ctr"/>
-          <a:lstStyle/>
-          <a:p>
-            <a:pPr algn="ctr"/>
-          </a:p>
-        </p:txBody>
-      </p:sp>
-      <p:sp>
-        <p:nvSpPr>
-          <p:cNvPr id="4" name="TextBox 3"/>
-          <p:cNvSpPr txBox="1"/>
-          <p:nvPr/>
-        </p:nvSpPr>
-        <p:spPr>
-          <a:xfrm>
-            <a:off x="868680" y="548640"/>
-            <a:ext cx="10607040" cy="320040"/>
-          </a:xfrm>
-          <a:prstGeom prst="rect">
-            <a:avLst/>
-          </a:prstGeom>
-          <a:noFill/>
-        </p:spPr>
-        <p:txBody>
-          <a:bodyPr wrap="square" anchor="t" lIns="0" rIns="0" tIns="0" bIns="0">
-            <a:spAutoFit/>
-          </a:bodyPr>
-          <a:lstStyle/>
-          <a:p>
-            <a:pPr>
-              <a:lnSpc>
-                <a:spcPct val="100000"/>
-              </a:lnSpc>
-            </a:pPr>
-            <a:r>
-              <a:rPr sz="1100" b="1">
-                <a:solidFill>
-                  <a:srgbClr val="E07A5F"/>
-                </a:solidFill>
-                <a:latin typeface="Consolas"/>
-              </a:rPr>
-              <a:t>07  </a:t>
-            </a:r>
-            <a:r>
-              <a:rPr sz="1100">
-                <a:solidFill>
-                  <a:srgbClr val="2A9D8F"/>
-                </a:solidFill>
-                <a:latin typeface="Consolas"/>
-              </a:rPr>
-              <a:t>ML2 — GENERALISATION  (UNSEEN EXCITATION)</a:t>
-            </a:r>
-          </a:p>
-        </p:txBody>
-      </p:sp>
-      <p:sp>
-        <p:nvSpPr>
-          <p:cNvPr id="5" name="TextBox 4"/>
-          <p:cNvSpPr txBox="1"/>
-          <p:nvPr/>
-        </p:nvSpPr>
-        <p:spPr>
-          <a:xfrm>
-            <a:off x="868680" y="960120"/>
+            <a:off x="868680" y="932688"/>
             <a:ext cx="10607040" cy="1280160"/>
           </a:xfrm>
           <a:prstGeom prst="rect">
@@ -3714,233 +3262,27 @@
               </a:spcAft>
             </a:pPr>
             <a:r>
-              <a:rPr b="1" sz="2600">
+              <a:rPr b="1" sz="2800">
                 <a:solidFill>
                   <a:srgbClr val="1D3557"/>
                 </a:solidFill>
                 <a:latin typeface="Georgia"/>
               </a:rPr>
-              <a:t>Classical filters break on unseen inputs.</a:t>
-            </a:r>
-          </a:p>
-        </p:txBody>
-      </p:sp>
-      <p:sp>
-        <p:nvSpPr>
-          <p:cNvPr id="6" name="TextBox 5"/>
-          <p:cNvSpPr txBox="1"/>
-          <p:nvPr/>
-        </p:nvSpPr>
-        <p:spPr>
-          <a:xfrm>
-            <a:off x="868680" y="1965960"/>
-            <a:ext cx="4114800" cy="2743200"/>
-          </a:xfrm>
-          <a:prstGeom prst="rect">
-            <a:avLst/>
-          </a:prstGeom>
-          <a:noFill/>
-        </p:spPr>
-        <p:txBody>
-          <a:bodyPr wrap="square" anchor="t" lIns="0" rIns="0" tIns="0" bIns="0">
-            <a:spAutoFit/>
-          </a:bodyPr>
-          <a:lstStyle/>
-          <a:p>
-            <a:pPr>
-              <a:lnSpc>
-                <a:spcPct val="110000"/>
-              </a:lnSpc>
-              <a:spcBef>
-                <a:spcPts val="0"/>
-              </a:spcBef>
-              <a:spcAft>
-                <a:spcPts val="0"/>
-              </a:spcAft>
-            </a:pPr>
-            <a:r>
-              <a:rPr sz="1500" b="1">
-                <a:solidFill>
-                  <a:srgbClr val="1D3557"/>
-                </a:solidFill>
-                <a:latin typeface="Calibri"/>
-              </a:rPr>
-              <a:t>—  </a:t>
-            </a:r>
-            <a:r>
-              <a:rPr b="0" sz="1500">
-                <a:solidFill>
-                  <a:srgbClr val="4A5A66"/>
-                </a:solidFill>
-                <a:latin typeface="Calibri"/>
-              </a:rPr>
-              <a:t>Tested on a </a:t>
-            </a:r>
-            <a:r>
-              <a:rPr b="1" sz="1500">
-                <a:solidFill>
-                  <a:srgbClr val="1C2B36"/>
-                </a:solidFill>
-                <a:latin typeface="Calibri"/>
-              </a:rPr>
-              <a:t>chirp</a:t>
-            </a:r>
-            <a:r>
-              <a:rPr b="0" sz="1500">
-                <a:solidFill>
-                  <a:srgbClr val="4A5A66"/>
-                </a:solidFill>
-                <a:latin typeface="Calibri"/>
-              </a:rPr>
-              <a:t> sweep never seen in training (only step/ramp/random/mixed were).</a:t>
-            </a:r>
-          </a:p>
-          <a:p>
-            <a:pPr>
-              <a:lnSpc>
-                <a:spcPct val="110000"/>
-              </a:lnSpc>
-              <a:spcBef>
-                <a:spcPts val="1400"/>
-              </a:spcBef>
-              <a:spcAft>
-                <a:spcPts val="0"/>
-              </a:spcAft>
-            </a:pPr>
-            <a:r>
-              <a:rPr sz="1500" b="1">
-                <a:solidFill>
-                  <a:srgbClr val="E07A5F"/>
-                </a:solidFill>
-                <a:latin typeface="Calibri"/>
-              </a:rPr>
-              <a:t>—  </a:t>
-            </a:r>
-            <a:r>
-              <a:rPr b="1" sz="1500">
-                <a:solidFill>
-                  <a:srgbClr val="1C2B36"/>
-                </a:solidFill>
-                <a:latin typeface="Calibri"/>
-              </a:rPr>
-              <a:t>EMA collapses</a:t>
-            </a:r>
-            <a:r>
-              <a:rPr b="0" sz="1500">
-                <a:solidFill>
-                  <a:srgbClr val="4A5A66"/>
-                </a:solidFill>
-                <a:latin typeface="Calibri"/>
-              </a:rPr>
-              <a:t> +64% → </a:t>
-            </a:r>
-            <a:r>
-              <a:rPr b="1" sz="1500">
-                <a:solidFill>
-                  <a:srgbClr val="1C2B36"/>
-                </a:solidFill>
-                <a:latin typeface="Calibri"/>
-              </a:rPr>
-              <a:t>+12%</a:t>
-            </a:r>
-            <a:r>
-              <a:rPr b="0" sz="1500">
-                <a:solidFill>
-                  <a:srgbClr val="4A5A66"/>
-                </a:solidFill>
-                <a:latin typeface="Calibri"/>
-              </a:rPr>
-              <a:t>; </a:t>
-            </a:r>
-            <a:r>
-              <a:rPr b="1" sz="1500">
-                <a:solidFill>
-                  <a:srgbClr val="1C2B36"/>
-                </a:solidFill>
-                <a:latin typeface="Calibri"/>
-              </a:rPr>
-              <a:t>Kalman</a:t>
-            </a:r>
-            <a:r>
-              <a:rPr b="0" sz="1500">
-                <a:solidFill>
-                  <a:srgbClr val="4A5A66"/>
-                </a:solidFill>
-                <a:latin typeface="Calibri"/>
-              </a:rPr>
-              <a:t> +56% → </a:t>
-            </a:r>
-            <a:r>
-              <a:rPr b="1" sz="1500">
-                <a:solidFill>
-                  <a:srgbClr val="1C2B36"/>
-                </a:solidFill>
-                <a:latin typeface="Calibri"/>
-              </a:rPr>
-              <a:t>+24%</a:t>
-            </a:r>
-            <a:r>
-              <a:rPr b="0" sz="1500">
-                <a:solidFill>
-                  <a:srgbClr val="4A5A66"/>
-                </a:solidFill>
-                <a:latin typeface="Calibri"/>
-              </a:rPr>
-              <a:t> — they were implicitly tuned to the training spectrum.</a:t>
-            </a:r>
-          </a:p>
-          <a:p>
-            <a:pPr>
-              <a:lnSpc>
-                <a:spcPct val="110000"/>
-              </a:lnSpc>
-              <a:spcBef>
-                <a:spcPts val="1400"/>
-              </a:spcBef>
-              <a:spcAft>
-                <a:spcPts val="0"/>
-              </a:spcAft>
-            </a:pPr>
-            <a:r>
-              <a:rPr sz="1500" b="1">
-                <a:solidFill>
-                  <a:srgbClr val="2A9D8F"/>
-                </a:solidFill>
-                <a:latin typeface="Calibri"/>
-              </a:rPr>
-              <a:t>—  </a:t>
-            </a:r>
-            <a:r>
-              <a:rPr b="1" sz="1500">
-                <a:solidFill>
-                  <a:srgbClr val="1C2B36"/>
-                </a:solidFill>
-                <a:latin typeface="Calibri"/>
-              </a:rPr>
-              <a:t>Neural filters hold</a:t>
-            </a:r>
-            <a:r>
-              <a:rPr b="0" sz="1500">
-                <a:solidFill>
-                  <a:srgbClr val="4A5A66"/>
-                </a:solidFill>
-                <a:latin typeface="Calibri"/>
-              </a:rPr>
-              <a:t>: CNN +73%, GRU +69%, TCN +67% — they learned the dynamics, not the excitation.</a:t>
-            </a:r>
-          </a:p>
-        </p:txBody>
-      </p:sp>
-      <p:sp>
-        <p:nvSpPr>
-          <p:cNvPr id="7" name="Rounded Rectangle 6"/>
+              <a:t>Outline.</a:t>
+            </a:r>
+          </a:p>
+        </p:txBody>
+      </p:sp>
+      <p:sp>
+        <p:nvSpPr>
+          <p:cNvPr id="6" name="Rounded Rectangle 5"/>
           <p:cNvSpPr/>
           <p:nvPr/>
         </p:nvSpPr>
         <p:spPr>
           <a:xfrm>
-            <a:off x="5212080" y="1783080"/>
-            <a:ext cx="6126480" cy="2993604"/>
+            <a:off x="868680" y="1828800"/>
+            <a:ext cx="5202936" cy="1371600"/>
           </a:xfrm>
           <a:prstGeom prst="roundRect">
             <a:avLst>
@@ -3979,40 +3321,16 @@
           </a:p>
         </p:txBody>
       </p:sp>
-      <p:pic>
-        <p:nvPicPr>
-          <p:cNvPr id="8" name="Picture 7" descr="ood_chirp.png"/>
-          <p:cNvPicPr>
-            <a:picLocks noChangeAspect="1"/>
-          </p:cNvPicPr>
-          <p:nvPr/>
-        </p:nvPicPr>
-        <p:blipFill>
-          <a:blip r:embed="rId2"/>
-          <a:stretch>
-            <a:fillRect/>
-          </a:stretch>
-        </p:blipFill>
-        <p:spPr>
-          <a:xfrm>
-            <a:off x="5358384" y="1929384"/>
-            <a:ext cx="5833872" cy="2243796"/>
-          </a:xfrm>
-          <a:prstGeom prst="rect">
-            <a:avLst/>
-          </a:prstGeom>
-        </p:spPr>
-      </p:pic>
-      <p:sp>
-        <p:nvSpPr>
-          <p:cNvPr id="9" name="TextBox 8"/>
+      <p:sp>
+        <p:nvSpPr>
+          <p:cNvPr id="7" name="TextBox 6"/>
           <p:cNvSpPr txBox="1"/>
           <p:nvPr/>
         </p:nvSpPr>
         <p:spPr>
           <a:xfrm>
-            <a:off x="5358384" y="4218900"/>
-            <a:ext cx="5833872" cy="457200"/>
+            <a:off x="1051560" y="1975104"/>
+            <a:ext cx="640080" cy="1097280"/>
           </a:xfrm>
           <a:prstGeom prst="rect">
             <a:avLst/>
@@ -4027,7 +3345,7 @@
           <a:p>
             <a:pPr algn="l">
               <a:lnSpc>
-                <a:spcPct val="110000"/>
+                <a:spcPct val="100000"/>
               </a:lnSpc>
               <a:spcBef>
                 <a:spcPts val="0"/>
@@ -4037,141 +3355,27 @@
               </a:spcAft>
             </a:pPr>
             <a:r>
-              <a:rPr b="0" sz="1100">
-                <a:solidFill>
-                  <a:srgbClr val="4A5A66"/>
-                </a:solidFill>
-                <a:latin typeface="Consolas"/>
-              </a:rPr>
-              <a:t>Fig. 2 — chirp (OOD) trajectory: GRU tracks truth; Kalman lags.</a:t>
-            </a:r>
-          </a:p>
-        </p:txBody>
-      </p:sp>
-    </p:spTree>
-  </p:cSld>
-  <p:clrMapOvr>
-    <a:masterClrMapping/>
-  </p:clrMapOvr>
-</p:sld>
-</file>
-
-<file path=ppt/slides/slide11.xml><?xml version="1.0" encoding="utf-8"?>
-<p:sld xmlns:a="http://schemas.openxmlformats.org/drawingml/2006/main" xmlns:p="http://schemas.openxmlformats.org/presentationml/2006/main" xmlns:r="http://schemas.openxmlformats.org/officeDocument/2006/relationships">
-  <p:cSld>
-    <p:bg>
-      <p:bgPr>
-        <a:solidFill>
-          <a:srgbClr val="FBFAF6"/>
-        </a:solidFill>
-        <a:effectLst/>
-      </p:bgPr>
-    </p:bg>
-    <p:spTree>
-      <p:nvGrpSpPr>
-        <p:cNvPr id="1" name=""/>
-        <p:cNvGrpSpPr/>
-        <p:nvPr/>
-      </p:nvGrpSpPr>
-      <p:grpSpPr/>
-      <p:sp>
-        <p:nvSpPr>
-          <p:cNvPr id="2" name="Rectangle 1"/>
-          <p:cNvSpPr/>
-          <p:nvPr/>
-        </p:nvSpPr>
-        <p:spPr>
-          <a:xfrm>
-            <a:off x="566928" y="502920"/>
-            <a:ext cx="17780" cy="5852160"/>
-          </a:xfrm>
-          <a:prstGeom prst="rect">
-            <a:avLst/>
-          </a:prstGeom>
-          <a:solidFill>
-            <a:srgbClr val="D9D2C4"/>
-          </a:solidFill>
-          <a:ln>
-            <a:noFill/>
-          </a:ln>
-          <a:effectLst/>
-        </p:spPr>
-        <p:style>
-          <a:lnRef idx="1">
-            <a:schemeClr val="accent1"/>
-          </a:lnRef>
-          <a:fillRef idx="3">
-            <a:schemeClr val="accent1"/>
-          </a:fillRef>
-          <a:effectRef idx="2">
-            <a:schemeClr val="accent1"/>
-          </a:effectRef>
-          <a:fontRef idx="minor">
-            <a:schemeClr val="lt1"/>
-          </a:fontRef>
-        </p:style>
-        <p:txBody>
-          <a:bodyPr rtlCol="0" anchor="ctr"/>
-          <a:lstStyle/>
-          <a:p>
-            <a:pPr algn="ctr"/>
-          </a:p>
-        </p:txBody>
-      </p:sp>
-      <p:sp>
-        <p:nvSpPr>
-          <p:cNvPr id="3" name="Rectangle 2"/>
-          <p:cNvSpPr/>
-          <p:nvPr/>
-        </p:nvSpPr>
-        <p:spPr>
-          <a:xfrm>
-            <a:off x="566928" y="502920"/>
-            <a:ext cx="30480" cy="566928"/>
-          </a:xfrm>
-          <a:prstGeom prst="rect">
-            <a:avLst/>
-          </a:prstGeom>
-          <a:solidFill>
-            <a:srgbClr val="2A9D8F"/>
-          </a:solidFill>
-          <a:ln>
-            <a:noFill/>
-          </a:ln>
-          <a:effectLst/>
-        </p:spPr>
-        <p:style>
-          <a:lnRef idx="1">
-            <a:schemeClr val="accent1"/>
-          </a:lnRef>
-          <a:fillRef idx="3">
-            <a:schemeClr val="accent1"/>
-          </a:fillRef>
-          <a:effectRef idx="2">
-            <a:schemeClr val="accent1"/>
-          </a:effectRef>
-          <a:fontRef idx="minor">
-            <a:schemeClr val="lt1"/>
-          </a:fontRef>
-        </p:style>
-        <p:txBody>
-          <a:bodyPr rtlCol="0" anchor="ctr"/>
-          <a:lstStyle/>
-          <a:p>
-            <a:pPr algn="ctr"/>
-          </a:p>
-        </p:txBody>
-      </p:sp>
-      <p:sp>
-        <p:nvSpPr>
-          <p:cNvPr id="4" name="TextBox 3"/>
+              <a:rPr b="1" sz="3000">
+                <a:solidFill>
+                  <a:srgbClr val="E07A5F"/>
+                </a:solidFill>
+                <a:latin typeface="Georgia"/>
+              </a:rPr>
+              <a:t>I</a:t>
+            </a:r>
+          </a:p>
+        </p:txBody>
+      </p:sp>
+      <p:sp>
+        <p:nvSpPr>
+          <p:cNvPr id="8" name="TextBox 7"/>
           <p:cNvSpPr txBox="1"/>
           <p:nvPr/>
         </p:nvSpPr>
         <p:spPr>
           <a:xfrm>
-            <a:off x="868680" y="548640"/>
-            <a:ext cx="10607040" cy="320040"/>
+            <a:off x="1737360" y="1975104"/>
+            <a:ext cx="4151376" cy="1097280"/>
           </a:xfrm>
           <a:prstGeom prst="rect">
             <a:avLst/>
@@ -4184,57 +3388,31 @@
           </a:bodyPr>
           <a:lstStyle/>
           <a:p>
-            <a:pPr>
+            <a:pPr algn="l">
               <a:lnSpc>
                 <a:spcPct val="100000"/>
               </a:lnSpc>
+              <a:spcBef>
+                <a:spcPts val="0"/>
+              </a:spcBef>
+              <a:spcAft>
+                <a:spcPts val="400"/>
+              </a:spcAft>
             </a:pPr>
             <a:r>
-              <a:rPr sz="1100" b="1">
-                <a:solidFill>
-                  <a:srgbClr val="E07A5F"/>
-                </a:solidFill>
-                <a:latin typeface="Consolas"/>
-              </a:rPr>
-              <a:t>08  </a:t>
-            </a:r>
-            <a:r>
-              <a:rPr sz="1100">
-                <a:solidFill>
-                  <a:srgbClr val="2A9D8F"/>
-                </a:solidFill>
-                <a:latin typeface="Consolas"/>
-              </a:rPr>
-              <a:t>CONCLUSION</a:t>
-            </a:r>
-          </a:p>
-        </p:txBody>
-      </p:sp>
-      <p:sp>
-        <p:nvSpPr>
-          <p:cNvPr id="5" name="TextBox 4"/>
-          <p:cNvSpPr txBox="1"/>
-          <p:nvPr/>
-        </p:nvSpPr>
-        <p:spPr>
-          <a:xfrm>
-            <a:off x="868680" y="960120"/>
-            <a:ext cx="10607040" cy="1280160"/>
-          </a:xfrm>
-          <a:prstGeom prst="rect">
-            <a:avLst/>
-          </a:prstGeom>
-          <a:noFill/>
-        </p:spPr>
-        <p:txBody>
-          <a:bodyPr wrap="square" anchor="t" lIns="0" rIns="0" tIns="0" bIns="0">
-            <a:spAutoFit/>
-          </a:bodyPr>
-          <a:lstStyle/>
+              <a:rPr b="1" sz="1700">
+                <a:solidFill>
+                  <a:srgbClr val="1D3557"/>
+                </a:solidFill>
+                <a:latin typeface="Georgia"/>
+              </a:rPr>
+              <a:t>Physical setup &amp; dataset</a:t>
+            </a:r>
+          </a:p>
           <a:p>
             <a:pPr algn="l">
               <a:lnSpc>
-                <a:spcPct val="102000"/>
+                <a:spcPct val="112000"/>
               </a:lnSpc>
               <a:spcBef>
                 <a:spcPts val="0"/>
@@ -4244,13 +3422,493 @@
               </a:spcAft>
             </a:pPr>
             <a:r>
+              <a:rPr b="0" sz="1200">
+                <a:solidFill>
+                  <a:srgbClr val="4A5A66"/>
+                </a:solidFill>
+                <a:latin typeface="Calibri"/>
+              </a:rPr>
+              <a:t>Brushed DC motor + vertical rod load; excitation &amp; sensor-noise design.</a:t>
+            </a:r>
+          </a:p>
+        </p:txBody>
+      </p:sp>
+      <p:sp>
+        <p:nvSpPr>
+          <p:cNvPr id="9" name="Rounded Rectangle 8"/>
+          <p:cNvSpPr/>
+          <p:nvPr/>
+        </p:nvSpPr>
+        <p:spPr>
+          <a:xfrm>
+            <a:off x="6272784" y="1828800"/>
+            <a:ext cx="5202936" cy="1371600"/>
+          </a:xfrm>
+          <a:prstGeom prst="roundRect">
+            <a:avLst>
+              <a:gd name="adj" fmla="val 6000"/>
+            </a:avLst>
+          </a:prstGeom>
+          <a:solidFill>
+            <a:srgbClr val="FFFFFF"/>
+          </a:solidFill>
+          <a:ln w="12700">
+            <a:solidFill>
+              <a:srgbClr val="D9D2C4"/>
+            </a:solidFill>
+          </a:ln>
+          <a:effectLst/>
+        </p:spPr>
+        <p:style>
+          <a:lnRef idx="1">
+            <a:schemeClr val="accent1"/>
+          </a:lnRef>
+          <a:fillRef idx="3">
+            <a:schemeClr val="accent1"/>
+          </a:fillRef>
+          <a:effectRef idx="2">
+            <a:schemeClr val="accent1"/>
+          </a:effectRef>
+          <a:fontRef idx="minor">
+            <a:schemeClr val="lt1"/>
+          </a:fontRef>
+        </p:style>
+        <p:txBody>
+          <a:bodyPr rtlCol="0" anchor="ctr"/>
+          <a:lstStyle/>
+          <a:p>
+            <a:pPr algn="ctr"/>
+          </a:p>
+        </p:txBody>
+      </p:sp>
+      <p:sp>
+        <p:nvSpPr>
+          <p:cNvPr id="10" name="TextBox 9"/>
+          <p:cNvSpPr txBox="1"/>
+          <p:nvPr/>
+        </p:nvSpPr>
+        <p:spPr>
+          <a:xfrm>
+            <a:off x="6455664" y="1975104"/>
+            <a:ext cx="640080" cy="1097280"/>
+          </a:xfrm>
+          <a:prstGeom prst="rect">
+            <a:avLst/>
+          </a:prstGeom>
+          <a:noFill/>
+        </p:spPr>
+        <p:txBody>
+          <a:bodyPr wrap="square" anchor="t" lIns="0" rIns="0" tIns="0" bIns="0">
+            <a:spAutoFit/>
+          </a:bodyPr>
+          <a:lstStyle/>
+          <a:p>
+            <a:pPr algn="l">
+              <a:lnSpc>
+                <a:spcPct val="100000"/>
+              </a:lnSpc>
+              <a:spcBef>
+                <a:spcPts val="0"/>
+              </a:spcBef>
+              <a:spcAft>
+                <a:spcPts val="600"/>
+              </a:spcAft>
+            </a:pPr>
+            <a:r>
               <a:rPr b="1" sz="3000">
                 <a:solidFill>
+                  <a:srgbClr val="E07A5F"/>
+                </a:solidFill>
+                <a:latin typeface="Georgia"/>
+              </a:rPr>
+              <a:t>II</a:t>
+            </a:r>
+          </a:p>
+        </p:txBody>
+      </p:sp>
+      <p:sp>
+        <p:nvSpPr>
+          <p:cNvPr id="11" name="TextBox 10"/>
+          <p:cNvSpPr txBox="1"/>
+          <p:nvPr/>
+        </p:nvSpPr>
+        <p:spPr>
+          <a:xfrm>
+            <a:off x="7141464" y="1975104"/>
+            <a:ext cx="4151376" cy="1097280"/>
+          </a:xfrm>
+          <a:prstGeom prst="rect">
+            <a:avLst/>
+          </a:prstGeom>
+          <a:noFill/>
+        </p:spPr>
+        <p:txBody>
+          <a:bodyPr wrap="square" anchor="t" lIns="0" rIns="0" tIns="0" bIns="0">
+            <a:spAutoFit/>
+          </a:bodyPr>
+          <a:lstStyle/>
+          <a:p>
+            <a:pPr algn="l">
+              <a:lnSpc>
+                <a:spcPct val="100000"/>
+              </a:lnSpc>
+              <a:spcBef>
+                <a:spcPts val="0"/>
+              </a:spcBef>
+              <a:spcAft>
+                <a:spcPts val="400"/>
+              </a:spcAft>
+            </a:pPr>
+            <a:r>
+              <a:rPr b="1" sz="1700">
+                <a:solidFill>
                   <a:srgbClr val="1D3557"/>
                 </a:solidFill>
                 <a:latin typeface="Georgia"/>
               </a:rPr>
-              <a:t>[Conclusion]</a:t>
+              <a:t>ML1 — Motor identification</a:t>
+            </a:r>
+          </a:p>
+          <a:p>
+            <a:pPr algn="l">
+              <a:lnSpc>
+                <a:spcPct val="112000"/>
+              </a:lnSpc>
+              <a:spcBef>
+                <a:spcPts val="0"/>
+              </a:spcBef>
+              <a:spcAft>
+                <a:spcPts val="600"/>
+              </a:spcAft>
+            </a:pPr>
+            <a:r>
+              <a:rPr b="0" sz="1200">
+                <a:solidFill>
+                  <a:srgbClr val="4A5A66"/>
+                </a:solidFill>
+                <a:latin typeface="Calibri"/>
+              </a:rPr>
+              <a:t>[Friend's section] Identification of motor dynamics.</a:t>
+            </a:r>
+          </a:p>
+        </p:txBody>
+      </p:sp>
+      <p:sp>
+        <p:nvSpPr>
+          <p:cNvPr id="12" name="Rounded Rectangle 11"/>
+          <p:cNvSpPr/>
+          <p:nvPr/>
+        </p:nvSpPr>
+        <p:spPr>
+          <a:xfrm>
+            <a:off x="868680" y="3401568"/>
+            <a:ext cx="5202936" cy="1371600"/>
+          </a:xfrm>
+          <a:prstGeom prst="roundRect">
+            <a:avLst>
+              <a:gd name="adj" fmla="val 6000"/>
+            </a:avLst>
+          </a:prstGeom>
+          <a:solidFill>
+            <a:srgbClr val="FFFFFF"/>
+          </a:solidFill>
+          <a:ln w="12700">
+            <a:solidFill>
+              <a:srgbClr val="D9D2C4"/>
+            </a:solidFill>
+          </a:ln>
+          <a:effectLst/>
+        </p:spPr>
+        <p:style>
+          <a:lnRef idx="1">
+            <a:schemeClr val="accent1"/>
+          </a:lnRef>
+          <a:fillRef idx="3">
+            <a:schemeClr val="accent1"/>
+          </a:fillRef>
+          <a:effectRef idx="2">
+            <a:schemeClr val="accent1"/>
+          </a:effectRef>
+          <a:fontRef idx="minor">
+            <a:schemeClr val="lt1"/>
+          </a:fontRef>
+        </p:style>
+        <p:txBody>
+          <a:bodyPr rtlCol="0" anchor="ctr"/>
+          <a:lstStyle/>
+          <a:p>
+            <a:pPr algn="ctr"/>
+          </a:p>
+        </p:txBody>
+      </p:sp>
+      <p:sp>
+        <p:nvSpPr>
+          <p:cNvPr id="13" name="TextBox 12"/>
+          <p:cNvSpPr txBox="1"/>
+          <p:nvPr/>
+        </p:nvSpPr>
+        <p:spPr>
+          <a:xfrm>
+            <a:off x="1051560" y="3547872"/>
+            <a:ext cx="640080" cy="1097280"/>
+          </a:xfrm>
+          <a:prstGeom prst="rect">
+            <a:avLst/>
+          </a:prstGeom>
+          <a:noFill/>
+        </p:spPr>
+        <p:txBody>
+          <a:bodyPr wrap="square" anchor="t" lIns="0" rIns="0" tIns="0" bIns="0">
+            <a:spAutoFit/>
+          </a:bodyPr>
+          <a:lstStyle/>
+          <a:p>
+            <a:pPr algn="l">
+              <a:lnSpc>
+                <a:spcPct val="100000"/>
+              </a:lnSpc>
+              <a:spcBef>
+                <a:spcPts val="0"/>
+              </a:spcBef>
+              <a:spcAft>
+                <a:spcPts val="600"/>
+              </a:spcAft>
+            </a:pPr>
+            <a:r>
+              <a:rPr b="1" sz="3000">
+                <a:solidFill>
+                  <a:srgbClr val="E07A5F"/>
+                </a:solidFill>
+                <a:latin typeface="Georgia"/>
+              </a:rPr>
+              <a:t>III</a:t>
+            </a:r>
+          </a:p>
+        </p:txBody>
+      </p:sp>
+      <p:sp>
+        <p:nvSpPr>
+          <p:cNvPr id="14" name="TextBox 13"/>
+          <p:cNvSpPr txBox="1"/>
+          <p:nvPr/>
+        </p:nvSpPr>
+        <p:spPr>
+          <a:xfrm>
+            <a:off x="1737360" y="3547872"/>
+            <a:ext cx="4151376" cy="1097280"/>
+          </a:xfrm>
+          <a:prstGeom prst="rect">
+            <a:avLst/>
+          </a:prstGeom>
+          <a:noFill/>
+        </p:spPr>
+        <p:txBody>
+          <a:bodyPr wrap="square" anchor="t" lIns="0" rIns="0" tIns="0" bIns="0">
+            <a:spAutoFit/>
+          </a:bodyPr>
+          <a:lstStyle/>
+          <a:p>
+            <a:pPr algn="l">
+              <a:lnSpc>
+                <a:spcPct val="100000"/>
+              </a:lnSpc>
+              <a:spcBef>
+                <a:spcPts val="0"/>
+              </a:spcBef>
+              <a:spcAft>
+                <a:spcPts val="400"/>
+              </a:spcAft>
+            </a:pPr>
+            <a:r>
+              <a:rPr b="1" sz="1700">
+                <a:solidFill>
+                  <a:srgbClr val="1D3557"/>
+                </a:solidFill>
+                <a:latin typeface="Georgia"/>
+              </a:rPr>
+              <a:t>ML2 — Speed filtering</a:t>
+            </a:r>
+          </a:p>
+          <a:p>
+            <a:pPr algn="l">
+              <a:lnSpc>
+                <a:spcPct val="112000"/>
+              </a:lnSpc>
+              <a:spcBef>
+                <a:spcPts val="0"/>
+              </a:spcBef>
+              <a:spcAft>
+                <a:spcPts val="600"/>
+              </a:spcAft>
+            </a:pPr>
+            <a:r>
+              <a:rPr b="0" sz="1200">
+                <a:solidFill>
+                  <a:srgbClr val="4A5A66"/>
+                </a:solidFill>
+                <a:latin typeface="Calibri"/>
+              </a:rPr>
+              <a:t>Neural filter (GRU / CNN / TCN) vs EMA &amp; Kalman; nonlinear-plant gain.</a:t>
+            </a:r>
+          </a:p>
+        </p:txBody>
+      </p:sp>
+      <p:sp>
+        <p:nvSpPr>
+          <p:cNvPr id="15" name="Rounded Rectangle 14"/>
+          <p:cNvSpPr/>
+          <p:nvPr/>
+        </p:nvSpPr>
+        <p:spPr>
+          <a:xfrm>
+            <a:off x="6272784" y="3401568"/>
+            <a:ext cx="5202936" cy="1371600"/>
+          </a:xfrm>
+          <a:prstGeom prst="roundRect">
+            <a:avLst>
+              <a:gd name="adj" fmla="val 6000"/>
+            </a:avLst>
+          </a:prstGeom>
+          <a:solidFill>
+            <a:srgbClr val="FFFFFF"/>
+          </a:solidFill>
+          <a:ln w="12700">
+            <a:solidFill>
+              <a:srgbClr val="D9D2C4"/>
+            </a:solidFill>
+          </a:ln>
+          <a:effectLst/>
+        </p:spPr>
+        <p:style>
+          <a:lnRef idx="1">
+            <a:schemeClr val="accent1"/>
+          </a:lnRef>
+          <a:fillRef idx="3">
+            <a:schemeClr val="accent1"/>
+          </a:fillRef>
+          <a:effectRef idx="2">
+            <a:schemeClr val="accent1"/>
+          </a:effectRef>
+          <a:fontRef idx="minor">
+            <a:schemeClr val="lt1"/>
+          </a:fontRef>
+        </p:style>
+        <p:txBody>
+          <a:bodyPr rtlCol="0" anchor="ctr"/>
+          <a:lstStyle/>
+          <a:p>
+            <a:pPr algn="ctr"/>
+          </a:p>
+        </p:txBody>
+      </p:sp>
+      <p:sp>
+        <p:nvSpPr>
+          <p:cNvPr id="16" name="TextBox 15"/>
+          <p:cNvSpPr txBox="1"/>
+          <p:nvPr/>
+        </p:nvSpPr>
+        <p:spPr>
+          <a:xfrm>
+            <a:off x="6455664" y="3547872"/>
+            <a:ext cx="640080" cy="1097280"/>
+          </a:xfrm>
+          <a:prstGeom prst="rect">
+            <a:avLst/>
+          </a:prstGeom>
+          <a:noFill/>
+        </p:spPr>
+        <p:txBody>
+          <a:bodyPr wrap="square" anchor="t" lIns="0" rIns="0" tIns="0" bIns="0">
+            <a:spAutoFit/>
+          </a:bodyPr>
+          <a:lstStyle/>
+          <a:p>
+            <a:pPr algn="l">
+              <a:lnSpc>
+                <a:spcPct val="100000"/>
+              </a:lnSpc>
+              <a:spcBef>
+                <a:spcPts val="0"/>
+              </a:spcBef>
+              <a:spcAft>
+                <a:spcPts val="600"/>
+              </a:spcAft>
+            </a:pPr>
+            <a:r>
+              <a:rPr b="1" sz="3000">
+                <a:solidFill>
+                  <a:srgbClr val="E07A5F"/>
+                </a:solidFill>
+                <a:latin typeface="Georgia"/>
+              </a:rPr>
+              <a:t>IV</a:t>
+            </a:r>
+          </a:p>
+        </p:txBody>
+      </p:sp>
+      <p:sp>
+        <p:nvSpPr>
+          <p:cNvPr id="17" name="TextBox 16"/>
+          <p:cNvSpPr txBox="1"/>
+          <p:nvPr/>
+        </p:nvSpPr>
+        <p:spPr>
+          <a:xfrm>
+            <a:off x="7141464" y="3547872"/>
+            <a:ext cx="4151376" cy="1097280"/>
+          </a:xfrm>
+          <a:prstGeom prst="rect">
+            <a:avLst/>
+          </a:prstGeom>
+          <a:noFill/>
+        </p:spPr>
+        <p:txBody>
+          <a:bodyPr wrap="square" anchor="t" lIns="0" rIns="0" tIns="0" bIns="0">
+            <a:spAutoFit/>
+          </a:bodyPr>
+          <a:lstStyle/>
+          <a:p>
+            <a:pPr algn="l">
+              <a:lnSpc>
+                <a:spcPct val="100000"/>
+              </a:lnSpc>
+              <a:spcBef>
+                <a:spcPts val="0"/>
+              </a:spcBef>
+              <a:spcAft>
+                <a:spcPts val="400"/>
+              </a:spcAft>
+            </a:pPr>
+            <a:r>
+              <a:rPr b="1" sz="1700">
+                <a:solidFill>
+                  <a:srgbClr val="1D3557"/>
+                </a:solidFill>
+                <a:latin typeface="Georgia"/>
+              </a:rPr>
+              <a:t>Conclusion</a:t>
+            </a:r>
+          </a:p>
+          <a:p>
+            <a:pPr algn="l">
+              <a:lnSpc>
+                <a:spcPct val="112000"/>
+              </a:lnSpc>
+              <a:spcBef>
+                <a:spcPts val="0"/>
+              </a:spcBef>
+              <a:spcAft>
+                <a:spcPts val="600"/>
+              </a:spcAft>
+            </a:pPr>
+            <a:r>
+              <a:rPr b="0" sz="1200">
+                <a:solidFill>
+                  <a:srgbClr val="4A5A66"/>
+                </a:solidFill>
+                <a:latin typeface="Calibri"/>
+              </a:rPr>
+              <a:t>Key numbers, takeaways, and future directions.</a:t>
             </a:r>
           </a:p>
         </p:txBody>
@@ -4397,13 +4055,22 @@
               </a:lnSpc>
             </a:pPr>
             <a:r>
+              <a:rPr sz="1100" b="1">
+                <a:solidFill>
+                  <a:srgbClr val="E07A5F"/>
+                </a:solidFill>
+                <a:latin typeface="Consolas"/>
+              </a:rPr>
+              <a:t>03  </a:t>
+            </a:r>
+            <a:r>
               <a:rPr sz="1100">
                 <a:solidFill>
                   <a:srgbClr val="2A9D8F"/>
                 </a:solidFill>
                 <a:latin typeface="Consolas"/>
               </a:rPr>
-              <a:t>TABLE OF CONTENTS</a:t>
+              <a:t>ML2 — SPEED FILTER: TASK &amp; DATA</a:t>
             </a:r>
           </a:p>
         </p:txBody>
@@ -4416,7 +4083,7 @@
         </p:nvSpPr>
         <p:spPr>
           <a:xfrm>
-            <a:off x="868680" y="932688"/>
+            <a:off x="868680" y="960120"/>
             <a:ext cx="10607040" cy="1280160"/>
           </a:xfrm>
           <a:prstGeom prst="rect">
@@ -4448,21 +4115,96 @@
                 </a:solidFill>
                 <a:latin typeface="Georgia"/>
               </a:rPr>
-              <a:t>Outline.</a:t>
-            </a:r>
-          </a:p>
-        </p:txBody>
-      </p:sp>
-      <p:sp>
-        <p:nvSpPr>
-          <p:cNvPr id="6" name="Rounded Rectangle 5"/>
+              <a:t>Denoise the speed of a nonlinear plant.</a:t>
+            </a:r>
+          </a:p>
+        </p:txBody>
+      </p:sp>
+      <p:sp>
+        <p:nvSpPr>
+          <p:cNvPr id="6" name="TextBox 5"/>
+          <p:cNvSpPr txBox="1"/>
+          <p:nvPr/>
+        </p:nvSpPr>
+        <p:spPr>
+          <a:xfrm>
+            <a:off x="868680" y="1828800"/>
+            <a:ext cx="10607040" cy="658368"/>
+          </a:xfrm>
+          <a:prstGeom prst="rect">
+            <a:avLst/>
+          </a:prstGeom>
+          <a:noFill/>
+        </p:spPr>
+        <p:txBody>
+          <a:bodyPr wrap="square" anchor="t" lIns="0" rIns="0" tIns="0" bIns="0">
+            <a:spAutoFit/>
+          </a:bodyPr>
+          <a:lstStyle/>
+          <a:p>
+            <a:pPr>
+              <a:lnSpc>
+                <a:spcPct val="120000"/>
+              </a:lnSpc>
+            </a:pPr>
+            <a:r>
+              <a:rPr b="0" sz="1500">
+                <a:solidFill>
+                  <a:srgbClr val="4A5A66"/>
+                </a:solidFill>
+                <a:latin typeface="Calibri"/>
+              </a:rPr>
+              <a:t>Recover the true motor speed from a noisy speed sensor and the known command voltage. The vertical rod adds a gravity torque </a:t>
+            </a:r>
+            <a:r>
+              <a:rPr b="1" sz="1500">
+                <a:solidFill>
+                  <a:srgbClr val="1C2B36"/>
+                </a:solidFill>
+                <a:latin typeface="Calibri"/>
+              </a:rPr>
+              <a:t>∝ sin θ</a:t>
+            </a:r>
+            <a:r>
+              <a:rPr b="0" sz="1500">
+                <a:solidFill>
+                  <a:srgbClr val="4A5A66"/>
+                </a:solidFill>
+                <a:latin typeface="Calibri"/>
+              </a:rPr>
+              <a:t>, making the mechanics </a:t>
+            </a:r>
+            <a:r>
+              <a:rPr b="1" sz="1500">
+                <a:solidFill>
+                  <a:srgbClr val="1C2B36"/>
+                </a:solidFill>
+                <a:latin typeface="Calibri"/>
+              </a:rPr>
+              <a:t>nonlinear and state-dependent</a:t>
+            </a:r>
+            <a:r>
+              <a:rPr b="0" sz="1500">
+                <a:solidFill>
+                  <a:srgbClr val="4A5A66"/>
+                </a:solidFill>
+                <a:latin typeface="Calibri"/>
+              </a:rPr>
+              <a:t> — the property a learned filter can exploit.</a:t>
+            </a:r>
+          </a:p>
+        </p:txBody>
+      </p:sp>
+      <p:sp>
+        <p:nvSpPr>
+          <p:cNvPr id="7" name="Rounded Rectangle 6"/>
           <p:cNvSpPr/>
           <p:nvPr/>
         </p:nvSpPr>
         <p:spPr>
           <a:xfrm>
-            <a:off x="868680" y="1828800"/>
-            <a:ext cx="5202936" cy="1371600"/>
+            <a:off x="868680" y="2788920"/>
+            <a:ext cx="10607040" cy="896112"/>
           </a:xfrm>
           <a:prstGeom prst="roundRect">
             <a:avLst>
@@ -4470,7 +4212,7 @@
             </a:avLst>
           </a:prstGeom>
           <a:solidFill>
-            <a:srgbClr val="FFFFFF"/>
+            <a:srgbClr val="F4F1E9"/>
           </a:solidFill>
           <a:ln w="12700">
             <a:solidFill>
@@ -4503,14 +4245,58 @@
       </p:sp>
       <p:sp>
         <p:nvSpPr>
-          <p:cNvPr id="7" name="TextBox 6"/>
+          <p:cNvPr id="8" name="Rectangle 7"/>
+          <p:cNvSpPr/>
+          <p:nvPr/>
+        </p:nvSpPr>
+        <p:spPr>
+          <a:xfrm>
+            <a:off x="868680" y="2788920"/>
+            <a:ext cx="38100" cy="896112"/>
+          </a:xfrm>
+          <a:prstGeom prst="rect">
+            <a:avLst/>
+          </a:prstGeom>
+          <a:solidFill>
+            <a:srgbClr val="1D3557"/>
+          </a:solidFill>
+          <a:ln>
+            <a:noFill/>
+          </a:ln>
+          <a:effectLst/>
+        </p:spPr>
+        <p:style>
+          <a:lnRef idx="1">
+            <a:schemeClr val="accent1"/>
+          </a:lnRef>
+          <a:fillRef idx="3">
+            <a:schemeClr val="accent1"/>
+          </a:fillRef>
+          <a:effectRef idx="2">
+            <a:schemeClr val="accent1"/>
+          </a:effectRef>
+          <a:fontRef idx="minor">
+            <a:schemeClr val="lt1"/>
+          </a:fontRef>
+        </p:style>
+        <p:txBody>
+          <a:bodyPr rtlCol="0" anchor="ctr"/>
+          <a:lstStyle/>
+          <a:p>
+            <a:pPr algn="ctr"/>
+          </a:p>
+        </p:txBody>
+      </p:sp>
+      <p:sp>
+        <p:nvSpPr>
+          <p:cNvPr id="9" name="TextBox 8"/>
           <p:cNvSpPr txBox="1"/>
           <p:nvPr/>
         </p:nvSpPr>
         <p:spPr>
           <a:xfrm>
-            <a:off x="1051560" y="1975104"/>
-            <a:ext cx="640080" cy="1097280"/>
+            <a:off x="1069848" y="2898648"/>
+            <a:ext cx="10241280" cy="713232"/>
           </a:xfrm>
           <a:prstGeom prst="rect">
             <a:avLst/>
@@ -4518,44 +4304,66 @@
           <a:noFill/>
         </p:spPr>
         <p:txBody>
-          <a:bodyPr wrap="square" anchor="t" lIns="0" rIns="0" tIns="0" bIns="0">
+          <a:bodyPr wrap="square" anchor="ctr" lIns="0" rIns="0" tIns="0" bIns="0">
             <a:spAutoFit/>
           </a:bodyPr>
           <a:lstStyle/>
           <a:p>
-            <a:pPr algn="l">
+            <a:pPr>
               <a:lnSpc>
-                <a:spcPct val="100000"/>
+                <a:spcPct val="115000"/>
               </a:lnSpc>
               <a:spcBef>
                 <a:spcPts val="0"/>
               </a:spcBef>
               <a:spcAft>
-                <a:spcPts val="600"/>
+                <a:spcPts val="0"/>
               </a:spcAft>
             </a:pPr>
             <a:r>
-              <a:rPr b="1" sz="3000">
-                <a:solidFill>
-                  <a:srgbClr val="E07A5F"/>
-                </a:solidFill>
-                <a:latin typeface="Georgia"/>
-              </a:rPr>
-              <a:t>I</a:t>
-            </a:r>
-          </a:p>
-        </p:txBody>
-      </p:sp>
-      <p:sp>
-        <p:nvSpPr>
-          <p:cNvPr id="8" name="TextBox 7"/>
+              <a:rPr b="0" sz="1350">
+                <a:solidFill>
+                  <a:srgbClr val="1D3557"/>
+                </a:solidFill>
+                <a:latin typeface="Consolas"/>
+              </a:rPr>
+              <a:t>(J + I_rod)·dω/dt  =  Kt·i − B·ω − m·g·l_cm·sin(θ)     ← gravity = nonlinearity</a:t>
+            </a:r>
+          </a:p>
+          <a:p>
+            <a:pPr>
+              <a:lnSpc>
+                <a:spcPct val="115000"/>
+              </a:lnSpc>
+              <a:spcBef>
+                <a:spcPts val="400"/>
+              </a:spcBef>
+              <a:spcAft>
+                <a:spcPts val="0"/>
+              </a:spcAft>
+            </a:pPr>
+            <a:r>
+              <a:rPr b="0" sz="1350">
+                <a:solidFill>
+                  <a:srgbClr val="1D3557"/>
+                </a:solidFill>
+                <a:latin typeface="Consolas"/>
+              </a:rPr>
+              <a:t>input   x = [ omega_noisy , voltage ]        target   y = omega_true</a:t>
+            </a:r>
+          </a:p>
+        </p:txBody>
+      </p:sp>
+      <p:sp>
+        <p:nvSpPr>
+          <p:cNvPr id="10" name="TextBox 9"/>
           <p:cNvSpPr txBox="1"/>
           <p:nvPr/>
         </p:nvSpPr>
         <p:spPr>
           <a:xfrm>
-            <a:off x="1737360" y="1975104"/>
-            <a:ext cx="4151376" cy="1097280"/>
+            <a:off x="868680" y="3977639"/>
+            <a:ext cx="10607040" cy="2377440"/>
           </a:xfrm>
           <a:prstGeom prst="rect">
             <a:avLst/>
@@ -4568,527 +4376,217 @@
           </a:bodyPr>
           <a:lstStyle/>
           <a:p>
-            <a:pPr algn="l">
+            <a:pPr>
               <a:lnSpc>
-                <a:spcPct val="100000"/>
+                <a:spcPct val="110000"/>
               </a:lnSpc>
               <a:spcBef>
                 <a:spcPts val="0"/>
               </a:spcBef>
               <a:spcAft>
-                <a:spcPts val="400"/>
+                <a:spcPts val="0"/>
               </a:spcAft>
             </a:pPr>
             <a:r>
-              <a:rPr b="1" sz="1700">
-                <a:solidFill>
-                  <a:srgbClr val="1D3557"/>
-                </a:solidFill>
-                <a:latin typeface="Georgia"/>
-              </a:rPr>
-              <a:t>Physical setup &amp; dataset</a:t>
-            </a:r>
-          </a:p>
-          <a:p>
-            <a:pPr algn="l">
+              <a:rPr sz="1500" b="1">
+                <a:solidFill>
+                  <a:srgbClr val="2A9D8F"/>
+                </a:solidFill>
+                <a:latin typeface="Calibri"/>
+              </a:rPr>
+              <a:t>—  </a:t>
+            </a:r>
+            <a:r>
+              <a:rPr b="1" sz="1500">
+                <a:solidFill>
+                  <a:srgbClr val="1C2B36"/>
+                </a:solidFill>
+                <a:latin typeface="Calibri"/>
+              </a:rPr>
+              <a:t>210 trajectories</a:t>
+            </a:r>
+            <a:r>
+              <a:rPr b="0" sz="1500">
+                <a:solidFill>
+                  <a:srgbClr val="4A5A66"/>
+                </a:solidFill>
+                <a:latin typeface="Calibri"/>
+              </a:rPr>
+              <a:t>, 6 s @ 1 ms, split </a:t>
+            </a:r>
+            <a:r>
+              <a:rPr b="1" sz="1500">
+                <a:solidFill>
+                  <a:srgbClr val="1C2B36"/>
+                </a:solidFill>
+                <a:latin typeface="Calibri"/>
+              </a:rPr>
+              <a:t>70/15/15 by trajectory</a:t>
+            </a:r>
+            <a:r>
+              <a:rPr b="0" sz="1500">
+                <a:solidFill>
+                  <a:srgbClr val="4A5A66"/>
+                </a:solidFill>
+                <a:latin typeface="Calibri"/>
+              </a:rPr>
+              <a:t> — no time-step leaks between train and test.</a:t>
+            </a:r>
+          </a:p>
+          <a:p>
+            <a:pPr>
               <a:lnSpc>
-                <a:spcPct val="112000"/>
+                <a:spcPct val="110000"/>
               </a:lnSpc>
               <a:spcBef>
-                <a:spcPts val="0"/>
+                <a:spcPts val="1100"/>
               </a:spcBef>
               <a:spcAft>
-                <a:spcPts val="600"/>
+                <a:spcPts val="0"/>
               </a:spcAft>
             </a:pPr>
             <a:r>
-              <a:rPr b="0" sz="1200">
+              <a:rPr sz="1500" b="1">
+                <a:solidFill>
+                  <a:srgbClr val="1D3557"/>
+                </a:solidFill>
+                <a:latin typeface="Calibri"/>
+              </a:rPr>
+              <a:t>—  </a:t>
+            </a:r>
+            <a:r>
+              <a:rPr b="0" sz="1500">
                 <a:solidFill>
                   <a:srgbClr val="4A5A66"/>
                 </a:solidFill>
                 <a:latin typeface="Calibri"/>
               </a:rPr>
-              <a:t>Brushed DC motor + vertical rod load; excitation &amp; sensor-noise design.</a:t>
-            </a:r>
-          </a:p>
-        </p:txBody>
-      </p:sp>
-      <p:sp>
-        <p:nvSpPr>
-          <p:cNvPr id="9" name="Rounded Rectangle 8"/>
-          <p:cNvSpPr/>
-          <p:nvPr/>
-        </p:nvSpPr>
-        <p:spPr>
-          <a:xfrm>
-            <a:off x="6272784" y="1828800"/>
-            <a:ext cx="5202936" cy="1371600"/>
-          </a:xfrm>
-          <a:prstGeom prst="roundRect">
-            <a:avLst>
-              <a:gd name="adj" fmla="val 6000"/>
-            </a:avLst>
-          </a:prstGeom>
-          <a:solidFill>
-            <a:srgbClr val="FFFFFF"/>
-          </a:solidFill>
-          <a:ln w="12700">
-            <a:solidFill>
-              <a:srgbClr val="D9D2C4"/>
-            </a:solidFill>
-          </a:ln>
-          <a:effectLst/>
-        </p:spPr>
-        <p:style>
-          <a:lnRef idx="1">
-            <a:schemeClr val="accent1"/>
-          </a:lnRef>
-          <a:fillRef idx="3">
-            <a:schemeClr val="accent1"/>
-          </a:fillRef>
-          <a:effectRef idx="2">
-            <a:schemeClr val="accent1"/>
-          </a:effectRef>
-          <a:fontRef idx="minor">
-            <a:schemeClr val="lt1"/>
-          </a:fontRef>
-        </p:style>
-        <p:txBody>
-          <a:bodyPr rtlCol="0" anchor="ctr"/>
-          <a:lstStyle/>
-          <a:p>
-            <a:pPr algn="ctr"/>
-          </a:p>
-        </p:txBody>
-      </p:sp>
-      <p:sp>
-        <p:nvSpPr>
-          <p:cNvPr id="10" name="TextBox 9"/>
-          <p:cNvSpPr txBox="1"/>
-          <p:nvPr/>
-        </p:nvSpPr>
-        <p:spPr>
-          <a:xfrm>
-            <a:off x="6455664" y="1975104"/>
-            <a:ext cx="640080" cy="1097280"/>
-          </a:xfrm>
-          <a:prstGeom prst="rect">
-            <a:avLst/>
-          </a:prstGeom>
-          <a:noFill/>
-        </p:spPr>
-        <p:txBody>
-          <a:bodyPr wrap="square" anchor="t" lIns="0" rIns="0" tIns="0" bIns="0">
-            <a:spAutoFit/>
-          </a:bodyPr>
-          <a:lstStyle/>
-          <a:p>
-            <a:pPr algn="l">
+              <a:t>Excitation cycles </a:t>
+            </a:r>
+            <a:r>
+              <a:rPr b="1" sz="1500">
+                <a:solidFill>
+                  <a:srgbClr val="1C2B36"/>
+                </a:solidFill>
+                <a:latin typeface="Calibri"/>
+              </a:rPr>
+              <a:t>step / ramp / random / mixed</a:t>
+            </a:r>
+            <a:r>
+              <a:rPr b="0" sz="1500">
+                <a:solidFill>
+                  <a:srgbClr val="4A5A66"/>
+                </a:solidFill>
+                <a:latin typeface="Calibri"/>
+              </a:rPr>
+              <a:t> bipolar voltage; motor R, J, B jittered ±12% per run.</a:t>
+            </a:r>
+          </a:p>
+          <a:p>
+            <a:pPr>
               <a:lnSpc>
-                <a:spcPct val="100000"/>
+                <a:spcPct val="110000"/>
               </a:lnSpc>
               <a:spcBef>
-                <a:spcPts val="0"/>
+                <a:spcPts val="1100"/>
               </a:spcBef>
               <a:spcAft>
-                <a:spcPts val="600"/>
+                <a:spcPts val="0"/>
               </a:spcAft>
             </a:pPr>
             <a:r>
-              <a:rPr b="1" sz="3000">
+              <a:rPr sz="1500" b="1">
                 <a:solidFill>
                   <a:srgbClr val="E07A5F"/>
                 </a:solidFill>
-                <a:latin typeface="Georgia"/>
-              </a:rPr>
-              <a:t>II</a:t>
-            </a:r>
-          </a:p>
-        </p:txBody>
-      </p:sp>
-      <p:sp>
-        <p:nvSpPr>
-          <p:cNvPr id="11" name="TextBox 10"/>
-          <p:cNvSpPr txBox="1"/>
-          <p:nvPr/>
-        </p:nvSpPr>
-        <p:spPr>
-          <a:xfrm>
-            <a:off x="7141464" y="1975104"/>
-            <a:ext cx="4151376" cy="1097280"/>
-          </a:xfrm>
-          <a:prstGeom prst="rect">
-            <a:avLst/>
-          </a:prstGeom>
-          <a:noFill/>
-        </p:spPr>
-        <p:txBody>
-          <a:bodyPr wrap="square" anchor="t" lIns="0" rIns="0" tIns="0" bIns="0">
-            <a:spAutoFit/>
-          </a:bodyPr>
-          <a:lstStyle/>
-          <a:p>
-            <a:pPr algn="l">
+                <a:latin typeface="Calibri"/>
+              </a:rPr>
+              <a:t>—  </a:t>
+            </a:r>
+            <a:r>
+              <a:rPr b="0" sz="1500">
+                <a:solidFill>
+                  <a:srgbClr val="4A5A66"/>
+                </a:solidFill>
+                <a:latin typeface="Calibri"/>
+              </a:rPr>
+              <a:t>Sensor noise std 2–4 rad/s on a </a:t>
+            </a:r>
+            <a:r>
+              <a:rPr b="0" sz="1500">
+                <a:solidFill>
+                  <a:srgbClr val="4A5A66"/>
+                </a:solidFill>
+                <a:latin typeface="Calibri"/>
+              </a:rPr>
+              <a:t>21 rad/s swing → </a:t>
+            </a:r>
+            <a:r>
+              <a:rPr b="1" sz="1500">
+                <a:solidFill>
+                  <a:srgbClr val="1C2B36"/>
+                </a:solidFill>
+                <a:latin typeface="Calibri"/>
+              </a:rPr>
+              <a:t>SNR ≈ 7× (14% noise)</a:t>
+            </a:r>
+            <a:r>
+              <a:rPr b="0" sz="1500">
+                <a:solidFill>
+                  <a:srgbClr val="4A5A66"/>
+                </a:solidFill>
+                <a:latin typeface="Calibri"/>
+              </a:rPr>
+              <a:t>.</a:t>
+            </a:r>
+          </a:p>
+          <a:p>
+            <a:pPr>
               <a:lnSpc>
-                <a:spcPct val="100000"/>
+                <a:spcPct val="110000"/>
               </a:lnSpc>
               <a:spcBef>
-                <a:spcPts val="0"/>
+                <a:spcPts val="1100"/>
               </a:spcBef>
               <a:spcAft>
-                <a:spcPts val="400"/>
+                <a:spcPts val="0"/>
               </a:spcAft>
             </a:pPr>
             <a:r>
-              <a:rPr b="1" sz="1700">
-                <a:solidFill>
-                  <a:srgbClr val="1D3557"/>
-                </a:solidFill>
-                <a:latin typeface="Georgia"/>
-              </a:rPr>
-              <a:t>ML1 — Motor identification</a:t>
-            </a:r>
-          </a:p>
-          <a:p>
-            <a:pPr algn="l">
-              <a:lnSpc>
-                <a:spcPct val="112000"/>
-              </a:lnSpc>
-              <a:spcBef>
-                <a:spcPts val="0"/>
-              </a:spcBef>
-              <a:spcAft>
-                <a:spcPts val="600"/>
-              </a:spcAft>
-            </a:pPr>
-            <a:r>
-              <a:rPr b="0" sz="1200">
+              <a:rPr sz="1500" b="1">
+                <a:solidFill>
+                  <a:srgbClr val="C99A2E"/>
+                </a:solidFill>
+                <a:latin typeface="Calibri"/>
+              </a:rPr>
+              <a:t>—  </a:t>
+            </a:r>
+            <a:r>
+              <a:rPr b="0" sz="1500">
                 <a:solidFill>
                   <a:srgbClr val="4A5A66"/>
                 </a:solidFill>
                 <a:latin typeface="Calibri"/>
               </a:rPr>
-              <a:t>[Friend's section] Identification of motor dynamics.</a:t>
-            </a:r>
-          </a:p>
-        </p:txBody>
-      </p:sp>
-      <p:sp>
-        <p:nvSpPr>
-          <p:cNvPr id="12" name="Rounded Rectangle 11"/>
-          <p:cNvSpPr/>
-          <p:nvPr/>
-        </p:nvSpPr>
-        <p:spPr>
-          <a:xfrm>
-            <a:off x="868680" y="3401568"/>
-            <a:ext cx="5202936" cy="1371600"/>
-          </a:xfrm>
-          <a:prstGeom prst="roundRect">
-            <a:avLst>
-              <a:gd name="adj" fmla="val 6000"/>
-            </a:avLst>
-          </a:prstGeom>
-          <a:solidFill>
-            <a:srgbClr val="FFFFFF"/>
-          </a:solidFill>
-          <a:ln w="12700">
-            <a:solidFill>
-              <a:srgbClr val="D9D2C4"/>
-            </a:solidFill>
-          </a:ln>
-          <a:effectLst/>
-        </p:spPr>
-        <p:style>
-          <a:lnRef idx="1">
-            <a:schemeClr val="accent1"/>
-          </a:lnRef>
-          <a:fillRef idx="3">
-            <a:schemeClr val="accent1"/>
-          </a:fillRef>
-          <a:effectRef idx="2">
-            <a:schemeClr val="accent1"/>
-          </a:effectRef>
-          <a:fontRef idx="minor">
-            <a:schemeClr val="lt1"/>
-          </a:fontRef>
-        </p:style>
-        <p:txBody>
-          <a:bodyPr rtlCol="0" anchor="ctr"/>
-          <a:lstStyle/>
-          <a:p>
-            <a:pPr algn="ctr"/>
-          </a:p>
-        </p:txBody>
-      </p:sp>
-      <p:sp>
-        <p:nvSpPr>
-          <p:cNvPr id="13" name="TextBox 12"/>
-          <p:cNvSpPr txBox="1"/>
-          <p:nvPr/>
-        </p:nvSpPr>
-        <p:spPr>
-          <a:xfrm>
-            <a:off x="1051560" y="3547872"/>
-            <a:ext cx="640080" cy="1097280"/>
-          </a:xfrm>
-          <a:prstGeom prst="rect">
-            <a:avLst/>
-          </a:prstGeom>
-          <a:noFill/>
-        </p:spPr>
-        <p:txBody>
-          <a:bodyPr wrap="square" anchor="t" lIns="0" rIns="0" tIns="0" bIns="0">
-            <a:spAutoFit/>
-          </a:bodyPr>
-          <a:lstStyle/>
-          <a:p>
-            <a:pPr algn="l">
-              <a:lnSpc>
-                <a:spcPct val="100000"/>
-              </a:lnSpc>
-              <a:spcBef>
-                <a:spcPts val="0"/>
-              </a:spcBef>
-              <a:spcAft>
-                <a:spcPts val="600"/>
-              </a:spcAft>
-            </a:pPr>
-            <a:r>
-              <a:rPr b="1" sz="3000">
-                <a:solidFill>
-                  <a:srgbClr val="E07A5F"/>
-                </a:solidFill>
-                <a:latin typeface="Georgia"/>
-              </a:rPr>
-              <a:t>III</a:t>
-            </a:r>
-          </a:p>
-        </p:txBody>
-      </p:sp>
-      <p:sp>
-        <p:nvSpPr>
-          <p:cNvPr id="14" name="TextBox 13"/>
-          <p:cNvSpPr txBox="1"/>
-          <p:nvPr/>
-        </p:nvSpPr>
-        <p:spPr>
-          <a:xfrm>
-            <a:off x="1737360" y="3547872"/>
-            <a:ext cx="4151376" cy="1097280"/>
-          </a:xfrm>
-          <a:prstGeom prst="rect">
-            <a:avLst/>
-          </a:prstGeom>
-          <a:noFill/>
-        </p:spPr>
-        <p:txBody>
-          <a:bodyPr wrap="square" anchor="t" lIns="0" rIns="0" tIns="0" bIns="0">
-            <a:spAutoFit/>
-          </a:bodyPr>
-          <a:lstStyle/>
-          <a:p>
-            <a:pPr algn="l">
-              <a:lnSpc>
-                <a:spcPct val="100000"/>
-              </a:lnSpc>
-              <a:spcBef>
-                <a:spcPts val="0"/>
-              </a:spcBef>
-              <a:spcAft>
-                <a:spcPts val="400"/>
-              </a:spcAft>
-            </a:pPr>
-            <a:r>
-              <a:rPr b="1" sz="1700">
-                <a:solidFill>
-                  <a:srgbClr val="1D3557"/>
-                </a:solidFill>
-                <a:latin typeface="Georgia"/>
-              </a:rPr>
-              <a:t>ML2 — Speed filtering</a:t>
-            </a:r>
-          </a:p>
-          <a:p>
-            <a:pPr algn="l">
-              <a:lnSpc>
-                <a:spcPct val="112000"/>
-              </a:lnSpc>
-              <a:spcBef>
-                <a:spcPts val="0"/>
-              </a:spcBef>
-              <a:spcAft>
-                <a:spcPts val="600"/>
-              </a:spcAft>
-            </a:pPr>
-            <a:r>
-              <a:rPr b="0" sz="1200">
+              <a:t>A </a:t>
+            </a:r>
+            <a:r>
+              <a:rPr b="1" sz="1500">
+                <a:solidFill>
+                  <a:srgbClr val="1C2B36"/>
+                </a:solidFill>
+                <a:latin typeface="Calibri"/>
+              </a:rPr>
+              <a:t>chirp</a:t>
+            </a:r>
+            <a:r>
+              <a:rPr b="0" sz="1500">
                 <a:solidFill>
                   <a:srgbClr val="4A5A66"/>
                 </a:solidFill>
                 <a:latin typeface="Calibri"/>
               </a:rPr>
-              <a:t>Neural filter (GRU / CNN / TCN) vs EMA &amp; Kalman; nonlinear-plant gain.</a:t>
-            </a:r>
-          </a:p>
-        </p:txBody>
-      </p:sp>
-      <p:sp>
-        <p:nvSpPr>
-          <p:cNvPr id="15" name="Rounded Rectangle 14"/>
-          <p:cNvSpPr/>
-          <p:nvPr/>
-        </p:nvSpPr>
-        <p:spPr>
-          <a:xfrm>
-            <a:off x="6272784" y="3401568"/>
-            <a:ext cx="5202936" cy="1371600"/>
-          </a:xfrm>
-          <a:prstGeom prst="roundRect">
-            <a:avLst>
-              <a:gd name="adj" fmla="val 6000"/>
-            </a:avLst>
-          </a:prstGeom>
-          <a:solidFill>
-            <a:srgbClr val="FFFFFF"/>
-          </a:solidFill>
-          <a:ln w="12700">
-            <a:solidFill>
-              <a:srgbClr val="D9D2C4"/>
-            </a:solidFill>
-          </a:ln>
-          <a:effectLst/>
-        </p:spPr>
-        <p:style>
-          <a:lnRef idx="1">
-            <a:schemeClr val="accent1"/>
-          </a:lnRef>
-          <a:fillRef idx="3">
-            <a:schemeClr val="accent1"/>
-          </a:fillRef>
-          <a:effectRef idx="2">
-            <a:schemeClr val="accent1"/>
-          </a:effectRef>
-          <a:fontRef idx="minor">
-            <a:schemeClr val="lt1"/>
-          </a:fontRef>
-        </p:style>
-        <p:txBody>
-          <a:bodyPr rtlCol="0" anchor="ctr"/>
-          <a:lstStyle/>
-          <a:p>
-            <a:pPr algn="ctr"/>
-          </a:p>
-        </p:txBody>
-      </p:sp>
-      <p:sp>
-        <p:nvSpPr>
-          <p:cNvPr id="16" name="TextBox 15"/>
-          <p:cNvSpPr txBox="1"/>
-          <p:nvPr/>
-        </p:nvSpPr>
-        <p:spPr>
-          <a:xfrm>
-            <a:off x="6455664" y="3547872"/>
-            <a:ext cx="640080" cy="1097280"/>
-          </a:xfrm>
-          <a:prstGeom prst="rect">
-            <a:avLst/>
-          </a:prstGeom>
-          <a:noFill/>
-        </p:spPr>
-        <p:txBody>
-          <a:bodyPr wrap="square" anchor="t" lIns="0" rIns="0" tIns="0" bIns="0">
-            <a:spAutoFit/>
-          </a:bodyPr>
-          <a:lstStyle/>
-          <a:p>
-            <a:pPr algn="l">
-              <a:lnSpc>
-                <a:spcPct val="100000"/>
-              </a:lnSpc>
-              <a:spcBef>
-                <a:spcPts val="0"/>
-              </a:spcBef>
-              <a:spcAft>
-                <a:spcPts val="600"/>
-              </a:spcAft>
-            </a:pPr>
-            <a:r>
-              <a:rPr b="1" sz="3000">
-                <a:solidFill>
-                  <a:srgbClr val="E07A5F"/>
-                </a:solidFill>
-                <a:latin typeface="Georgia"/>
-              </a:rPr>
-              <a:t>IV</a:t>
-            </a:r>
-          </a:p>
-        </p:txBody>
-      </p:sp>
-      <p:sp>
-        <p:nvSpPr>
-          <p:cNvPr id="17" name="TextBox 16"/>
-          <p:cNvSpPr txBox="1"/>
-          <p:nvPr/>
-        </p:nvSpPr>
-        <p:spPr>
-          <a:xfrm>
-            <a:off x="7141464" y="3547872"/>
-            <a:ext cx="4151376" cy="1097280"/>
-          </a:xfrm>
-          <a:prstGeom prst="rect">
-            <a:avLst/>
-          </a:prstGeom>
-          <a:noFill/>
-        </p:spPr>
-        <p:txBody>
-          <a:bodyPr wrap="square" anchor="t" lIns="0" rIns="0" tIns="0" bIns="0">
-            <a:spAutoFit/>
-          </a:bodyPr>
-          <a:lstStyle/>
-          <a:p>
-            <a:pPr algn="l">
-              <a:lnSpc>
-                <a:spcPct val="100000"/>
-              </a:lnSpc>
-              <a:spcBef>
-                <a:spcPts val="0"/>
-              </a:spcBef>
-              <a:spcAft>
-                <a:spcPts val="400"/>
-              </a:spcAft>
-            </a:pPr>
-            <a:r>
-              <a:rPr b="1" sz="1700">
-                <a:solidFill>
-                  <a:srgbClr val="1D3557"/>
-                </a:solidFill>
-                <a:latin typeface="Georgia"/>
-              </a:rPr>
-              <a:t>Conclusion</a:t>
-            </a:r>
-          </a:p>
-          <a:p>
-            <a:pPr algn="l">
-              <a:lnSpc>
-                <a:spcPct val="112000"/>
-              </a:lnSpc>
-              <a:spcBef>
-                <a:spcPts val="0"/>
-              </a:spcBef>
-              <a:spcAft>
-                <a:spcPts val="600"/>
-              </a:spcAft>
-            </a:pPr>
-            <a:r>
-              <a:rPr b="0" sz="1200">
-                <a:solidFill>
-                  <a:srgbClr val="4A5A66"/>
-                </a:solidFill>
-                <a:latin typeface="Calibri"/>
-              </a:rPr>
-              <a:t>Key numbers, takeaways, and future directions.</a:t>
+              <a:t> excitation is held out entirely for an out-of-distribution generalisation test.</a:t>
             </a:r>
           </a:p>
         </p:txBody>
@@ -5241,7 +4739,7 @@
                 </a:solidFill>
                 <a:latin typeface="Consolas"/>
               </a:rPr>
-              <a:t>01  </a:t>
+              <a:t>04  </a:t>
             </a:r>
             <a:r>
               <a:rPr sz="1100">
@@ -5250,7 +4748,7 @@
                 </a:solidFill>
                 <a:latin typeface="Consolas"/>
               </a:rPr>
-              <a:t>PHYSICAL SETUP &amp; DATASET</a:t>
+              <a:t>ML2 — METHODS</a:t>
             </a:r>
           </a:p>
         </p:txBody>
@@ -5289,62 +4787,169 @@
               </a:spcAft>
             </a:pPr>
             <a:r>
-              <a:rPr b="1" sz="3000">
+              <a:rPr b="1" sz="2800">
                 <a:solidFill>
                   <a:srgbClr val="1D3557"/>
                 </a:solidFill>
                 <a:latin typeface="Georgia"/>
               </a:rPr>
-              <a:t>[Physical setup &amp; dataset]</a:t>
-            </a:r>
-          </a:p>
-        </p:txBody>
-      </p:sp>
-    </p:spTree>
-  </p:cSld>
-  <p:clrMapOvr>
-    <a:masterClrMapping/>
-  </p:clrMapOvr>
-</p:sld>
-</file>
-
-<file path=ppt/slides/slide4.xml><?xml version="1.0" encoding="utf-8"?>
-<p:sld xmlns:a="http://schemas.openxmlformats.org/drawingml/2006/main" xmlns:p="http://schemas.openxmlformats.org/presentationml/2006/main" xmlns:r="http://schemas.openxmlformats.org/officeDocument/2006/relationships">
-  <p:cSld>
-    <p:bg>
-      <p:bgPr>
-        <a:solidFill>
-          <a:srgbClr val="FBFAF6"/>
-        </a:solidFill>
-        <a:effectLst/>
-      </p:bgPr>
-    </p:bg>
-    <p:spTree>
-      <p:nvGrpSpPr>
-        <p:cNvPr id="1" name=""/>
-        <p:cNvGrpSpPr/>
-        <p:nvPr/>
-      </p:nvGrpSpPr>
-      <p:grpSpPr/>
-      <p:sp>
-        <p:nvSpPr>
-          <p:cNvPr id="2" name="Rectangle 1"/>
-          <p:cNvSpPr/>
+              <a:t>Classical baselines vs learned filters.</a:t>
+            </a:r>
+          </a:p>
+        </p:txBody>
+      </p:sp>
+      <p:sp>
+        <p:nvSpPr>
+          <p:cNvPr id="6" name="TextBox 5"/>
+          <p:cNvSpPr txBox="1"/>
           <p:nvPr/>
         </p:nvSpPr>
         <p:spPr>
           <a:xfrm>
-            <a:off x="566928" y="502920"/>
-            <a:ext cx="17780" cy="5852160"/>
+            <a:off x="868680" y="1828800"/>
+            <a:ext cx="10607040" cy="603504"/>
           </a:xfrm>
           <a:prstGeom prst="rect">
             <a:avLst/>
           </a:prstGeom>
+          <a:noFill/>
+        </p:spPr>
+        <p:txBody>
+          <a:bodyPr wrap="square" anchor="t" lIns="0" rIns="0" tIns="0" bIns="0">
+            <a:spAutoFit/>
+          </a:bodyPr>
+          <a:lstStyle/>
+          <a:p>
+            <a:pPr>
+              <a:lnSpc>
+                <a:spcPct val="120000"/>
+              </a:lnSpc>
+            </a:pPr>
+            <a:r>
+              <a:rPr b="0" sz="1500">
+                <a:solidFill>
+                  <a:srgbClr val="4A5A66"/>
+                </a:solidFill>
+                <a:latin typeface="Calibri"/>
+              </a:rPr>
+              <a:t>Baselines tuned on validation, evaluated on test: </a:t>
+            </a:r>
+            <a:r>
+              <a:rPr b="1" sz="1500">
+                <a:solidFill>
+                  <a:srgbClr val="1C2B36"/>
+                </a:solidFill>
+                <a:latin typeface="Calibri"/>
+              </a:rPr>
+              <a:t>EMA</a:t>
+            </a:r>
+            <a:r>
+              <a:rPr b="0" sz="1500">
+                <a:solidFill>
+                  <a:srgbClr val="4A5A66"/>
+                </a:solidFill>
+                <a:latin typeface="Calibri"/>
+              </a:rPr>
+              <a:t> (α tuned) and a steady-state </a:t>
+            </a:r>
+            <a:r>
+              <a:rPr b="1" sz="1500">
+                <a:solidFill>
+                  <a:srgbClr val="1C2B36"/>
+                </a:solidFill>
+                <a:latin typeface="Calibri"/>
+              </a:rPr>
+              <a:t>Kalman</a:t>
+            </a:r>
+            <a:r>
+              <a:rPr b="0" sz="1500">
+                <a:solidFill>
+                  <a:srgbClr val="4A5A66"/>
+                </a:solidFill>
+                <a:latin typeface="Calibri"/>
+              </a:rPr>
+              <a:t> filter on the nominal linear </a:t>
+            </a:r>
+            <a:r>
+              <a:rPr b="0" sz="1380">
+                <a:solidFill>
+                  <a:srgbClr val="1D3557"/>
+                </a:solidFill>
+                <a:latin typeface="Consolas"/>
+              </a:rPr>
+              <a:t>[i, ω]</a:t>
+            </a:r>
+            <a:r>
+              <a:rPr b="0" sz="1500">
+                <a:solidFill>
+                  <a:srgbClr val="4A5A66"/>
+                </a:solidFill>
+                <a:latin typeface="Calibri"/>
+              </a:rPr>
+              <a:t> model — whose model </a:t>
+            </a:r>
+            <a:r>
+              <a:rPr b="1" sz="1500">
+                <a:solidFill>
+                  <a:srgbClr val="1C2B36"/>
+                </a:solidFill>
+                <a:latin typeface="Calibri"/>
+              </a:rPr>
+              <a:t>omits the gravity term</a:t>
+            </a:r>
+            <a:r>
+              <a:rPr b="0" sz="1500">
+                <a:solidFill>
+                  <a:srgbClr val="4A5A66"/>
+                </a:solidFill>
+                <a:latin typeface="Calibri"/>
+              </a:rPr>
+              <a:t>. Three learned filters share the same causal </a:t>
+            </a:r>
+            <a:r>
+              <a:rPr b="1" sz="1500">
+                <a:solidFill>
+                  <a:srgbClr val="1C2B36"/>
+                </a:solidFill>
+                <a:latin typeface="Calibri"/>
+              </a:rPr>
+              <a:t>64 ms</a:t>
+            </a:r>
+            <a:r>
+              <a:rPr b="0" sz="1500">
+                <a:solidFill>
+                  <a:srgbClr val="4A5A66"/>
+                </a:solidFill>
+                <a:latin typeface="Calibri"/>
+              </a:rPr>
+              <a:t> window over [omega_noisy, voltage].</a:t>
+            </a:r>
+          </a:p>
+        </p:txBody>
+      </p:sp>
+      <p:sp>
+        <p:nvSpPr>
+          <p:cNvPr id="7" name="Rounded Rectangle 6"/>
+          <p:cNvSpPr/>
+          <p:nvPr/>
+        </p:nvSpPr>
+        <p:spPr>
+          <a:xfrm>
+            <a:off x="868680" y="2697480"/>
+            <a:ext cx="3383280" cy="1874519"/>
+          </a:xfrm>
+          <a:prstGeom prst="roundRect">
+            <a:avLst>
+              <a:gd name="adj" fmla="val 6000"/>
+            </a:avLst>
+          </a:prstGeom>
           <a:solidFill>
-            <a:srgbClr val="D9D2C4"/>
+            <a:srgbClr val="FFFFFF"/>
           </a:solidFill>
-          <a:ln>
-            <a:noFill/>
+          <a:ln w="12700">
+            <a:solidFill>
+              <a:srgbClr val="D9D2C4"/>
+            </a:solidFill>
           </a:ln>
           <a:effectLst/>
         </p:spPr>
@@ -5372,14 +4977,14 @@
       </p:sp>
       <p:sp>
         <p:nvSpPr>
-          <p:cNvPr id="3" name="Rectangle 2"/>
+          <p:cNvPr id="8" name="Rectangle 7"/>
           <p:cNvSpPr/>
           <p:nvPr/>
         </p:nvSpPr>
         <p:spPr>
           <a:xfrm>
-            <a:off x="566928" y="502920"/>
-            <a:ext cx="30480" cy="566928"/>
+            <a:off x="868680" y="2697480"/>
+            <a:ext cx="38100" cy="1874519"/>
           </a:xfrm>
           <a:prstGeom prst="rect">
             <a:avLst/>
@@ -5416,14 +5021,14 @@
       </p:sp>
       <p:sp>
         <p:nvSpPr>
-          <p:cNvPr id="4" name="TextBox 3"/>
+          <p:cNvPr id="9" name="TextBox 8"/>
           <p:cNvSpPr txBox="1"/>
           <p:nvPr/>
         </p:nvSpPr>
         <p:spPr>
           <a:xfrm>
-            <a:off x="868680" y="548640"/>
-            <a:ext cx="10607040" cy="320040"/>
+            <a:off x="1069848" y="2862072"/>
+            <a:ext cx="3017520" cy="1600199"/>
           </a:xfrm>
           <a:prstGeom prst="rect">
             <a:avLst/>
@@ -5436,57 +5041,31 @@
           </a:bodyPr>
           <a:lstStyle/>
           <a:p>
-            <a:pPr>
+            <a:pPr algn="l">
+              <a:lnSpc>
+                <a:spcPct val="112000"/>
+              </a:lnSpc>
+              <a:spcBef>
+                <a:spcPts val="0"/>
+              </a:spcBef>
+              <a:spcAft>
+                <a:spcPts val="400"/>
+              </a:spcAft>
+            </a:pPr>
+            <a:r>
+              <a:rPr b="0" sz="1000">
+                <a:solidFill>
+                  <a:srgbClr val="2A9D8F"/>
+                </a:solidFill>
+                <a:latin typeface="Consolas"/>
+              </a:rPr>
+              <a:t>GRU</a:t>
+            </a:r>
+          </a:p>
+          <a:p>
+            <a:pPr algn="l">
               <a:lnSpc>
                 <a:spcPct val="100000"/>
-              </a:lnSpc>
-            </a:pPr>
-            <a:r>
-              <a:rPr sz="1100" b="1">
-                <a:solidFill>
-                  <a:srgbClr val="E07A5F"/>
-                </a:solidFill>
-                <a:latin typeface="Consolas"/>
-              </a:rPr>
-              <a:t>02  </a:t>
-            </a:r>
-            <a:r>
-              <a:rPr sz="1100">
-                <a:solidFill>
-                  <a:srgbClr val="2A9D8F"/>
-                </a:solidFill>
-                <a:latin typeface="Consolas"/>
-              </a:rPr>
-              <a:t>ML1 — MOTOR IDENTIFICATION</a:t>
-            </a:r>
-          </a:p>
-        </p:txBody>
-      </p:sp>
-      <p:sp>
-        <p:nvSpPr>
-          <p:cNvPr id="5" name="TextBox 4"/>
-          <p:cNvSpPr txBox="1"/>
-          <p:nvPr/>
-        </p:nvSpPr>
-        <p:spPr>
-          <a:xfrm>
-            <a:off x="868680" y="960120"/>
-            <a:ext cx="10607040" cy="1280160"/>
-          </a:xfrm>
-          <a:prstGeom prst="rect">
-            <a:avLst/>
-          </a:prstGeom>
-          <a:noFill/>
-        </p:spPr>
-        <p:txBody>
-          <a:bodyPr wrap="square" anchor="t" lIns="0" rIns="0" tIns="0" bIns="0">
-            <a:spAutoFit/>
-          </a:bodyPr>
-          <a:lstStyle/>
-          <a:p>
-            <a:pPr algn="l">
-              <a:lnSpc>
-                <a:spcPct val="102000"/>
               </a:lnSpc>
               <a:spcBef>
                 <a:spcPts val="0"/>
@@ -5496,204 +5075,19 @@
               </a:spcAft>
             </a:pPr>
             <a:r>
-              <a:rPr b="1" sz="3000">
+              <a:rPr b="1" sz="1600">
                 <a:solidFill>
                   <a:srgbClr val="1D3557"/>
                 </a:solidFill>
                 <a:latin typeface="Georgia"/>
               </a:rPr>
-              <a:t>[ML1 — motor identification]</a:t>
-            </a:r>
-          </a:p>
-        </p:txBody>
-      </p:sp>
-    </p:spTree>
-  </p:cSld>
-  <p:clrMapOvr>
-    <a:masterClrMapping/>
-  </p:clrMapOvr>
-</p:sld>
-</file>
-
-<file path=ppt/slides/slide5.xml><?xml version="1.0" encoding="utf-8"?>
-<p:sld xmlns:a="http://schemas.openxmlformats.org/drawingml/2006/main" xmlns:p="http://schemas.openxmlformats.org/presentationml/2006/main" xmlns:r="http://schemas.openxmlformats.org/officeDocument/2006/relationships">
-  <p:cSld>
-    <p:bg>
-      <p:bgPr>
-        <a:solidFill>
-          <a:srgbClr val="FBFAF6"/>
-        </a:solidFill>
-        <a:effectLst/>
-      </p:bgPr>
-    </p:bg>
-    <p:spTree>
-      <p:nvGrpSpPr>
-        <p:cNvPr id="1" name=""/>
-        <p:cNvGrpSpPr/>
-        <p:nvPr/>
-      </p:nvGrpSpPr>
-      <p:grpSpPr/>
-      <p:sp>
-        <p:nvSpPr>
-          <p:cNvPr id="2" name="Rectangle 1"/>
-          <p:cNvSpPr/>
-          <p:nvPr/>
-        </p:nvSpPr>
-        <p:spPr>
-          <a:xfrm>
-            <a:off x="566928" y="502920"/>
-            <a:ext cx="17780" cy="5852160"/>
-          </a:xfrm>
-          <a:prstGeom prst="rect">
-            <a:avLst/>
-          </a:prstGeom>
-          <a:solidFill>
-            <a:srgbClr val="D9D2C4"/>
-          </a:solidFill>
-          <a:ln>
-            <a:noFill/>
-          </a:ln>
-          <a:effectLst/>
-        </p:spPr>
-        <p:style>
-          <a:lnRef idx="1">
-            <a:schemeClr val="accent1"/>
-          </a:lnRef>
-          <a:fillRef idx="3">
-            <a:schemeClr val="accent1"/>
-          </a:fillRef>
-          <a:effectRef idx="2">
-            <a:schemeClr val="accent1"/>
-          </a:effectRef>
-          <a:fontRef idx="minor">
-            <a:schemeClr val="lt1"/>
-          </a:fontRef>
-        </p:style>
-        <p:txBody>
-          <a:bodyPr rtlCol="0" anchor="ctr"/>
-          <a:lstStyle/>
-          <a:p>
-            <a:pPr algn="ctr"/>
-          </a:p>
-        </p:txBody>
-      </p:sp>
-      <p:sp>
-        <p:nvSpPr>
-          <p:cNvPr id="3" name="Rectangle 2"/>
-          <p:cNvSpPr/>
-          <p:nvPr/>
-        </p:nvSpPr>
-        <p:spPr>
-          <a:xfrm>
-            <a:off x="566928" y="502920"/>
-            <a:ext cx="30480" cy="566928"/>
-          </a:xfrm>
-          <a:prstGeom prst="rect">
-            <a:avLst/>
-          </a:prstGeom>
-          <a:solidFill>
-            <a:srgbClr val="2A9D8F"/>
-          </a:solidFill>
-          <a:ln>
-            <a:noFill/>
-          </a:ln>
-          <a:effectLst/>
-        </p:spPr>
-        <p:style>
-          <a:lnRef idx="1">
-            <a:schemeClr val="accent1"/>
-          </a:lnRef>
-          <a:fillRef idx="3">
-            <a:schemeClr val="accent1"/>
-          </a:fillRef>
-          <a:effectRef idx="2">
-            <a:schemeClr val="accent1"/>
-          </a:effectRef>
-          <a:fontRef idx="minor">
-            <a:schemeClr val="lt1"/>
-          </a:fontRef>
-        </p:style>
-        <p:txBody>
-          <a:bodyPr rtlCol="0" anchor="ctr"/>
-          <a:lstStyle/>
-          <a:p>
-            <a:pPr algn="ctr"/>
-          </a:p>
-        </p:txBody>
-      </p:sp>
-      <p:sp>
-        <p:nvSpPr>
-          <p:cNvPr id="4" name="TextBox 3"/>
-          <p:cNvSpPr txBox="1"/>
-          <p:nvPr/>
-        </p:nvSpPr>
-        <p:spPr>
-          <a:xfrm>
-            <a:off x="868680" y="548640"/>
-            <a:ext cx="10607040" cy="320040"/>
-          </a:xfrm>
-          <a:prstGeom prst="rect">
-            <a:avLst/>
-          </a:prstGeom>
-          <a:noFill/>
-        </p:spPr>
-        <p:txBody>
-          <a:bodyPr wrap="square" anchor="t" lIns="0" rIns="0" tIns="0" bIns="0">
-            <a:spAutoFit/>
-          </a:bodyPr>
-          <a:lstStyle/>
-          <a:p>
-            <a:pPr>
-              <a:lnSpc>
-                <a:spcPct val="100000"/>
-              </a:lnSpc>
-            </a:pPr>
-            <a:r>
-              <a:rPr sz="1100" b="1">
-                <a:solidFill>
-                  <a:srgbClr val="E07A5F"/>
-                </a:solidFill>
-                <a:latin typeface="Consolas"/>
-              </a:rPr>
-              <a:t>02  </a:t>
-            </a:r>
-            <a:r>
-              <a:rPr sz="1100">
-                <a:solidFill>
-                  <a:srgbClr val="2A9D8F"/>
-                </a:solidFill>
-                <a:latin typeface="Consolas"/>
-              </a:rPr>
-              <a:t>ML1 — RESULTS</a:t>
-            </a:r>
-          </a:p>
-        </p:txBody>
-      </p:sp>
-      <p:sp>
-        <p:nvSpPr>
-          <p:cNvPr id="5" name="TextBox 4"/>
-          <p:cNvSpPr txBox="1"/>
-          <p:nvPr/>
-        </p:nvSpPr>
-        <p:spPr>
-          <a:xfrm>
-            <a:off x="868680" y="960120"/>
-            <a:ext cx="10607040" cy="1280160"/>
-          </a:xfrm>
-          <a:prstGeom prst="rect">
-            <a:avLst/>
-          </a:prstGeom>
-          <a:noFill/>
-        </p:spPr>
-        <p:txBody>
-          <a:bodyPr wrap="square" anchor="t" lIns="0" rIns="0" tIns="0" bIns="0">
-            <a:spAutoFit/>
-          </a:bodyPr>
-          <a:lstStyle/>
+              <a:t>GRU  (3 489 params)</a:t>
+            </a:r>
+          </a:p>
           <a:p>
             <a:pPr algn="l">
               <a:lnSpc>
-                <a:spcPct val="102000"/>
+                <a:spcPct val="110000"/>
               </a:lnSpc>
               <a:spcBef>
                 <a:spcPts val="0"/>
@@ -5703,59 +5097,99 @@
               </a:spcAft>
             </a:pPr>
             <a:r>
-              <a:rPr b="1" sz="3000">
-                <a:solidFill>
-                  <a:srgbClr val="1D3557"/>
-                </a:solidFill>
-                <a:latin typeface="Georgia"/>
-              </a:rPr>
-              <a:t>[ML1 — results &amp; validation]</a:t>
-            </a:r>
-          </a:p>
-        </p:txBody>
-      </p:sp>
-    </p:spTree>
-  </p:cSld>
-  <p:clrMapOvr>
-    <a:masterClrMapping/>
-  </p:clrMapOvr>
-</p:sld>
-</file>
-
-<file path=ppt/slides/slide6.xml><?xml version="1.0" encoding="utf-8"?>
-<p:sld xmlns:a="http://schemas.openxmlformats.org/drawingml/2006/main" xmlns:p="http://schemas.openxmlformats.org/presentationml/2006/main" xmlns:r="http://schemas.openxmlformats.org/officeDocument/2006/relationships">
-  <p:cSld>
-    <p:bg>
-      <p:bgPr>
-        <a:solidFill>
-          <a:srgbClr val="FBFAF6"/>
-        </a:solidFill>
-        <a:effectLst/>
-      </p:bgPr>
-    </p:bg>
-    <p:spTree>
-      <p:nvGrpSpPr>
-        <p:cNvPr id="1" name=""/>
-        <p:cNvGrpSpPr/>
-        <p:nvPr/>
-      </p:nvGrpSpPr>
-      <p:grpSpPr/>
-      <p:sp>
-        <p:nvSpPr>
-          <p:cNvPr id="2" name="Rectangle 1"/>
+              <a:rPr b="0" sz="1200">
+                <a:solidFill>
+                  <a:srgbClr val="4A5A66"/>
+                </a:solidFill>
+                <a:latin typeface="Calibri"/>
+              </a:rPr>
+              <a:t>Recurrent hidden state accumulates </a:t>
+            </a:r>
+            <a:r>
+              <a:rPr b="1" sz="1200">
+                <a:solidFill>
+                  <a:srgbClr val="1C2B36"/>
+                </a:solidFill>
+                <a:latin typeface="Calibri"/>
+              </a:rPr>
+              <a:t>64 ms</a:t>
+            </a:r>
+            <a:r>
+              <a:rPr b="0" sz="1200">
+                <a:solidFill>
+                  <a:srgbClr val="4A5A66"/>
+                </a:solidFill>
+                <a:latin typeface="Calibri"/>
+              </a:rPr>
+              <a:t> of context. hidden = 32, 1 layer.</a:t>
+            </a:r>
+          </a:p>
+        </p:txBody>
+      </p:sp>
+      <p:sp>
+        <p:nvSpPr>
+          <p:cNvPr id="10" name="Rounded Rectangle 9"/>
           <p:cNvSpPr/>
           <p:nvPr/>
         </p:nvSpPr>
         <p:spPr>
           <a:xfrm>
-            <a:off x="566928" y="502920"/>
-            <a:ext cx="17780" cy="5852160"/>
+            <a:off x="4480560" y="2697480"/>
+            <a:ext cx="3383280" cy="1874519"/>
+          </a:xfrm>
+          <a:prstGeom prst="roundRect">
+            <a:avLst>
+              <a:gd name="adj" fmla="val 6000"/>
+            </a:avLst>
+          </a:prstGeom>
+          <a:solidFill>
+            <a:srgbClr val="FFFFFF"/>
+          </a:solidFill>
+          <a:ln w="12700">
+            <a:solidFill>
+              <a:srgbClr val="D9D2C4"/>
+            </a:solidFill>
+          </a:ln>
+          <a:effectLst/>
+        </p:spPr>
+        <p:style>
+          <a:lnRef idx="1">
+            <a:schemeClr val="accent1"/>
+          </a:lnRef>
+          <a:fillRef idx="3">
+            <a:schemeClr val="accent1"/>
+          </a:fillRef>
+          <a:effectRef idx="2">
+            <a:schemeClr val="accent1"/>
+          </a:effectRef>
+          <a:fontRef idx="minor">
+            <a:schemeClr val="lt1"/>
+          </a:fontRef>
+        </p:style>
+        <p:txBody>
+          <a:bodyPr rtlCol="0" anchor="ctr"/>
+          <a:lstStyle/>
+          <a:p>
+            <a:pPr algn="ctr"/>
+          </a:p>
+        </p:txBody>
+      </p:sp>
+      <p:sp>
+        <p:nvSpPr>
+          <p:cNvPr id="11" name="Rectangle 10"/>
+          <p:cNvSpPr/>
+          <p:nvPr/>
+        </p:nvSpPr>
+        <p:spPr>
+          <a:xfrm>
+            <a:off x="4480560" y="2697480"/>
+            <a:ext cx="38100" cy="1874519"/>
           </a:xfrm>
           <a:prstGeom prst="rect">
             <a:avLst/>
           </a:prstGeom>
           <a:solidFill>
-            <a:srgbClr val="D9D2C4"/>
+            <a:srgbClr val="1D3557"/>
           </a:solidFill>
           <a:ln>
             <a:noFill/>
@@ -5786,58 +5220,14 @@
       </p:sp>
       <p:sp>
         <p:nvSpPr>
-          <p:cNvPr id="3" name="Rectangle 2"/>
-          <p:cNvSpPr/>
-          <p:nvPr/>
-        </p:nvSpPr>
-        <p:spPr>
-          <a:xfrm>
-            <a:off x="566928" y="502920"/>
-            <a:ext cx="30480" cy="566928"/>
-          </a:xfrm>
-          <a:prstGeom prst="rect">
-            <a:avLst/>
-          </a:prstGeom>
-          <a:solidFill>
-            <a:srgbClr val="2A9D8F"/>
-          </a:solidFill>
-          <a:ln>
-            <a:noFill/>
-          </a:ln>
-          <a:effectLst/>
-        </p:spPr>
-        <p:style>
-          <a:lnRef idx="1">
-            <a:schemeClr val="accent1"/>
-          </a:lnRef>
-          <a:fillRef idx="3">
-            <a:schemeClr val="accent1"/>
-          </a:fillRef>
-          <a:effectRef idx="2">
-            <a:schemeClr val="accent1"/>
-          </a:effectRef>
-          <a:fontRef idx="minor">
-            <a:schemeClr val="lt1"/>
-          </a:fontRef>
-        </p:style>
-        <p:txBody>
-          <a:bodyPr rtlCol="0" anchor="ctr"/>
-          <a:lstStyle/>
-          <a:p>
-            <a:pPr algn="ctr"/>
-          </a:p>
-        </p:txBody>
-      </p:sp>
-      <p:sp>
-        <p:nvSpPr>
-          <p:cNvPr id="4" name="TextBox 3"/>
+          <p:cNvPr id="12" name="TextBox 11"/>
           <p:cNvSpPr txBox="1"/>
           <p:nvPr/>
         </p:nvSpPr>
         <p:spPr>
           <a:xfrm>
-            <a:off x="868680" y="548640"/>
-            <a:ext cx="10607040" cy="320040"/>
+            <a:off x="4681728" y="2862072"/>
+            <a:ext cx="3017520" cy="1600199"/>
           </a:xfrm>
           <a:prstGeom prst="rect">
             <a:avLst/>
@@ -5850,57 +5240,31 @@
           </a:bodyPr>
           <a:lstStyle/>
           <a:p>
-            <a:pPr>
+            <a:pPr algn="l">
+              <a:lnSpc>
+                <a:spcPct val="112000"/>
+              </a:lnSpc>
+              <a:spcBef>
+                <a:spcPts val="0"/>
+              </a:spcBef>
+              <a:spcAft>
+                <a:spcPts val="400"/>
+              </a:spcAft>
+            </a:pPr>
+            <a:r>
+              <a:rPr b="0" sz="1000">
+                <a:solidFill>
+                  <a:srgbClr val="1D3557"/>
+                </a:solidFill>
+                <a:latin typeface="Consolas"/>
+              </a:rPr>
+              <a:t>CNN</a:t>
+            </a:r>
+          </a:p>
+          <a:p>
+            <a:pPr algn="l">
               <a:lnSpc>
                 <a:spcPct val="100000"/>
-              </a:lnSpc>
-            </a:pPr>
-            <a:r>
-              <a:rPr sz="1100" b="1">
-                <a:solidFill>
-                  <a:srgbClr val="E07A5F"/>
-                </a:solidFill>
-                <a:latin typeface="Consolas"/>
-              </a:rPr>
-              <a:t>03  </a:t>
-            </a:r>
-            <a:r>
-              <a:rPr sz="1100">
-                <a:solidFill>
-                  <a:srgbClr val="2A9D8F"/>
-                </a:solidFill>
-                <a:latin typeface="Consolas"/>
-              </a:rPr>
-              <a:t>ML2 — SPEED FILTER: TASK &amp; DATA</a:t>
-            </a:r>
-          </a:p>
-        </p:txBody>
-      </p:sp>
-      <p:sp>
-        <p:nvSpPr>
-          <p:cNvPr id="5" name="TextBox 4"/>
-          <p:cNvSpPr txBox="1"/>
-          <p:nvPr/>
-        </p:nvSpPr>
-        <p:spPr>
-          <a:xfrm>
-            <a:off x="868680" y="960120"/>
-            <a:ext cx="10607040" cy="1280160"/>
-          </a:xfrm>
-          <a:prstGeom prst="rect">
-            <a:avLst/>
-          </a:prstGeom>
-          <a:noFill/>
-        </p:spPr>
-        <p:txBody>
-          <a:bodyPr wrap="square" anchor="t" lIns="0" rIns="0" tIns="0" bIns="0">
-            <a:spAutoFit/>
-          </a:bodyPr>
-          <a:lstStyle/>
-          <a:p>
-            <a:pPr algn="l">
-              <a:lnSpc>
-                <a:spcPct val="102000"/>
               </a:lnSpc>
               <a:spcBef>
                 <a:spcPts val="0"/>
@@ -5910,27 +5274,141 @@
               </a:spcAft>
             </a:pPr>
             <a:r>
-              <a:rPr b="1" sz="2800">
+              <a:rPr b="1" sz="1600">
                 <a:solidFill>
                   <a:srgbClr val="1D3557"/>
                 </a:solidFill>
                 <a:latin typeface="Georgia"/>
               </a:rPr>
-              <a:t>Denoise the speed of a nonlinear plant.</a:t>
-            </a:r>
-          </a:p>
-        </p:txBody>
-      </p:sp>
-      <p:sp>
-        <p:nvSpPr>
-          <p:cNvPr id="6" name="TextBox 5"/>
+              <a:t>CNN  (8 801 params)</a:t>
+            </a:r>
+          </a:p>
+          <a:p>
+            <a:pPr algn="l">
+              <a:lnSpc>
+                <a:spcPct val="110000"/>
+              </a:lnSpc>
+              <a:spcBef>
+                <a:spcPts val="0"/>
+              </a:spcBef>
+              <a:spcAft>
+                <a:spcPts val="600"/>
+              </a:spcAft>
+            </a:pPr>
+            <a:r>
+              <a:rPr b="0" sz="1200">
+                <a:solidFill>
+                  <a:srgbClr val="4A5A66"/>
+                </a:solidFill>
+                <a:latin typeface="Calibri"/>
+              </a:rPr>
+              <a:t>Stacked causal 1-D convolutions. channels = 32, k = 8, depth = 2.</a:t>
+            </a:r>
+          </a:p>
+        </p:txBody>
+      </p:sp>
+      <p:sp>
+        <p:nvSpPr>
+          <p:cNvPr id="13" name="Rounded Rectangle 12"/>
+          <p:cNvSpPr/>
+          <p:nvPr/>
+        </p:nvSpPr>
+        <p:spPr>
+          <a:xfrm>
+            <a:off x="8092440" y="2697480"/>
+            <a:ext cx="3383280" cy="1874519"/>
+          </a:xfrm>
+          <a:prstGeom prst="roundRect">
+            <a:avLst>
+              <a:gd name="adj" fmla="val 6000"/>
+            </a:avLst>
+          </a:prstGeom>
+          <a:solidFill>
+            <a:srgbClr val="FFFFFF"/>
+          </a:solidFill>
+          <a:ln w="12700">
+            <a:solidFill>
+              <a:srgbClr val="D9D2C4"/>
+            </a:solidFill>
+          </a:ln>
+          <a:effectLst/>
+        </p:spPr>
+        <p:style>
+          <a:lnRef idx="1">
+            <a:schemeClr val="accent1"/>
+          </a:lnRef>
+          <a:fillRef idx="3">
+            <a:schemeClr val="accent1"/>
+          </a:fillRef>
+          <a:effectRef idx="2">
+            <a:schemeClr val="accent1"/>
+          </a:effectRef>
+          <a:fontRef idx="minor">
+            <a:schemeClr val="lt1"/>
+          </a:fontRef>
+        </p:style>
+        <p:txBody>
+          <a:bodyPr rtlCol="0" anchor="ctr"/>
+          <a:lstStyle/>
+          <a:p>
+            <a:pPr algn="ctr"/>
+          </a:p>
+        </p:txBody>
+      </p:sp>
+      <p:sp>
+        <p:nvSpPr>
+          <p:cNvPr id="14" name="Rectangle 13"/>
+          <p:cNvSpPr/>
+          <p:nvPr/>
+        </p:nvSpPr>
+        <p:spPr>
+          <a:xfrm>
+            <a:off x="8092440" y="2697480"/>
+            <a:ext cx="38100" cy="1874519"/>
+          </a:xfrm>
+          <a:prstGeom prst="rect">
+            <a:avLst/>
+          </a:prstGeom>
+          <a:solidFill>
+            <a:srgbClr val="E07A5F"/>
+          </a:solidFill>
+          <a:ln>
+            <a:noFill/>
+          </a:ln>
+          <a:effectLst/>
+        </p:spPr>
+        <p:style>
+          <a:lnRef idx="1">
+            <a:schemeClr val="accent1"/>
+          </a:lnRef>
+          <a:fillRef idx="3">
+            <a:schemeClr val="accent1"/>
+          </a:fillRef>
+          <a:effectRef idx="2">
+            <a:schemeClr val="accent1"/>
+          </a:effectRef>
+          <a:fontRef idx="minor">
+            <a:schemeClr val="lt1"/>
+          </a:fontRef>
+        </p:style>
+        <p:txBody>
+          <a:bodyPr rtlCol="0" anchor="ctr"/>
+          <a:lstStyle/>
+          <a:p>
+            <a:pPr algn="ctr"/>
+          </a:p>
+        </p:txBody>
+      </p:sp>
+      <p:sp>
+        <p:nvSpPr>
+          <p:cNvPr id="15" name="TextBox 14"/>
           <p:cNvSpPr txBox="1"/>
           <p:nvPr/>
         </p:nvSpPr>
         <p:spPr>
           <a:xfrm>
-            <a:off x="868680" y="1828800"/>
-            <a:ext cx="10607040" cy="658368"/>
+            <a:off x="8293608" y="2862072"/>
+            <a:ext cx="3017520" cy="1600199"/>
           </a:xfrm>
           <a:prstGeom prst="rect">
             <a:avLst/>
@@ -5943,68 +5421,100 @@
           </a:bodyPr>
           <a:lstStyle/>
           <a:p>
-            <a:pPr>
+            <a:pPr algn="l">
               <a:lnSpc>
-                <a:spcPct val="120000"/>
+                <a:spcPct val="112000"/>
               </a:lnSpc>
+              <a:spcBef>
+                <a:spcPts val="0"/>
+              </a:spcBef>
+              <a:spcAft>
+                <a:spcPts val="400"/>
+              </a:spcAft>
             </a:pPr>
             <a:r>
-              <a:rPr b="0" sz="1500">
+              <a:rPr b="0" sz="1000">
+                <a:solidFill>
+                  <a:srgbClr val="E07A5F"/>
+                </a:solidFill>
+                <a:latin typeface="Consolas"/>
+              </a:rPr>
+              <a:t>TCN</a:t>
+            </a:r>
+          </a:p>
+          <a:p>
+            <a:pPr algn="l">
+              <a:lnSpc>
+                <a:spcPct val="100000"/>
+              </a:lnSpc>
+              <a:spcBef>
+                <a:spcPts val="0"/>
+              </a:spcBef>
+              <a:spcAft>
+                <a:spcPts val="600"/>
+              </a:spcAft>
+            </a:pPr>
+            <a:r>
+              <a:rPr b="1" sz="1600">
+                <a:solidFill>
+                  <a:srgbClr val="1D3557"/>
+                </a:solidFill>
+                <a:latin typeface="Georgia"/>
+              </a:rPr>
+              <a:t>TCN  (33 153 params)</a:t>
+            </a:r>
+          </a:p>
+          <a:p>
+            <a:pPr algn="l">
+              <a:lnSpc>
+                <a:spcPct val="110000"/>
+              </a:lnSpc>
+              <a:spcBef>
+                <a:spcPts val="0"/>
+              </a:spcBef>
+              <a:spcAft>
+                <a:spcPts val="600"/>
+              </a:spcAft>
+            </a:pPr>
+            <a:r>
+              <a:rPr b="0" sz="1200">
                 <a:solidFill>
                   <a:srgbClr val="4A5A66"/>
                 </a:solidFill>
                 <a:latin typeface="Calibri"/>
               </a:rPr>
-              <a:t>Recover the true motor speed from a noisy speed sensor and the known command voltage. The vertical rod adds a gravity torque </a:t>
-            </a:r>
-            <a:r>
-              <a:rPr b="1" sz="1500">
+              <a:t>Dilated causal convolutions. Receptive field = </a:t>
+            </a:r>
+            <a:r>
+              <a:rPr b="1" sz="1200">
                 <a:solidFill>
                   <a:srgbClr val="1C2B36"/>
                 </a:solidFill>
                 <a:latin typeface="Calibri"/>
               </a:rPr>
-              <a:t>∝ sin θ</a:t>
-            </a:r>
-            <a:r>
-              <a:rPr b="0" sz="1500">
+              <a:t>91 ms</a:t>
+            </a:r>
+            <a:r>
+              <a:rPr b="0" sz="1200">
                 <a:solidFill>
                   <a:srgbClr val="4A5A66"/>
                 </a:solidFill>
                 <a:latin typeface="Calibri"/>
               </a:rPr>
-              <a:t>, making the mechanics </a:t>
-            </a:r>
-            <a:r>
-              <a:rPr b="1" sz="1500">
-                <a:solidFill>
-                  <a:srgbClr val="1C2B36"/>
-                </a:solidFill>
-                <a:latin typeface="Calibri"/>
-              </a:rPr>
-              <a:t>nonlinear and state-dependent</a:t>
-            </a:r>
-            <a:r>
-              <a:rPr b="0" sz="1500">
-                <a:solidFill>
-                  <a:srgbClr val="4A5A66"/>
-                </a:solidFill>
-                <a:latin typeface="Calibri"/>
-              </a:rPr>
-              <a:t> — the property a learned filter can exploit.</a:t>
-            </a:r>
-          </a:p>
-        </p:txBody>
-      </p:sp>
-      <p:sp>
-        <p:nvSpPr>
-          <p:cNvPr id="7" name="Rounded Rectangle 6"/>
+              <a:t>. channels = 32, k = 4, 4 levels.</a:t>
+            </a:r>
+          </a:p>
+        </p:txBody>
+      </p:sp>
+      <p:sp>
+        <p:nvSpPr>
+          <p:cNvPr id="16" name="Rounded Rectangle 15"/>
           <p:cNvSpPr/>
           <p:nvPr/>
         </p:nvSpPr>
         <p:spPr>
           <a:xfrm>
-            <a:off x="868680" y="2788920"/>
+            <a:off x="868680" y="4892040"/>
             <a:ext cx="10607040" cy="896112"/>
           </a:xfrm>
           <a:prstGeom prst="roundRect">
@@ -6046,13 +5556,13 @@
       </p:sp>
       <p:sp>
         <p:nvSpPr>
-          <p:cNvPr id="8" name="Rectangle 7"/>
+          <p:cNvPr id="17" name="Rectangle 16"/>
           <p:cNvSpPr/>
           <p:nvPr/>
         </p:nvSpPr>
         <p:spPr>
           <a:xfrm>
-            <a:off x="868680" y="2788920"/>
+            <a:off x="868680" y="4892040"/>
             <a:ext cx="38100" cy="896112"/>
           </a:xfrm>
           <a:prstGeom prst="rect">
@@ -6090,13 +5600,13 @@
       </p:sp>
       <p:sp>
         <p:nvSpPr>
-          <p:cNvPr id="9" name="TextBox 8"/>
+          <p:cNvPr id="18" name="TextBox 17"/>
           <p:cNvSpPr txBox="1"/>
           <p:nvPr/>
         </p:nvSpPr>
         <p:spPr>
           <a:xfrm>
-            <a:off x="1069848" y="2898648"/>
+            <a:off x="1069848" y="5001768"/>
             <a:ext cx="10241280" cy="713232"/>
           </a:xfrm>
           <a:prstGeom prst="rect">
@@ -6128,7 +5638,7 @@
                 </a:solidFill>
                 <a:latin typeface="Consolas"/>
               </a:rPr>
-              <a:t>(J + I_rod)·dω/dt  =  Kt·i − B·ω − m·g·l_cm·sin(θ)     ← gravity = nonlinearity</a:t>
+              <a:t>all learned filters:   x = (B, 64, 2)  →  scalar omega_true</a:t>
             </a:r>
           </a:p>
           <a:p>
@@ -6150,244 +5660,7 @@
                 </a:solidFill>
                 <a:latin typeface="Consolas"/>
               </a:rPr>
-              <a:t>input   x = [ omega_noisy , voltage ]        target   y = omega_true</a:t>
-            </a:r>
-          </a:p>
-        </p:txBody>
-      </p:sp>
-      <p:sp>
-        <p:nvSpPr>
-          <p:cNvPr id="10" name="TextBox 9"/>
-          <p:cNvSpPr txBox="1"/>
-          <p:nvPr/>
-        </p:nvSpPr>
-        <p:spPr>
-          <a:xfrm>
-            <a:off x="868680" y="3977639"/>
-            <a:ext cx="10607040" cy="2377440"/>
-          </a:xfrm>
-          <a:prstGeom prst="rect">
-            <a:avLst/>
-          </a:prstGeom>
-          <a:noFill/>
-        </p:spPr>
-        <p:txBody>
-          <a:bodyPr wrap="square" anchor="t" lIns="0" rIns="0" tIns="0" bIns="0">
-            <a:spAutoFit/>
-          </a:bodyPr>
-          <a:lstStyle/>
-          <a:p>
-            <a:pPr>
-              <a:lnSpc>
-                <a:spcPct val="110000"/>
-              </a:lnSpc>
-              <a:spcBef>
-                <a:spcPts val="0"/>
-              </a:spcBef>
-              <a:spcAft>
-                <a:spcPts val="0"/>
-              </a:spcAft>
-            </a:pPr>
-            <a:r>
-              <a:rPr sz="1500" b="1">
-                <a:solidFill>
-                  <a:srgbClr val="2A9D8F"/>
-                </a:solidFill>
-                <a:latin typeface="Calibri"/>
-              </a:rPr>
-              <a:t>—  </a:t>
-            </a:r>
-            <a:r>
-              <a:rPr b="1" sz="1500">
-                <a:solidFill>
-                  <a:srgbClr val="1C2B36"/>
-                </a:solidFill>
-                <a:latin typeface="Calibri"/>
-              </a:rPr>
-              <a:t>210 trajectories</a:t>
-            </a:r>
-            <a:r>
-              <a:rPr b="0" sz="1500">
-                <a:solidFill>
-                  <a:srgbClr val="4A5A66"/>
-                </a:solidFill>
-                <a:latin typeface="Calibri"/>
-              </a:rPr>
-              <a:t>, 6 s @ 1 ms, split </a:t>
-            </a:r>
-            <a:r>
-              <a:rPr b="1" sz="1500">
-                <a:solidFill>
-                  <a:srgbClr val="1C2B36"/>
-                </a:solidFill>
-                <a:latin typeface="Calibri"/>
-              </a:rPr>
-              <a:t>70/15/15 by trajectory</a:t>
-            </a:r>
-            <a:r>
-              <a:rPr b="0" sz="1500">
-                <a:solidFill>
-                  <a:srgbClr val="4A5A66"/>
-                </a:solidFill>
-                <a:latin typeface="Calibri"/>
-              </a:rPr>
-              <a:t> — no time-step leaks between train and test.</a:t>
-            </a:r>
-          </a:p>
-          <a:p>
-            <a:pPr>
-              <a:lnSpc>
-                <a:spcPct val="110000"/>
-              </a:lnSpc>
-              <a:spcBef>
-                <a:spcPts val="1100"/>
-              </a:spcBef>
-              <a:spcAft>
-                <a:spcPts val="0"/>
-              </a:spcAft>
-            </a:pPr>
-            <a:r>
-              <a:rPr sz="1500" b="1">
-                <a:solidFill>
-                  <a:srgbClr val="1D3557"/>
-                </a:solidFill>
-                <a:latin typeface="Calibri"/>
-              </a:rPr>
-              <a:t>—  </a:t>
-            </a:r>
-            <a:r>
-              <a:rPr b="0" sz="1500">
-                <a:solidFill>
-                  <a:srgbClr val="4A5A66"/>
-                </a:solidFill>
-                <a:latin typeface="Calibri"/>
-              </a:rPr>
-              <a:t>Excitation cycles </a:t>
-            </a:r>
-            <a:r>
-              <a:rPr b="1" sz="1500">
-                <a:solidFill>
-                  <a:srgbClr val="1C2B36"/>
-                </a:solidFill>
-                <a:latin typeface="Calibri"/>
-              </a:rPr>
-              <a:t>step / ramp / random / mixed</a:t>
-            </a:r>
-            <a:r>
-              <a:rPr b="0" sz="1500">
-                <a:solidFill>
-                  <a:srgbClr val="4A5A66"/>
-                </a:solidFill>
-                <a:latin typeface="Calibri"/>
-              </a:rPr>
-              <a:t> bipolar voltage; motor R, J, B jittered ±12% per run.</a:t>
-            </a:r>
-          </a:p>
-          <a:p>
-            <a:pPr>
-              <a:lnSpc>
-                <a:spcPct val="110000"/>
-              </a:lnSpc>
-              <a:spcBef>
-                <a:spcPts val="1100"/>
-              </a:spcBef>
-              <a:spcAft>
-                <a:spcPts val="0"/>
-              </a:spcAft>
-            </a:pPr>
-            <a:r>
-              <a:rPr sz="1500" b="1">
-                <a:solidFill>
-                  <a:srgbClr val="E07A5F"/>
-                </a:solidFill>
-                <a:latin typeface="Calibri"/>
-              </a:rPr>
-              <a:t>—  </a:t>
-            </a:r>
-            <a:r>
-              <a:rPr b="0" sz="1500">
-                <a:solidFill>
-                  <a:srgbClr val="4A5A66"/>
-                </a:solidFill>
-                <a:latin typeface="Calibri"/>
-              </a:rPr>
-              <a:t>Sensor noise std 2–4 rad/s on a </a:t>
-            </a:r>
-            <a:r>
-              <a:rPr b="0" sz="1500">
-                <a:solidFill>
-                  <a:srgbClr val="4A5A66"/>
-                </a:solidFill>
-                <a:latin typeface="Calibri"/>
-              </a:rPr>
-              <a:t>21 rad/s swing → </a:t>
-            </a:r>
-            <a:r>
-              <a:rPr b="1" sz="1500">
-                <a:solidFill>
-                  <a:srgbClr val="1C2B36"/>
-                </a:solidFill>
-                <a:latin typeface="Calibri"/>
-              </a:rPr>
-              <a:t>SNR ≈ 7× (14% noise)</a:t>
-            </a:r>
-            <a:r>
-              <a:rPr b="0" sz="1500">
-                <a:solidFill>
-                  <a:srgbClr val="4A5A66"/>
-                </a:solidFill>
-                <a:latin typeface="Calibri"/>
-              </a:rPr>
-              <a:t>.</a:t>
-            </a:r>
-          </a:p>
-          <a:p>
-            <a:pPr>
-              <a:lnSpc>
-                <a:spcPct val="110000"/>
-              </a:lnSpc>
-              <a:spcBef>
-                <a:spcPts val="1100"/>
-              </a:spcBef>
-              <a:spcAft>
-                <a:spcPts val="0"/>
-              </a:spcAft>
-            </a:pPr>
-            <a:r>
-              <a:rPr sz="1500" b="1">
-                <a:solidFill>
-                  <a:srgbClr val="C99A2E"/>
-                </a:solidFill>
-                <a:latin typeface="Calibri"/>
-              </a:rPr>
-              <a:t>—  </a:t>
-            </a:r>
-            <a:r>
-              <a:rPr b="0" sz="1500">
-                <a:solidFill>
-                  <a:srgbClr val="4A5A66"/>
-                </a:solidFill>
-                <a:latin typeface="Calibri"/>
-              </a:rPr>
-              <a:t>A </a:t>
-            </a:r>
-            <a:r>
-              <a:rPr b="1" sz="1500">
-                <a:solidFill>
-                  <a:srgbClr val="1C2B36"/>
-                </a:solidFill>
-                <a:latin typeface="Calibri"/>
-              </a:rPr>
-              <a:t>chirp</a:t>
-            </a:r>
-            <a:r>
-              <a:rPr b="0" sz="1500">
-                <a:solidFill>
-                  <a:srgbClr val="4A5A66"/>
-                </a:solidFill>
-                <a:latin typeface="Calibri"/>
-              </a:rPr>
-              <a:t> excitation is held out entirely for an out-of-distribution generalisation test.</a:t>
+              <a:t>loss = MSE        optimiser = Adam (lr 1e-3)        early stop on val</a:t>
             </a:r>
           </a:p>
         </p:txBody>
@@ -6400,1081 +5673,7 @@
 </p:sld>
 </file>
 
-<file path=ppt/slides/slide7.xml><?xml version="1.0" encoding="utf-8"?>
-<p:sld xmlns:a="http://schemas.openxmlformats.org/drawingml/2006/main" xmlns:p="http://schemas.openxmlformats.org/presentationml/2006/main" xmlns:r="http://schemas.openxmlformats.org/officeDocument/2006/relationships">
-  <p:cSld>
-    <p:bg>
-      <p:bgPr>
-        <a:solidFill>
-          <a:srgbClr val="FBFAF6"/>
-        </a:solidFill>
-        <a:effectLst/>
-      </p:bgPr>
-    </p:bg>
-    <p:spTree>
-      <p:nvGrpSpPr>
-        <p:cNvPr id="1" name=""/>
-        <p:cNvGrpSpPr/>
-        <p:nvPr/>
-      </p:nvGrpSpPr>
-      <p:grpSpPr/>
-      <p:sp>
-        <p:nvSpPr>
-          <p:cNvPr id="2" name="Rectangle 1"/>
-          <p:cNvSpPr/>
-          <p:nvPr/>
-        </p:nvSpPr>
-        <p:spPr>
-          <a:xfrm>
-            <a:off x="566928" y="502920"/>
-            <a:ext cx="17780" cy="5852160"/>
-          </a:xfrm>
-          <a:prstGeom prst="rect">
-            <a:avLst/>
-          </a:prstGeom>
-          <a:solidFill>
-            <a:srgbClr val="D9D2C4"/>
-          </a:solidFill>
-          <a:ln>
-            <a:noFill/>
-          </a:ln>
-          <a:effectLst/>
-        </p:spPr>
-        <p:style>
-          <a:lnRef idx="1">
-            <a:schemeClr val="accent1"/>
-          </a:lnRef>
-          <a:fillRef idx="3">
-            <a:schemeClr val="accent1"/>
-          </a:fillRef>
-          <a:effectRef idx="2">
-            <a:schemeClr val="accent1"/>
-          </a:effectRef>
-          <a:fontRef idx="minor">
-            <a:schemeClr val="lt1"/>
-          </a:fontRef>
-        </p:style>
-        <p:txBody>
-          <a:bodyPr rtlCol="0" anchor="ctr"/>
-          <a:lstStyle/>
-          <a:p>
-            <a:pPr algn="ctr"/>
-          </a:p>
-        </p:txBody>
-      </p:sp>
-      <p:sp>
-        <p:nvSpPr>
-          <p:cNvPr id="3" name="Rectangle 2"/>
-          <p:cNvSpPr/>
-          <p:nvPr/>
-        </p:nvSpPr>
-        <p:spPr>
-          <a:xfrm>
-            <a:off x="566928" y="502920"/>
-            <a:ext cx="30480" cy="566928"/>
-          </a:xfrm>
-          <a:prstGeom prst="rect">
-            <a:avLst/>
-          </a:prstGeom>
-          <a:solidFill>
-            <a:srgbClr val="2A9D8F"/>
-          </a:solidFill>
-          <a:ln>
-            <a:noFill/>
-          </a:ln>
-          <a:effectLst/>
-        </p:spPr>
-        <p:style>
-          <a:lnRef idx="1">
-            <a:schemeClr val="accent1"/>
-          </a:lnRef>
-          <a:fillRef idx="3">
-            <a:schemeClr val="accent1"/>
-          </a:fillRef>
-          <a:effectRef idx="2">
-            <a:schemeClr val="accent1"/>
-          </a:effectRef>
-          <a:fontRef idx="minor">
-            <a:schemeClr val="lt1"/>
-          </a:fontRef>
-        </p:style>
-        <p:txBody>
-          <a:bodyPr rtlCol="0" anchor="ctr"/>
-          <a:lstStyle/>
-          <a:p>
-            <a:pPr algn="ctr"/>
-          </a:p>
-        </p:txBody>
-      </p:sp>
-      <p:sp>
-        <p:nvSpPr>
-          <p:cNvPr id="4" name="TextBox 3"/>
-          <p:cNvSpPr txBox="1"/>
-          <p:nvPr/>
-        </p:nvSpPr>
-        <p:spPr>
-          <a:xfrm>
-            <a:off x="868680" y="548640"/>
-            <a:ext cx="10607040" cy="320040"/>
-          </a:xfrm>
-          <a:prstGeom prst="rect">
-            <a:avLst/>
-          </a:prstGeom>
-          <a:noFill/>
-        </p:spPr>
-        <p:txBody>
-          <a:bodyPr wrap="square" anchor="t" lIns="0" rIns="0" tIns="0" bIns="0">
-            <a:spAutoFit/>
-          </a:bodyPr>
-          <a:lstStyle/>
-          <a:p>
-            <a:pPr>
-              <a:lnSpc>
-                <a:spcPct val="100000"/>
-              </a:lnSpc>
-            </a:pPr>
-            <a:r>
-              <a:rPr sz="1100" b="1">
-                <a:solidFill>
-                  <a:srgbClr val="E07A5F"/>
-                </a:solidFill>
-                <a:latin typeface="Consolas"/>
-              </a:rPr>
-              <a:t>04  </a:t>
-            </a:r>
-            <a:r>
-              <a:rPr sz="1100">
-                <a:solidFill>
-                  <a:srgbClr val="2A9D8F"/>
-                </a:solidFill>
-                <a:latin typeface="Consolas"/>
-              </a:rPr>
-              <a:t>ML2 — METHODS</a:t>
-            </a:r>
-          </a:p>
-        </p:txBody>
-      </p:sp>
-      <p:sp>
-        <p:nvSpPr>
-          <p:cNvPr id="5" name="TextBox 4"/>
-          <p:cNvSpPr txBox="1"/>
-          <p:nvPr/>
-        </p:nvSpPr>
-        <p:spPr>
-          <a:xfrm>
-            <a:off x="868680" y="960120"/>
-            <a:ext cx="10607040" cy="1280160"/>
-          </a:xfrm>
-          <a:prstGeom prst="rect">
-            <a:avLst/>
-          </a:prstGeom>
-          <a:noFill/>
-        </p:spPr>
-        <p:txBody>
-          <a:bodyPr wrap="square" anchor="t" lIns="0" rIns="0" tIns="0" bIns="0">
-            <a:spAutoFit/>
-          </a:bodyPr>
-          <a:lstStyle/>
-          <a:p>
-            <a:pPr algn="l">
-              <a:lnSpc>
-                <a:spcPct val="102000"/>
-              </a:lnSpc>
-              <a:spcBef>
-                <a:spcPts val="0"/>
-              </a:spcBef>
-              <a:spcAft>
-                <a:spcPts val="600"/>
-              </a:spcAft>
-            </a:pPr>
-            <a:r>
-              <a:rPr b="1" sz="2800">
-                <a:solidFill>
-                  <a:srgbClr val="1D3557"/>
-                </a:solidFill>
-                <a:latin typeface="Georgia"/>
-              </a:rPr>
-              <a:t>Classical baselines vs learned filters.</a:t>
-            </a:r>
-          </a:p>
-        </p:txBody>
-      </p:sp>
-      <p:sp>
-        <p:nvSpPr>
-          <p:cNvPr id="6" name="TextBox 5"/>
-          <p:cNvSpPr txBox="1"/>
-          <p:nvPr/>
-        </p:nvSpPr>
-        <p:spPr>
-          <a:xfrm>
-            <a:off x="868680" y="1828800"/>
-            <a:ext cx="10607040" cy="603504"/>
-          </a:xfrm>
-          <a:prstGeom prst="rect">
-            <a:avLst/>
-          </a:prstGeom>
-          <a:noFill/>
-        </p:spPr>
-        <p:txBody>
-          <a:bodyPr wrap="square" anchor="t" lIns="0" rIns="0" tIns="0" bIns="0">
-            <a:spAutoFit/>
-          </a:bodyPr>
-          <a:lstStyle/>
-          <a:p>
-            <a:pPr>
-              <a:lnSpc>
-                <a:spcPct val="120000"/>
-              </a:lnSpc>
-            </a:pPr>
-            <a:r>
-              <a:rPr b="0" sz="1500">
-                <a:solidFill>
-                  <a:srgbClr val="4A5A66"/>
-                </a:solidFill>
-                <a:latin typeface="Calibri"/>
-              </a:rPr>
-              <a:t>Baselines tuned on validation, evaluated on test: </a:t>
-            </a:r>
-            <a:r>
-              <a:rPr b="1" sz="1500">
-                <a:solidFill>
-                  <a:srgbClr val="1C2B36"/>
-                </a:solidFill>
-                <a:latin typeface="Calibri"/>
-              </a:rPr>
-              <a:t>EMA</a:t>
-            </a:r>
-            <a:r>
-              <a:rPr b="0" sz="1500">
-                <a:solidFill>
-                  <a:srgbClr val="4A5A66"/>
-                </a:solidFill>
-                <a:latin typeface="Calibri"/>
-              </a:rPr>
-              <a:t> (α tuned) and a steady-state </a:t>
-            </a:r>
-            <a:r>
-              <a:rPr b="1" sz="1500">
-                <a:solidFill>
-                  <a:srgbClr val="1C2B36"/>
-                </a:solidFill>
-                <a:latin typeface="Calibri"/>
-              </a:rPr>
-              <a:t>Kalman</a:t>
-            </a:r>
-            <a:r>
-              <a:rPr b="0" sz="1500">
-                <a:solidFill>
-                  <a:srgbClr val="4A5A66"/>
-                </a:solidFill>
-                <a:latin typeface="Calibri"/>
-              </a:rPr>
-              <a:t> filter on the nominal linear </a:t>
-            </a:r>
-            <a:r>
-              <a:rPr b="0" sz="1380">
-                <a:solidFill>
-                  <a:srgbClr val="1D3557"/>
-                </a:solidFill>
-                <a:latin typeface="Consolas"/>
-              </a:rPr>
-              <a:t>[i, ω]</a:t>
-            </a:r>
-            <a:r>
-              <a:rPr b="0" sz="1500">
-                <a:solidFill>
-                  <a:srgbClr val="4A5A66"/>
-                </a:solidFill>
-                <a:latin typeface="Calibri"/>
-              </a:rPr>
-              <a:t> model — whose model </a:t>
-            </a:r>
-            <a:r>
-              <a:rPr b="1" sz="1500">
-                <a:solidFill>
-                  <a:srgbClr val="1C2B36"/>
-                </a:solidFill>
-                <a:latin typeface="Calibri"/>
-              </a:rPr>
-              <a:t>omits the gravity term</a:t>
-            </a:r>
-            <a:r>
-              <a:rPr b="0" sz="1500">
-                <a:solidFill>
-                  <a:srgbClr val="4A5A66"/>
-                </a:solidFill>
-                <a:latin typeface="Calibri"/>
-              </a:rPr>
-              <a:t>. Three learned filters share the same causal </a:t>
-            </a:r>
-            <a:r>
-              <a:rPr b="1" sz="1500">
-                <a:solidFill>
-                  <a:srgbClr val="1C2B36"/>
-                </a:solidFill>
-                <a:latin typeface="Calibri"/>
-              </a:rPr>
-              <a:t>64 ms</a:t>
-            </a:r>
-            <a:r>
-              <a:rPr b="0" sz="1500">
-                <a:solidFill>
-                  <a:srgbClr val="4A5A66"/>
-                </a:solidFill>
-                <a:latin typeface="Calibri"/>
-              </a:rPr>
-              <a:t> window over [omega_noisy, voltage].</a:t>
-            </a:r>
-          </a:p>
-        </p:txBody>
-      </p:sp>
-      <p:sp>
-        <p:nvSpPr>
-          <p:cNvPr id="7" name="Rounded Rectangle 6"/>
-          <p:cNvSpPr/>
-          <p:nvPr/>
-        </p:nvSpPr>
-        <p:spPr>
-          <a:xfrm>
-            <a:off x="868680" y="2697480"/>
-            <a:ext cx="3383280" cy="1874519"/>
-          </a:xfrm>
-          <a:prstGeom prst="roundRect">
-            <a:avLst>
-              <a:gd name="adj" fmla="val 6000"/>
-            </a:avLst>
-          </a:prstGeom>
-          <a:solidFill>
-            <a:srgbClr val="FFFFFF"/>
-          </a:solidFill>
-          <a:ln w="12700">
-            <a:solidFill>
-              <a:srgbClr val="D9D2C4"/>
-            </a:solidFill>
-          </a:ln>
-          <a:effectLst/>
-        </p:spPr>
-        <p:style>
-          <a:lnRef idx="1">
-            <a:schemeClr val="accent1"/>
-          </a:lnRef>
-          <a:fillRef idx="3">
-            <a:schemeClr val="accent1"/>
-          </a:fillRef>
-          <a:effectRef idx="2">
-            <a:schemeClr val="accent1"/>
-          </a:effectRef>
-          <a:fontRef idx="minor">
-            <a:schemeClr val="lt1"/>
-          </a:fontRef>
-        </p:style>
-        <p:txBody>
-          <a:bodyPr rtlCol="0" anchor="ctr"/>
-          <a:lstStyle/>
-          <a:p>
-            <a:pPr algn="ctr"/>
-          </a:p>
-        </p:txBody>
-      </p:sp>
-      <p:sp>
-        <p:nvSpPr>
-          <p:cNvPr id="8" name="Rectangle 7"/>
-          <p:cNvSpPr/>
-          <p:nvPr/>
-        </p:nvSpPr>
-        <p:spPr>
-          <a:xfrm>
-            <a:off x="868680" y="2697480"/>
-            <a:ext cx="38100" cy="1874519"/>
-          </a:xfrm>
-          <a:prstGeom prst="rect">
-            <a:avLst/>
-          </a:prstGeom>
-          <a:solidFill>
-            <a:srgbClr val="2A9D8F"/>
-          </a:solidFill>
-          <a:ln>
-            <a:noFill/>
-          </a:ln>
-          <a:effectLst/>
-        </p:spPr>
-        <p:style>
-          <a:lnRef idx="1">
-            <a:schemeClr val="accent1"/>
-          </a:lnRef>
-          <a:fillRef idx="3">
-            <a:schemeClr val="accent1"/>
-          </a:fillRef>
-          <a:effectRef idx="2">
-            <a:schemeClr val="accent1"/>
-          </a:effectRef>
-          <a:fontRef idx="minor">
-            <a:schemeClr val="lt1"/>
-          </a:fontRef>
-        </p:style>
-        <p:txBody>
-          <a:bodyPr rtlCol="0" anchor="ctr"/>
-          <a:lstStyle/>
-          <a:p>
-            <a:pPr algn="ctr"/>
-          </a:p>
-        </p:txBody>
-      </p:sp>
-      <p:sp>
-        <p:nvSpPr>
-          <p:cNvPr id="9" name="TextBox 8"/>
-          <p:cNvSpPr txBox="1"/>
-          <p:nvPr/>
-        </p:nvSpPr>
-        <p:spPr>
-          <a:xfrm>
-            <a:off x="1069848" y="2862072"/>
-            <a:ext cx="3017520" cy="1600199"/>
-          </a:xfrm>
-          <a:prstGeom prst="rect">
-            <a:avLst/>
-          </a:prstGeom>
-          <a:noFill/>
-        </p:spPr>
-        <p:txBody>
-          <a:bodyPr wrap="square" anchor="t" lIns="0" rIns="0" tIns="0" bIns="0">
-            <a:spAutoFit/>
-          </a:bodyPr>
-          <a:lstStyle/>
-          <a:p>
-            <a:pPr algn="l">
-              <a:lnSpc>
-                <a:spcPct val="112000"/>
-              </a:lnSpc>
-              <a:spcBef>
-                <a:spcPts val="0"/>
-              </a:spcBef>
-              <a:spcAft>
-                <a:spcPts val="400"/>
-              </a:spcAft>
-            </a:pPr>
-            <a:r>
-              <a:rPr b="0" sz="1000">
-                <a:solidFill>
-                  <a:srgbClr val="2A9D8F"/>
-                </a:solidFill>
-                <a:latin typeface="Consolas"/>
-              </a:rPr>
-              <a:t>GRU</a:t>
-            </a:r>
-          </a:p>
-          <a:p>
-            <a:pPr algn="l">
-              <a:lnSpc>
-                <a:spcPct val="100000"/>
-              </a:lnSpc>
-              <a:spcBef>
-                <a:spcPts val="0"/>
-              </a:spcBef>
-              <a:spcAft>
-                <a:spcPts val="600"/>
-              </a:spcAft>
-            </a:pPr>
-            <a:r>
-              <a:rPr b="1" sz="1600">
-                <a:solidFill>
-                  <a:srgbClr val="1D3557"/>
-                </a:solidFill>
-                <a:latin typeface="Georgia"/>
-              </a:rPr>
-              <a:t>GRU  (3 489 params)</a:t>
-            </a:r>
-          </a:p>
-          <a:p>
-            <a:pPr algn="l">
-              <a:lnSpc>
-                <a:spcPct val="110000"/>
-              </a:lnSpc>
-              <a:spcBef>
-                <a:spcPts val="0"/>
-              </a:spcBef>
-              <a:spcAft>
-                <a:spcPts val="600"/>
-              </a:spcAft>
-            </a:pPr>
-            <a:r>
-              <a:rPr b="0" sz="1200">
-                <a:solidFill>
-                  <a:srgbClr val="4A5A66"/>
-                </a:solidFill>
-                <a:latin typeface="Calibri"/>
-              </a:rPr>
-              <a:t>Recurrent hidden state accumulates </a:t>
-            </a:r>
-            <a:r>
-              <a:rPr b="1" sz="1200">
-                <a:solidFill>
-                  <a:srgbClr val="1C2B36"/>
-                </a:solidFill>
-                <a:latin typeface="Calibri"/>
-              </a:rPr>
-              <a:t>64 ms</a:t>
-            </a:r>
-            <a:r>
-              <a:rPr b="0" sz="1200">
-                <a:solidFill>
-                  <a:srgbClr val="4A5A66"/>
-                </a:solidFill>
-                <a:latin typeface="Calibri"/>
-              </a:rPr>
-              <a:t> of context. hidden = 32, 1 layer.</a:t>
-            </a:r>
-          </a:p>
-        </p:txBody>
-      </p:sp>
-      <p:sp>
-        <p:nvSpPr>
-          <p:cNvPr id="10" name="Rounded Rectangle 9"/>
-          <p:cNvSpPr/>
-          <p:nvPr/>
-        </p:nvSpPr>
-        <p:spPr>
-          <a:xfrm>
-            <a:off x="4480560" y="2697480"/>
-            <a:ext cx="3383280" cy="1874519"/>
-          </a:xfrm>
-          <a:prstGeom prst="roundRect">
-            <a:avLst>
-              <a:gd name="adj" fmla="val 6000"/>
-            </a:avLst>
-          </a:prstGeom>
-          <a:solidFill>
-            <a:srgbClr val="FFFFFF"/>
-          </a:solidFill>
-          <a:ln w="12700">
-            <a:solidFill>
-              <a:srgbClr val="D9D2C4"/>
-            </a:solidFill>
-          </a:ln>
-          <a:effectLst/>
-        </p:spPr>
-        <p:style>
-          <a:lnRef idx="1">
-            <a:schemeClr val="accent1"/>
-          </a:lnRef>
-          <a:fillRef idx="3">
-            <a:schemeClr val="accent1"/>
-          </a:fillRef>
-          <a:effectRef idx="2">
-            <a:schemeClr val="accent1"/>
-          </a:effectRef>
-          <a:fontRef idx="minor">
-            <a:schemeClr val="lt1"/>
-          </a:fontRef>
-        </p:style>
-        <p:txBody>
-          <a:bodyPr rtlCol="0" anchor="ctr"/>
-          <a:lstStyle/>
-          <a:p>
-            <a:pPr algn="ctr"/>
-          </a:p>
-        </p:txBody>
-      </p:sp>
-      <p:sp>
-        <p:nvSpPr>
-          <p:cNvPr id="11" name="Rectangle 10"/>
-          <p:cNvSpPr/>
-          <p:nvPr/>
-        </p:nvSpPr>
-        <p:spPr>
-          <a:xfrm>
-            <a:off x="4480560" y="2697480"/>
-            <a:ext cx="38100" cy="1874519"/>
-          </a:xfrm>
-          <a:prstGeom prst="rect">
-            <a:avLst/>
-          </a:prstGeom>
-          <a:solidFill>
-            <a:srgbClr val="1D3557"/>
-          </a:solidFill>
-          <a:ln>
-            <a:noFill/>
-          </a:ln>
-          <a:effectLst/>
-        </p:spPr>
-        <p:style>
-          <a:lnRef idx="1">
-            <a:schemeClr val="accent1"/>
-          </a:lnRef>
-          <a:fillRef idx="3">
-            <a:schemeClr val="accent1"/>
-          </a:fillRef>
-          <a:effectRef idx="2">
-            <a:schemeClr val="accent1"/>
-          </a:effectRef>
-          <a:fontRef idx="minor">
-            <a:schemeClr val="lt1"/>
-          </a:fontRef>
-        </p:style>
-        <p:txBody>
-          <a:bodyPr rtlCol="0" anchor="ctr"/>
-          <a:lstStyle/>
-          <a:p>
-            <a:pPr algn="ctr"/>
-          </a:p>
-        </p:txBody>
-      </p:sp>
-      <p:sp>
-        <p:nvSpPr>
-          <p:cNvPr id="12" name="TextBox 11"/>
-          <p:cNvSpPr txBox="1"/>
-          <p:nvPr/>
-        </p:nvSpPr>
-        <p:spPr>
-          <a:xfrm>
-            <a:off x="4681728" y="2862072"/>
-            <a:ext cx="3017520" cy="1600199"/>
-          </a:xfrm>
-          <a:prstGeom prst="rect">
-            <a:avLst/>
-          </a:prstGeom>
-          <a:noFill/>
-        </p:spPr>
-        <p:txBody>
-          <a:bodyPr wrap="square" anchor="t" lIns="0" rIns="0" tIns="0" bIns="0">
-            <a:spAutoFit/>
-          </a:bodyPr>
-          <a:lstStyle/>
-          <a:p>
-            <a:pPr algn="l">
-              <a:lnSpc>
-                <a:spcPct val="112000"/>
-              </a:lnSpc>
-              <a:spcBef>
-                <a:spcPts val="0"/>
-              </a:spcBef>
-              <a:spcAft>
-                <a:spcPts val="400"/>
-              </a:spcAft>
-            </a:pPr>
-            <a:r>
-              <a:rPr b="0" sz="1000">
-                <a:solidFill>
-                  <a:srgbClr val="1D3557"/>
-                </a:solidFill>
-                <a:latin typeface="Consolas"/>
-              </a:rPr>
-              <a:t>CNN</a:t>
-            </a:r>
-          </a:p>
-          <a:p>
-            <a:pPr algn="l">
-              <a:lnSpc>
-                <a:spcPct val="100000"/>
-              </a:lnSpc>
-              <a:spcBef>
-                <a:spcPts val="0"/>
-              </a:spcBef>
-              <a:spcAft>
-                <a:spcPts val="600"/>
-              </a:spcAft>
-            </a:pPr>
-            <a:r>
-              <a:rPr b="1" sz="1600">
-                <a:solidFill>
-                  <a:srgbClr val="1D3557"/>
-                </a:solidFill>
-                <a:latin typeface="Georgia"/>
-              </a:rPr>
-              <a:t>CNN  (8 801 params)</a:t>
-            </a:r>
-          </a:p>
-          <a:p>
-            <a:pPr algn="l">
-              <a:lnSpc>
-                <a:spcPct val="110000"/>
-              </a:lnSpc>
-              <a:spcBef>
-                <a:spcPts val="0"/>
-              </a:spcBef>
-              <a:spcAft>
-                <a:spcPts val="600"/>
-              </a:spcAft>
-            </a:pPr>
-            <a:r>
-              <a:rPr b="0" sz="1200">
-                <a:solidFill>
-                  <a:srgbClr val="4A5A66"/>
-                </a:solidFill>
-                <a:latin typeface="Calibri"/>
-              </a:rPr>
-              <a:t>Stacked causal 1-D convolutions. channels = 32, k = 8, depth = 2.</a:t>
-            </a:r>
-          </a:p>
-        </p:txBody>
-      </p:sp>
-      <p:sp>
-        <p:nvSpPr>
-          <p:cNvPr id="13" name="Rounded Rectangle 12"/>
-          <p:cNvSpPr/>
-          <p:nvPr/>
-        </p:nvSpPr>
-        <p:spPr>
-          <a:xfrm>
-            <a:off x="8092440" y="2697480"/>
-            <a:ext cx="3383280" cy="1874519"/>
-          </a:xfrm>
-          <a:prstGeom prst="roundRect">
-            <a:avLst>
-              <a:gd name="adj" fmla="val 6000"/>
-            </a:avLst>
-          </a:prstGeom>
-          <a:solidFill>
-            <a:srgbClr val="FFFFFF"/>
-          </a:solidFill>
-          <a:ln w="12700">
-            <a:solidFill>
-              <a:srgbClr val="D9D2C4"/>
-            </a:solidFill>
-          </a:ln>
-          <a:effectLst/>
-        </p:spPr>
-        <p:style>
-          <a:lnRef idx="1">
-            <a:schemeClr val="accent1"/>
-          </a:lnRef>
-          <a:fillRef idx="3">
-            <a:schemeClr val="accent1"/>
-          </a:fillRef>
-          <a:effectRef idx="2">
-            <a:schemeClr val="accent1"/>
-          </a:effectRef>
-          <a:fontRef idx="minor">
-            <a:schemeClr val="lt1"/>
-          </a:fontRef>
-        </p:style>
-        <p:txBody>
-          <a:bodyPr rtlCol="0" anchor="ctr"/>
-          <a:lstStyle/>
-          <a:p>
-            <a:pPr algn="ctr"/>
-          </a:p>
-        </p:txBody>
-      </p:sp>
-      <p:sp>
-        <p:nvSpPr>
-          <p:cNvPr id="14" name="Rectangle 13"/>
-          <p:cNvSpPr/>
-          <p:nvPr/>
-        </p:nvSpPr>
-        <p:spPr>
-          <a:xfrm>
-            <a:off x="8092440" y="2697480"/>
-            <a:ext cx="38100" cy="1874519"/>
-          </a:xfrm>
-          <a:prstGeom prst="rect">
-            <a:avLst/>
-          </a:prstGeom>
-          <a:solidFill>
-            <a:srgbClr val="E07A5F"/>
-          </a:solidFill>
-          <a:ln>
-            <a:noFill/>
-          </a:ln>
-          <a:effectLst/>
-        </p:spPr>
-        <p:style>
-          <a:lnRef idx="1">
-            <a:schemeClr val="accent1"/>
-          </a:lnRef>
-          <a:fillRef idx="3">
-            <a:schemeClr val="accent1"/>
-          </a:fillRef>
-          <a:effectRef idx="2">
-            <a:schemeClr val="accent1"/>
-          </a:effectRef>
-          <a:fontRef idx="minor">
-            <a:schemeClr val="lt1"/>
-          </a:fontRef>
-        </p:style>
-        <p:txBody>
-          <a:bodyPr rtlCol="0" anchor="ctr"/>
-          <a:lstStyle/>
-          <a:p>
-            <a:pPr algn="ctr"/>
-          </a:p>
-        </p:txBody>
-      </p:sp>
-      <p:sp>
-        <p:nvSpPr>
-          <p:cNvPr id="15" name="TextBox 14"/>
-          <p:cNvSpPr txBox="1"/>
-          <p:nvPr/>
-        </p:nvSpPr>
-        <p:spPr>
-          <a:xfrm>
-            <a:off x="8293608" y="2862072"/>
-            <a:ext cx="3017520" cy="1600199"/>
-          </a:xfrm>
-          <a:prstGeom prst="rect">
-            <a:avLst/>
-          </a:prstGeom>
-          <a:noFill/>
-        </p:spPr>
-        <p:txBody>
-          <a:bodyPr wrap="square" anchor="t" lIns="0" rIns="0" tIns="0" bIns="0">
-            <a:spAutoFit/>
-          </a:bodyPr>
-          <a:lstStyle/>
-          <a:p>
-            <a:pPr algn="l">
-              <a:lnSpc>
-                <a:spcPct val="112000"/>
-              </a:lnSpc>
-              <a:spcBef>
-                <a:spcPts val="0"/>
-              </a:spcBef>
-              <a:spcAft>
-                <a:spcPts val="400"/>
-              </a:spcAft>
-            </a:pPr>
-            <a:r>
-              <a:rPr b="0" sz="1000">
-                <a:solidFill>
-                  <a:srgbClr val="E07A5F"/>
-                </a:solidFill>
-                <a:latin typeface="Consolas"/>
-              </a:rPr>
-              <a:t>TCN</a:t>
-            </a:r>
-          </a:p>
-          <a:p>
-            <a:pPr algn="l">
-              <a:lnSpc>
-                <a:spcPct val="100000"/>
-              </a:lnSpc>
-              <a:spcBef>
-                <a:spcPts val="0"/>
-              </a:spcBef>
-              <a:spcAft>
-                <a:spcPts val="600"/>
-              </a:spcAft>
-            </a:pPr>
-            <a:r>
-              <a:rPr b="1" sz="1600">
-                <a:solidFill>
-                  <a:srgbClr val="1D3557"/>
-                </a:solidFill>
-                <a:latin typeface="Georgia"/>
-              </a:rPr>
-              <a:t>TCN  (33 153 params)</a:t>
-            </a:r>
-          </a:p>
-          <a:p>
-            <a:pPr algn="l">
-              <a:lnSpc>
-                <a:spcPct val="110000"/>
-              </a:lnSpc>
-              <a:spcBef>
-                <a:spcPts val="0"/>
-              </a:spcBef>
-              <a:spcAft>
-                <a:spcPts val="600"/>
-              </a:spcAft>
-            </a:pPr>
-            <a:r>
-              <a:rPr b="0" sz="1200">
-                <a:solidFill>
-                  <a:srgbClr val="4A5A66"/>
-                </a:solidFill>
-                <a:latin typeface="Calibri"/>
-              </a:rPr>
-              <a:t>Dilated causal convolutions. Receptive field = </a:t>
-            </a:r>
-            <a:r>
-              <a:rPr b="1" sz="1200">
-                <a:solidFill>
-                  <a:srgbClr val="1C2B36"/>
-                </a:solidFill>
-                <a:latin typeface="Calibri"/>
-              </a:rPr>
-              <a:t>91 ms</a:t>
-            </a:r>
-            <a:r>
-              <a:rPr b="0" sz="1200">
-                <a:solidFill>
-                  <a:srgbClr val="4A5A66"/>
-                </a:solidFill>
-                <a:latin typeface="Calibri"/>
-              </a:rPr>
-              <a:t>. channels = 32, k = 4, 4 levels.</a:t>
-            </a:r>
-          </a:p>
-        </p:txBody>
-      </p:sp>
-      <p:sp>
-        <p:nvSpPr>
-          <p:cNvPr id="16" name="Rounded Rectangle 15"/>
-          <p:cNvSpPr/>
-          <p:nvPr/>
-        </p:nvSpPr>
-        <p:spPr>
-          <a:xfrm>
-            <a:off x="868680" y="4892040"/>
-            <a:ext cx="10607040" cy="896112"/>
-          </a:xfrm>
-          <a:prstGeom prst="roundRect">
-            <a:avLst>
-              <a:gd name="adj" fmla="val 6000"/>
-            </a:avLst>
-          </a:prstGeom>
-          <a:solidFill>
-            <a:srgbClr val="F4F1E9"/>
-          </a:solidFill>
-          <a:ln w="12700">
-            <a:solidFill>
-              <a:srgbClr val="D9D2C4"/>
-            </a:solidFill>
-          </a:ln>
-          <a:effectLst/>
-        </p:spPr>
-        <p:style>
-          <a:lnRef idx="1">
-            <a:schemeClr val="accent1"/>
-          </a:lnRef>
-          <a:fillRef idx="3">
-            <a:schemeClr val="accent1"/>
-          </a:fillRef>
-          <a:effectRef idx="2">
-            <a:schemeClr val="accent1"/>
-          </a:effectRef>
-          <a:fontRef idx="minor">
-            <a:schemeClr val="lt1"/>
-          </a:fontRef>
-        </p:style>
-        <p:txBody>
-          <a:bodyPr rtlCol="0" anchor="ctr"/>
-          <a:lstStyle/>
-          <a:p>
-            <a:pPr algn="ctr"/>
-          </a:p>
-        </p:txBody>
-      </p:sp>
-      <p:sp>
-        <p:nvSpPr>
-          <p:cNvPr id="17" name="Rectangle 16"/>
-          <p:cNvSpPr/>
-          <p:nvPr/>
-        </p:nvSpPr>
-        <p:spPr>
-          <a:xfrm>
-            <a:off x="868680" y="4892040"/>
-            <a:ext cx="38100" cy="896112"/>
-          </a:xfrm>
-          <a:prstGeom prst="rect">
-            <a:avLst/>
-          </a:prstGeom>
-          <a:solidFill>
-            <a:srgbClr val="1D3557"/>
-          </a:solidFill>
-          <a:ln>
-            <a:noFill/>
-          </a:ln>
-          <a:effectLst/>
-        </p:spPr>
-        <p:style>
-          <a:lnRef idx="1">
-            <a:schemeClr val="accent1"/>
-          </a:lnRef>
-          <a:fillRef idx="3">
-            <a:schemeClr val="accent1"/>
-          </a:fillRef>
-          <a:effectRef idx="2">
-            <a:schemeClr val="accent1"/>
-          </a:effectRef>
-          <a:fontRef idx="minor">
-            <a:schemeClr val="lt1"/>
-          </a:fontRef>
-        </p:style>
-        <p:txBody>
-          <a:bodyPr rtlCol="0" anchor="ctr"/>
-          <a:lstStyle/>
-          <a:p>
-            <a:pPr algn="ctr"/>
-          </a:p>
-        </p:txBody>
-      </p:sp>
-      <p:sp>
-        <p:nvSpPr>
-          <p:cNvPr id="18" name="TextBox 17"/>
-          <p:cNvSpPr txBox="1"/>
-          <p:nvPr/>
-        </p:nvSpPr>
-        <p:spPr>
-          <a:xfrm>
-            <a:off x="1069848" y="5001768"/>
-            <a:ext cx="10241280" cy="713232"/>
-          </a:xfrm>
-          <a:prstGeom prst="rect">
-            <a:avLst/>
-          </a:prstGeom>
-          <a:noFill/>
-        </p:spPr>
-        <p:txBody>
-          <a:bodyPr wrap="square" anchor="ctr" lIns="0" rIns="0" tIns="0" bIns="0">
-            <a:spAutoFit/>
-          </a:bodyPr>
-          <a:lstStyle/>
-          <a:p>
-            <a:pPr>
-              <a:lnSpc>
-                <a:spcPct val="115000"/>
-              </a:lnSpc>
-              <a:spcBef>
-                <a:spcPts val="0"/>
-              </a:spcBef>
-              <a:spcAft>
-                <a:spcPts val="0"/>
-              </a:spcAft>
-            </a:pPr>
-            <a:r>
-              <a:rPr b="0" sz="1350">
-                <a:solidFill>
-                  <a:srgbClr val="1D3557"/>
-                </a:solidFill>
-                <a:latin typeface="Consolas"/>
-              </a:rPr>
-              <a:t>all learned filters:   x = (B, 64, 2)  →  scalar omega_true</a:t>
-            </a:r>
-          </a:p>
-          <a:p>
-            <a:pPr>
-              <a:lnSpc>
-                <a:spcPct val="115000"/>
-              </a:lnSpc>
-              <a:spcBef>
-                <a:spcPts val="400"/>
-              </a:spcBef>
-              <a:spcAft>
-                <a:spcPts val="0"/>
-              </a:spcAft>
-            </a:pPr>
-            <a:r>
-              <a:rPr b="0" sz="1350">
-                <a:solidFill>
-                  <a:srgbClr val="1D3557"/>
-                </a:solidFill>
-                <a:latin typeface="Consolas"/>
-              </a:rPr>
-              <a:t>loss = MSE        optimiser = Adam (lr 1e-3)        early stop on val</a:t>
-            </a:r>
-          </a:p>
-        </p:txBody>
-      </p:sp>
-    </p:spTree>
-  </p:cSld>
-  <p:clrMapOvr>
-    <a:masterClrMapping/>
-  </p:clrMapOvr>
-</p:sld>
-</file>
-
-<file path=ppt/slides/slide8.xml><?xml version="1.0" encoding="utf-8"?>
+<file path=ppt/slides/slide4.xml><?xml version="1.0" encoding="utf-8"?>
 <p:sld xmlns:a="http://schemas.openxmlformats.org/drawingml/2006/main" xmlns:p="http://schemas.openxmlformats.org/presentationml/2006/main" xmlns:r="http://schemas.openxmlformats.org/officeDocument/2006/relationships">
   <p:cSld>
     <p:bg>
@@ -8213,7 +6412,7 @@
 </p:sld>
 </file>
 
-<file path=ppt/slides/slide9.xml><?xml version="1.0" encoding="utf-8"?>
+<file path=ppt/slides/slide5.xml><?xml version="1.0" encoding="utf-8"?>
 <p:sld xmlns:a="http://schemas.openxmlformats.org/drawingml/2006/main" xmlns:p="http://schemas.openxmlformats.org/presentationml/2006/main" xmlns:r="http://schemas.openxmlformats.org/officeDocument/2006/relationships">
   <p:cSld>
     <p:bg>
@@ -8420,8 +6619,8 @@
         </p:nvSpPr>
         <p:spPr>
           <a:xfrm>
-            <a:off x="868680" y="1965960"/>
-            <a:ext cx="4114800" cy="2377440"/>
+            <a:off x="868680" y="2011680"/>
+            <a:ext cx="3611880" cy="2743200"/>
           </a:xfrm>
           <a:prstGeom prst="rect">
             <a:avLst/>
@@ -8581,8 +6780,8 @@
         </p:nvSpPr>
         <p:spPr>
           <a:xfrm>
-            <a:off x="5212080" y="1554480"/>
-            <a:ext cx="6126480" cy="3990848"/>
+            <a:off x="4709160" y="1783080"/>
+            <a:ext cx="6611112" cy="4260088"/>
           </a:xfrm>
           <a:prstGeom prst="roundRect">
             <a:avLst>
@@ -8637,8 +6836,8 @@
         </p:blipFill>
         <p:spPr>
           <a:xfrm>
-            <a:off x="5358384" y="1700784"/>
-            <a:ext cx="5833872" cy="3241040"/>
+            <a:off x="4855464" y="1929384"/>
+            <a:ext cx="6318504" cy="3510280"/>
           </a:xfrm>
           <a:prstGeom prst="rect">
             <a:avLst/>
@@ -8653,8 +6852,8 @@
         </p:nvSpPr>
         <p:spPr>
           <a:xfrm>
-            <a:off x="5358384" y="4987544"/>
-            <a:ext cx="5833872" cy="457200"/>
+            <a:off x="4855464" y="5485384"/>
+            <a:ext cx="6318504" cy="457200"/>
           </a:xfrm>
           <a:prstGeom prst="rect">
             <a:avLst/>
@@ -8667,7 +6866,7 @@
           </a:bodyPr>
           <a:lstStyle/>
           <a:p>
-            <a:pPr algn="l">
+            <a:pPr algn="ctr">
               <a:lnSpc>
                 <a:spcPct val="110000"/>
               </a:lnSpc>
@@ -8679,13 +6878,860 @@
               </a:spcAft>
             </a:pPr>
             <a:r>
-              <a:rPr b="0" sz="1100">
+              <a:rPr b="0" sz="1200">
                 <a:solidFill>
                   <a:srgbClr val="4A5A66"/>
                 </a:solidFill>
                 <a:latin typeface="Consolas"/>
               </a:rPr>
               <a:t>Fig. 1 — test-set RMSE by method (motor + rod, lower is better).</a:t>
+            </a:r>
+          </a:p>
+        </p:txBody>
+      </p:sp>
+    </p:spTree>
+  </p:cSld>
+  <p:clrMapOvr>
+    <a:masterClrMapping/>
+  </p:clrMapOvr>
+</p:sld>
+</file>
+
+<file path=ppt/slides/slide6.xml><?xml version="1.0" encoding="utf-8"?>
+<p:sld xmlns:a="http://schemas.openxmlformats.org/drawingml/2006/main" xmlns:p="http://schemas.openxmlformats.org/presentationml/2006/main" xmlns:r="http://schemas.openxmlformats.org/officeDocument/2006/relationships">
+  <p:cSld>
+    <p:bg>
+      <p:bgPr>
+        <a:solidFill>
+          <a:srgbClr val="FBFAF6"/>
+        </a:solidFill>
+        <a:effectLst/>
+      </p:bgPr>
+    </p:bg>
+    <p:spTree>
+      <p:nvGrpSpPr>
+        <p:cNvPr id="1" name=""/>
+        <p:cNvGrpSpPr/>
+        <p:nvPr/>
+      </p:nvGrpSpPr>
+      <p:grpSpPr/>
+      <p:sp>
+        <p:nvSpPr>
+          <p:cNvPr id="2" name="Rectangle 1"/>
+          <p:cNvSpPr/>
+          <p:nvPr/>
+        </p:nvSpPr>
+        <p:spPr>
+          <a:xfrm>
+            <a:off x="566928" y="502920"/>
+            <a:ext cx="17780" cy="5852160"/>
+          </a:xfrm>
+          <a:prstGeom prst="rect">
+            <a:avLst/>
+          </a:prstGeom>
+          <a:solidFill>
+            <a:srgbClr val="D9D2C4"/>
+          </a:solidFill>
+          <a:ln>
+            <a:noFill/>
+          </a:ln>
+          <a:effectLst/>
+        </p:spPr>
+        <p:style>
+          <a:lnRef idx="1">
+            <a:schemeClr val="accent1"/>
+          </a:lnRef>
+          <a:fillRef idx="3">
+            <a:schemeClr val="accent1"/>
+          </a:fillRef>
+          <a:effectRef idx="2">
+            <a:schemeClr val="accent1"/>
+          </a:effectRef>
+          <a:fontRef idx="minor">
+            <a:schemeClr val="lt1"/>
+          </a:fontRef>
+        </p:style>
+        <p:txBody>
+          <a:bodyPr rtlCol="0" anchor="ctr"/>
+          <a:lstStyle/>
+          <a:p>
+            <a:pPr algn="ctr"/>
+          </a:p>
+        </p:txBody>
+      </p:sp>
+      <p:sp>
+        <p:nvSpPr>
+          <p:cNvPr id="3" name="Rectangle 2"/>
+          <p:cNvSpPr/>
+          <p:nvPr/>
+        </p:nvSpPr>
+        <p:spPr>
+          <a:xfrm>
+            <a:off x="566928" y="502920"/>
+            <a:ext cx="30480" cy="566928"/>
+          </a:xfrm>
+          <a:prstGeom prst="rect">
+            <a:avLst/>
+          </a:prstGeom>
+          <a:solidFill>
+            <a:srgbClr val="2A9D8F"/>
+          </a:solidFill>
+          <a:ln>
+            <a:noFill/>
+          </a:ln>
+          <a:effectLst/>
+        </p:spPr>
+        <p:style>
+          <a:lnRef idx="1">
+            <a:schemeClr val="accent1"/>
+          </a:lnRef>
+          <a:fillRef idx="3">
+            <a:schemeClr val="accent1"/>
+          </a:fillRef>
+          <a:effectRef idx="2">
+            <a:schemeClr val="accent1"/>
+          </a:effectRef>
+          <a:fontRef idx="minor">
+            <a:schemeClr val="lt1"/>
+          </a:fontRef>
+        </p:style>
+        <p:txBody>
+          <a:bodyPr rtlCol="0" anchor="ctr"/>
+          <a:lstStyle/>
+          <a:p>
+            <a:pPr algn="ctr"/>
+          </a:p>
+        </p:txBody>
+      </p:sp>
+      <p:sp>
+        <p:nvSpPr>
+          <p:cNvPr id="4" name="TextBox 3"/>
+          <p:cNvSpPr txBox="1"/>
+          <p:nvPr/>
+        </p:nvSpPr>
+        <p:spPr>
+          <a:xfrm>
+            <a:off x="868680" y="548640"/>
+            <a:ext cx="10607040" cy="320040"/>
+          </a:xfrm>
+          <a:prstGeom prst="rect">
+            <a:avLst/>
+          </a:prstGeom>
+          <a:noFill/>
+        </p:spPr>
+        <p:txBody>
+          <a:bodyPr wrap="square" anchor="t" lIns="0" rIns="0" tIns="0" bIns="0">
+            <a:spAutoFit/>
+          </a:bodyPr>
+          <a:lstStyle/>
+          <a:p>
+            <a:pPr>
+              <a:lnSpc>
+                <a:spcPct val="100000"/>
+              </a:lnSpc>
+            </a:pPr>
+            <a:r>
+              <a:rPr sz="1100" b="1">
+                <a:solidFill>
+                  <a:srgbClr val="E07A5F"/>
+                </a:solidFill>
+                <a:latin typeface="Consolas"/>
+              </a:rPr>
+              <a:t>07  </a:t>
+            </a:r>
+            <a:r>
+              <a:rPr sz="1100">
+                <a:solidFill>
+                  <a:srgbClr val="2A9D8F"/>
+                </a:solidFill>
+                <a:latin typeface="Consolas"/>
+              </a:rPr>
+              <a:t>ML2 — GENERALISATION  (UNSEEN EXCITATION)</a:t>
+            </a:r>
+          </a:p>
+        </p:txBody>
+      </p:sp>
+      <p:sp>
+        <p:nvSpPr>
+          <p:cNvPr id="5" name="TextBox 4"/>
+          <p:cNvSpPr txBox="1"/>
+          <p:nvPr/>
+        </p:nvSpPr>
+        <p:spPr>
+          <a:xfrm>
+            <a:off x="868680" y="960120"/>
+            <a:ext cx="10607040" cy="1280160"/>
+          </a:xfrm>
+          <a:prstGeom prst="rect">
+            <a:avLst/>
+          </a:prstGeom>
+          <a:noFill/>
+        </p:spPr>
+        <p:txBody>
+          <a:bodyPr wrap="square" anchor="t" lIns="0" rIns="0" tIns="0" bIns="0">
+            <a:spAutoFit/>
+          </a:bodyPr>
+          <a:lstStyle/>
+          <a:p>
+            <a:pPr algn="l">
+              <a:lnSpc>
+                <a:spcPct val="102000"/>
+              </a:lnSpc>
+              <a:spcBef>
+                <a:spcPts val="0"/>
+              </a:spcBef>
+              <a:spcAft>
+                <a:spcPts val="600"/>
+              </a:spcAft>
+            </a:pPr>
+            <a:r>
+              <a:rPr b="1" sz="2600">
+                <a:solidFill>
+                  <a:srgbClr val="1D3557"/>
+                </a:solidFill>
+                <a:latin typeface="Georgia"/>
+              </a:rPr>
+              <a:t>Classical filters break on unseen inputs.</a:t>
+            </a:r>
+          </a:p>
+        </p:txBody>
+      </p:sp>
+      <p:graphicFrame>
+        <p:nvGraphicFramePr>
+          <p:cNvPr id="6" name="Table 5"/>
+          <p:cNvGraphicFramePr>
+            <a:graphicFrameLocks noGrp="1"/>
+          </p:cNvGraphicFramePr>
+          <p:nvPr/>
+        </p:nvGraphicFramePr>
+        <p:xfrm>
+          <a:off x="868680" y="2057400"/>
+          <a:ext cx="4526280" cy="2468880"/>
+        </p:xfrm>
+        <a:graphic>
+          <a:graphicData uri="http://schemas.openxmlformats.org/drawingml/2006/table">
+            <a:tbl>
+              <a:tblPr>
+                <a:tableStyleId>{5C22544A-7EE6-4342-B048-85BDC9FD1C3A}</a:tableStyleId>
+              </a:tblPr>
+              <a:tblGrid>
+                <a:gridCol w="1901037"/>
+                <a:gridCol w="2625243"/>
+              </a:tblGrid>
+              <a:tr h="411480">
+                <a:tc>
+                  <a:txBody>
+                    <a:bodyPr/>
+                    <a:lstStyle/>
+                    <a:p>
+                      <a:r>
+                        <a:rPr b="0" sz="1200">
+                          <a:solidFill>
+                            <a:srgbClr val="1D3557"/>
+                          </a:solidFill>
+                          <a:latin typeface="Consolas"/>
+                        </a:rPr>
+                        <a:t>Raw  —  no filter</a:t>
+                      </a:r>
+                    </a:p>
+                  </a:txBody>
+                  <a:tcPr marL="73152" marT="27432" marB="27432" anchor="ctr">
+                    <a:solidFill>
+                      <a:srgbClr val="FBFAF6"/>
+                    </a:solidFill>
+                  </a:tcPr>
+                </a:tc>
+                <a:tc>
+                  <a:txBody>
+                    <a:bodyPr/>
+                    <a:lstStyle/>
+                    <a:p>
+                      <a:r>
+                        <a:rPr b="0" sz="1300">
+                          <a:solidFill>
+                            <a:srgbClr val="4A5A66"/>
+                          </a:solidFill>
+                          <a:latin typeface="Calibri"/>
+                        </a:rPr>
+                        <a:t>3.00 rad/s      —     reference</a:t>
+                      </a:r>
+                    </a:p>
+                  </a:txBody>
+                  <a:tcPr marL="73152" marT="27432" marB="27432" anchor="ctr">
+                    <a:solidFill>
+                      <a:srgbClr val="FBFAF6"/>
+                    </a:solidFill>
+                  </a:tcPr>
+                </a:tc>
+              </a:tr>
+              <a:tr h="411480">
+                <a:tc>
+                  <a:txBody>
+                    <a:bodyPr/>
+                    <a:lstStyle/>
+                    <a:p>
+                      <a:r>
+                        <a:rPr b="0" sz="1200">
+                          <a:solidFill>
+                            <a:srgbClr val="1D3557"/>
+                          </a:solidFill>
+                          <a:latin typeface="Consolas"/>
+                        </a:rPr>
+                        <a:t>EMA  —  tuned</a:t>
+                      </a:r>
+                    </a:p>
+                  </a:txBody>
+                  <a:tcPr marL="73152" marT="27432" marB="27432" anchor="ctr">
+                    <a:solidFill>
+                      <a:srgbClr val="FBFAF6"/>
+                    </a:solidFill>
+                  </a:tcPr>
+                </a:tc>
+                <a:tc>
+                  <a:txBody>
+                    <a:bodyPr/>
+                    <a:lstStyle/>
+                    <a:p>
+                      <a:r>
+                        <a:rPr b="0" sz="1300">
+                          <a:solidFill>
+                            <a:srgbClr val="4A5A66"/>
+                          </a:solidFill>
+                          <a:latin typeface="Calibri"/>
+                        </a:rPr>
+                        <a:t>2.64 rad/s   +12 %   (was +64 %)</a:t>
+                      </a:r>
+                    </a:p>
+                  </a:txBody>
+                  <a:tcPr marL="73152" marT="27432" marB="27432" anchor="ctr">
+                    <a:solidFill>
+                      <a:srgbClr val="FBFAF6"/>
+                    </a:solidFill>
+                  </a:tcPr>
+                </a:tc>
+              </a:tr>
+              <a:tr h="411480">
+                <a:tc>
+                  <a:txBody>
+                    <a:bodyPr/>
+                    <a:lstStyle/>
+                    <a:p>
+                      <a:r>
+                        <a:rPr b="0" sz="1200">
+                          <a:solidFill>
+                            <a:srgbClr val="1D3557"/>
+                          </a:solidFill>
+                          <a:latin typeface="Consolas"/>
+                        </a:rPr>
+                        <a:t>Kalman  —  tuned</a:t>
+                      </a:r>
+                    </a:p>
+                  </a:txBody>
+                  <a:tcPr marL="73152" marT="27432" marB="27432" anchor="ctr">
+                    <a:solidFill>
+                      <a:srgbClr val="FBFAF6"/>
+                    </a:solidFill>
+                  </a:tcPr>
+                </a:tc>
+                <a:tc>
+                  <a:txBody>
+                    <a:bodyPr/>
+                    <a:lstStyle/>
+                    <a:p>
+                      <a:r>
+                        <a:rPr b="0" sz="1300">
+                          <a:solidFill>
+                            <a:srgbClr val="4A5A66"/>
+                          </a:solidFill>
+                          <a:latin typeface="Calibri"/>
+                        </a:rPr>
+                        <a:t>2.29 rad/s   +24 %   (was +56 %)</a:t>
+                      </a:r>
+                    </a:p>
+                  </a:txBody>
+                  <a:tcPr marL="73152" marT="27432" marB="27432" anchor="ctr">
+                    <a:solidFill>
+                      <a:srgbClr val="FBFAF6"/>
+                    </a:solidFill>
+                  </a:tcPr>
+                </a:tc>
+              </a:tr>
+              <a:tr h="411480">
+                <a:tc>
+                  <a:txBody>
+                    <a:bodyPr/>
+                    <a:lstStyle/>
+                    <a:p>
+                      <a:r>
+                        <a:rPr b="0" sz="1200">
+                          <a:solidFill>
+                            <a:srgbClr val="1D3557"/>
+                          </a:solidFill>
+                          <a:latin typeface="Consolas"/>
+                        </a:rPr>
+                        <a:t>TCN</a:t>
+                      </a:r>
+                    </a:p>
+                  </a:txBody>
+                  <a:tcPr marL="73152" marT="27432" marB="27432" anchor="ctr">
+                    <a:solidFill>
+                      <a:srgbClr val="FBFAF6"/>
+                    </a:solidFill>
+                  </a:tcPr>
+                </a:tc>
+                <a:tc>
+                  <a:txBody>
+                    <a:bodyPr/>
+                    <a:lstStyle/>
+                    <a:p>
+                      <a:r>
+                        <a:rPr b="0" sz="1300">
+                          <a:solidFill>
+                            <a:srgbClr val="4A5A66"/>
+                          </a:solidFill>
+                          <a:latin typeface="Calibri"/>
+                        </a:rPr>
+                        <a:t>0.98 rad/s   +67 %   holds</a:t>
+                      </a:r>
+                    </a:p>
+                  </a:txBody>
+                  <a:tcPr marL="73152" marT="27432" marB="27432" anchor="ctr">
+                    <a:solidFill>
+                      <a:srgbClr val="FBFAF6"/>
+                    </a:solidFill>
+                  </a:tcPr>
+                </a:tc>
+              </a:tr>
+              <a:tr h="411480">
+                <a:tc>
+                  <a:txBody>
+                    <a:bodyPr/>
+                    <a:lstStyle/>
+                    <a:p>
+                      <a:r>
+                        <a:rPr b="0" sz="1200">
+                          <a:solidFill>
+                            <a:srgbClr val="1D3557"/>
+                          </a:solidFill>
+                          <a:latin typeface="Consolas"/>
+                        </a:rPr>
+                        <a:t>GRU</a:t>
+                      </a:r>
+                    </a:p>
+                  </a:txBody>
+                  <a:tcPr marL="73152" marT="27432" marB="27432" anchor="ctr">
+                    <a:solidFill>
+                      <a:srgbClr val="FBFAF6"/>
+                    </a:solidFill>
+                  </a:tcPr>
+                </a:tc>
+                <a:tc>
+                  <a:txBody>
+                    <a:bodyPr/>
+                    <a:lstStyle/>
+                    <a:p>
+                      <a:r>
+                        <a:rPr b="0" sz="1300">
+                          <a:solidFill>
+                            <a:srgbClr val="4A5A66"/>
+                          </a:solidFill>
+                          <a:latin typeface="Calibri"/>
+                        </a:rPr>
+                        <a:t>0.93 rad/s   +69 %   holds</a:t>
+                      </a:r>
+                    </a:p>
+                  </a:txBody>
+                  <a:tcPr marL="73152" marT="27432" marB="27432" anchor="ctr">
+                    <a:solidFill>
+                      <a:srgbClr val="FBFAF6"/>
+                    </a:solidFill>
+                  </a:tcPr>
+                </a:tc>
+              </a:tr>
+              <a:tr h="411480">
+                <a:tc>
+                  <a:txBody>
+                    <a:bodyPr/>
+                    <a:lstStyle/>
+                    <a:p>
+                      <a:r>
+                        <a:rPr b="1" sz="1200">
+                          <a:solidFill>
+                            <a:srgbClr val="1C2B36"/>
+                          </a:solidFill>
+                          <a:latin typeface="Consolas"/>
+                        </a:rPr>
+                        <a:t>CNN 🏆</a:t>
+                      </a:r>
+                    </a:p>
+                  </a:txBody>
+                  <a:tcPr marL="73152" marT="27432" marB="27432" anchor="ctr">
+                    <a:solidFill>
+                      <a:srgbClr val="FBFAF6"/>
+                    </a:solidFill>
+                  </a:tcPr>
+                </a:tc>
+                <a:tc>
+                  <a:txBody>
+                    <a:bodyPr/>
+                    <a:lstStyle/>
+                    <a:p>
+                      <a:r>
+                        <a:rPr b="1" sz="1300">
+                          <a:solidFill>
+                            <a:srgbClr val="1C2B36"/>
+                          </a:solidFill>
+                          <a:latin typeface="Calibri"/>
+                        </a:rPr>
+                        <a:t>0.81 rad/s</a:t>
+                      </a:r>
+                      <a:r>
+                        <a:rPr b="0" sz="1300">
+                          <a:solidFill>
+                            <a:srgbClr val="4A5A66"/>
+                          </a:solidFill>
+                          <a:latin typeface="Calibri"/>
+                        </a:rPr>
+                        <a:t>   </a:t>
+                      </a:r>
+                      <a:r>
+                        <a:rPr b="1" sz="1300">
+                          <a:solidFill>
+                            <a:srgbClr val="1C2B36"/>
+                          </a:solidFill>
+                          <a:latin typeface="Calibri"/>
+                        </a:rPr>
+                        <a:t>+73 %</a:t>
+                      </a:r>
+                      <a:r>
+                        <a:rPr b="0" sz="1300">
+                          <a:solidFill>
+                            <a:srgbClr val="4A5A66"/>
+                          </a:solidFill>
+                          <a:latin typeface="Calibri"/>
+                        </a:rPr>
+                        <a:t>   holds</a:t>
+                      </a:r>
+                    </a:p>
+                  </a:txBody>
+                  <a:tcPr marL="73152" marT="27432" marB="27432" anchor="ctr">
+                    <a:solidFill>
+                      <a:srgbClr val="FBFAF6"/>
+                    </a:solidFill>
+                  </a:tcPr>
+                </a:tc>
+              </a:tr>
+            </a:tbl>
+          </a:graphicData>
+        </a:graphic>
+      </p:graphicFrame>
+      <p:sp>
+        <p:nvSpPr>
+          <p:cNvPr id="7" name="Rounded Rectangle 6"/>
+          <p:cNvSpPr/>
+          <p:nvPr/>
+        </p:nvSpPr>
+        <p:spPr>
+          <a:xfrm>
+            <a:off x="868680" y="4663440"/>
+            <a:ext cx="4526280" cy="1554480"/>
+          </a:xfrm>
+          <a:prstGeom prst="roundRect">
+            <a:avLst>
+              <a:gd name="adj" fmla="val 6000"/>
+            </a:avLst>
+          </a:prstGeom>
+          <a:solidFill>
+            <a:srgbClr val="E7F2F0"/>
+          </a:solidFill>
+          <a:ln w="12700">
+            <a:solidFill>
+              <a:srgbClr val="E7F2F0"/>
+            </a:solidFill>
+          </a:ln>
+          <a:effectLst/>
+        </p:spPr>
+        <p:style>
+          <a:lnRef idx="1">
+            <a:schemeClr val="accent1"/>
+          </a:lnRef>
+          <a:fillRef idx="3">
+            <a:schemeClr val="accent1"/>
+          </a:fillRef>
+          <a:effectRef idx="2">
+            <a:schemeClr val="accent1"/>
+          </a:effectRef>
+          <a:fontRef idx="minor">
+            <a:schemeClr val="lt1"/>
+          </a:fontRef>
+        </p:style>
+        <p:txBody>
+          <a:bodyPr rtlCol="0" anchor="ctr"/>
+          <a:lstStyle/>
+          <a:p>
+            <a:pPr algn="ctr"/>
+          </a:p>
+        </p:txBody>
+      </p:sp>
+      <p:sp>
+        <p:nvSpPr>
+          <p:cNvPr id="8" name="Rectangle 7"/>
+          <p:cNvSpPr/>
+          <p:nvPr/>
+        </p:nvSpPr>
+        <p:spPr>
+          <a:xfrm>
+            <a:off x="868680" y="4663440"/>
+            <a:ext cx="38100" cy="1554480"/>
+          </a:xfrm>
+          <a:prstGeom prst="rect">
+            <a:avLst/>
+          </a:prstGeom>
+          <a:solidFill>
+            <a:srgbClr val="2A9D8F"/>
+          </a:solidFill>
+          <a:ln>
+            <a:noFill/>
+          </a:ln>
+          <a:effectLst/>
+        </p:spPr>
+        <p:style>
+          <a:lnRef idx="1">
+            <a:schemeClr val="accent1"/>
+          </a:lnRef>
+          <a:fillRef idx="3">
+            <a:schemeClr val="accent1"/>
+          </a:fillRef>
+          <a:effectRef idx="2">
+            <a:schemeClr val="accent1"/>
+          </a:effectRef>
+          <a:fontRef idx="minor">
+            <a:schemeClr val="lt1"/>
+          </a:fontRef>
+        </p:style>
+        <p:txBody>
+          <a:bodyPr rtlCol="0" anchor="ctr"/>
+          <a:lstStyle/>
+          <a:p>
+            <a:pPr algn="ctr"/>
+          </a:p>
+        </p:txBody>
+      </p:sp>
+      <p:sp>
+        <p:nvSpPr>
+          <p:cNvPr id="9" name="TextBox 8"/>
+          <p:cNvSpPr txBox="1"/>
+          <p:nvPr/>
+        </p:nvSpPr>
+        <p:spPr>
+          <a:xfrm>
+            <a:off x="1069848" y="4754880"/>
+            <a:ext cx="4142232" cy="1371600"/>
+          </a:xfrm>
+          <a:prstGeom prst="rect">
+            <a:avLst/>
+          </a:prstGeom>
+          <a:noFill/>
+        </p:spPr>
+        <p:txBody>
+          <a:bodyPr wrap="square" anchor="ctr" lIns="0" rIns="0" tIns="0" bIns="0">
+            <a:spAutoFit/>
+          </a:bodyPr>
+          <a:lstStyle/>
+          <a:p>
+            <a:pPr>
+              <a:lnSpc>
+                <a:spcPct val="112000"/>
+              </a:lnSpc>
+            </a:pPr>
+            <a:r>
+              <a:rPr b="1" sz="1500">
+                <a:solidFill>
+                  <a:srgbClr val="1D3557"/>
+                </a:solidFill>
+                <a:latin typeface="Georgia"/>
+              </a:rPr>
+              <a:t>Generalisation gap.  </a:t>
+            </a:r>
+            <a:r>
+              <a:rPr b="0" sz="1500">
+                <a:solidFill>
+                  <a:srgbClr val="4A5A66"/>
+                </a:solidFill>
+                <a:latin typeface="Calibri"/>
+              </a:rPr>
+              <a:t>On a </a:t>
+            </a:r>
+            <a:r>
+              <a:rPr b="1" sz="1500">
+                <a:solidFill>
+                  <a:srgbClr val="1C2B36"/>
+                </a:solidFill>
+                <a:latin typeface="Calibri"/>
+              </a:rPr>
+              <a:t>chirp</a:t>
+            </a:r>
+            <a:r>
+              <a:rPr b="0" sz="1500">
+                <a:solidFill>
+                  <a:srgbClr val="4A5A66"/>
+                </a:solidFill>
+                <a:latin typeface="Calibri"/>
+              </a:rPr>
+              <a:t> sweep never seen in training, </a:t>
+            </a:r>
+            <a:r>
+              <a:rPr b="1" sz="1500">
+                <a:solidFill>
+                  <a:srgbClr val="1C2B36"/>
+                </a:solidFill>
+                <a:latin typeface="Calibri"/>
+              </a:rPr>
+              <a:t>EMA and Kalman collapse</a:t>
+            </a:r>
+            <a:r>
+              <a:rPr b="0" sz="1500">
+                <a:solidFill>
+                  <a:srgbClr val="4A5A66"/>
+                </a:solidFill>
+                <a:latin typeface="Calibri"/>
+              </a:rPr>
+              <a:t> — implicitly tuned to the training spectrum — while </a:t>
+            </a:r>
+            <a:r>
+              <a:rPr b="1" sz="1500">
+                <a:solidFill>
+                  <a:srgbClr val="1C2B36"/>
+                </a:solidFill>
+                <a:latin typeface="Calibri"/>
+              </a:rPr>
+              <a:t>neural filters hold +67–73 %</a:t>
+            </a:r>
+            <a:r>
+              <a:rPr b="0" sz="1500">
+                <a:solidFill>
+                  <a:srgbClr val="4A5A66"/>
+                </a:solidFill>
+                <a:latin typeface="Calibri"/>
+              </a:rPr>
+              <a:t>, having learned the dynamics, not the excitation.</a:t>
+            </a:r>
+          </a:p>
+        </p:txBody>
+      </p:sp>
+      <p:sp>
+        <p:nvSpPr>
+          <p:cNvPr id="10" name="Rounded Rectangle 9"/>
+          <p:cNvSpPr/>
+          <p:nvPr/>
+        </p:nvSpPr>
+        <p:spPr>
+          <a:xfrm>
+            <a:off x="5669280" y="1783080"/>
+            <a:ext cx="5650992" cy="3726688"/>
+          </a:xfrm>
+          <a:prstGeom prst="roundRect">
+            <a:avLst>
+              <a:gd name="adj" fmla="val 6000"/>
+            </a:avLst>
+          </a:prstGeom>
+          <a:solidFill>
+            <a:srgbClr val="FFFFFF"/>
+          </a:solidFill>
+          <a:ln w="12700">
+            <a:solidFill>
+              <a:srgbClr val="D9D2C4"/>
+            </a:solidFill>
+          </a:ln>
+          <a:effectLst/>
+        </p:spPr>
+        <p:style>
+          <a:lnRef idx="1">
+            <a:schemeClr val="accent1"/>
+          </a:lnRef>
+          <a:fillRef idx="3">
+            <a:schemeClr val="accent1"/>
+          </a:fillRef>
+          <a:effectRef idx="2">
+            <a:schemeClr val="accent1"/>
+          </a:effectRef>
+          <a:fontRef idx="minor">
+            <a:schemeClr val="lt1"/>
+          </a:fontRef>
+        </p:style>
+        <p:txBody>
+          <a:bodyPr rtlCol="0" anchor="ctr"/>
+          <a:lstStyle/>
+          <a:p>
+            <a:pPr algn="ctr"/>
+          </a:p>
+        </p:txBody>
+      </p:sp>
+      <p:pic>
+        <p:nvPicPr>
+          <p:cNvPr id="11" name="Picture 10" descr="ood_rmse.png"/>
+          <p:cNvPicPr>
+            <a:picLocks noChangeAspect="1"/>
+          </p:cNvPicPr>
+          <p:nvPr/>
+        </p:nvPicPr>
+        <p:blipFill>
+          <a:blip r:embed="rId2"/>
+          <a:stretch>
+            <a:fillRect/>
+          </a:stretch>
+        </p:blipFill>
+        <p:spPr>
+          <a:xfrm>
+            <a:off x="5815584" y="1929384"/>
+            <a:ext cx="5358384" cy="2976880"/>
+          </a:xfrm>
+          <a:prstGeom prst="rect">
+            <a:avLst/>
+          </a:prstGeom>
+        </p:spPr>
+      </p:pic>
+      <p:sp>
+        <p:nvSpPr>
+          <p:cNvPr id="12" name="TextBox 11"/>
+          <p:cNvSpPr txBox="1"/>
+          <p:nvPr/>
+        </p:nvSpPr>
+        <p:spPr>
+          <a:xfrm>
+            <a:off x="5815584" y="4951984"/>
+            <a:ext cx="5358384" cy="457200"/>
+          </a:xfrm>
+          <a:prstGeom prst="rect">
+            <a:avLst/>
+          </a:prstGeom>
+          <a:noFill/>
+        </p:spPr>
+        <p:txBody>
+          <a:bodyPr wrap="square" anchor="t" lIns="0" rIns="0" tIns="0" bIns="0">
+            <a:spAutoFit/>
+          </a:bodyPr>
+          <a:lstStyle/>
+          <a:p>
+            <a:pPr algn="ctr">
+              <a:lnSpc>
+                <a:spcPct val="110000"/>
+              </a:lnSpc>
+              <a:spcBef>
+                <a:spcPts val="0"/>
+              </a:spcBef>
+              <a:spcAft>
+                <a:spcPts val="600"/>
+              </a:spcAft>
+            </a:pPr>
+            <a:r>
+              <a:rPr b="0" sz="1200">
+                <a:solidFill>
+                  <a:srgbClr val="4A5A66"/>
+                </a:solidFill>
+                <a:latin typeface="Consolas"/>
+              </a:rPr>
+              <a:t>Fig. 2 — OOD (chirp) RMSE: classical filters collapse, neural hold.</a:t>
             </a:r>
           </a:p>
         </p:txBody>

--- a/presentation.pptx
+++ b/presentation.pptx
@@ -11,6 +11,8 @@
     <p:sldId id="259" r:id="rId10"/>
     <p:sldId id="260" r:id="rId11"/>
     <p:sldId id="261" r:id="rId12"/>
+    <p:sldId id="262" r:id="rId13"/>
+    <p:sldId id="263" r:id="rId14"/>
   </p:sldIdLst>
   <p:sldSz cx="12191695" cy="6858000" type="screen4x3"/>
   <p:notesSz cx="6858000" cy="9144000"/>
@@ -4748,7 +4750,7 @@
                 </a:solidFill>
                 <a:latin typeface="Consolas"/>
               </a:rPr>
-              <a:t>ML2 — METHODS</a:t>
+              <a:t>ML2 — EMA BASELINE: VARIANCE VS DELAY</a:t>
             </a:r>
           </a:p>
         </p:txBody>
@@ -4793,6 +4795,722 @@
                 </a:solidFill>
                 <a:latin typeface="Georgia"/>
               </a:rPr>
+              <a:t>Smoothing always costs delay.</a:t>
+            </a:r>
+          </a:p>
+        </p:txBody>
+      </p:sp>
+      <p:sp>
+        <p:nvSpPr>
+          <p:cNvPr id="6" name="TextBox 5"/>
+          <p:cNvSpPr txBox="1"/>
+          <p:nvPr/>
+        </p:nvSpPr>
+        <p:spPr>
+          <a:xfrm>
+            <a:off x="868680" y="1828800"/>
+            <a:ext cx="10607040" cy="603504"/>
+          </a:xfrm>
+          <a:prstGeom prst="rect">
+            <a:avLst/>
+          </a:prstGeom>
+          <a:noFill/>
+        </p:spPr>
+        <p:txBody>
+          <a:bodyPr wrap="square" anchor="t" lIns="0" rIns="0" tIns="0" bIns="0">
+            <a:spAutoFit/>
+          </a:bodyPr>
+          <a:lstStyle/>
+          <a:p>
+            <a:pPr>
+              <a:lnSpc>
+                <a:spcPct val="120000"/>
+              </a:lnSpc>
+            </a:pPr>
+            <a:r>
+              <a:rPr b="0" sz="1500">
+                <a:solidFill>
+                  <a:srgbClr val="4A5A66"/>
+                </a:solidFill>
+                <a:latin typeface="Calibri"/>
+              </a:rPr>
+              <a:t>The EMA is a causal first-order IIR low-pass filter with a single knob α. Higher α smooths more aggressively (lower output variance) but also pushes the filter's phase lag higher — the two effects are </a:t>
+            </a:r>
+            <a:r>
+              <a:rPr b="1" sz="1500">
+                <a:solidFill>
+                  <a:srgbClr val="1C2B36"/>
+                </a:solidFill>
+                <a:latin typeface="Calibri"/>
+              </a:rPr>
+              <a:t>inseparable</a:t>
+            </a:r>
+            <a:r>
+              <a:rPr b="0" sz="1500">
+                <a:solidFill>
+                  <a:srgbClr val="4A5A66"/>
+                </a:solidFill>
+                <a:latin typeface="Calibri"/>
+              </a:rPr>
+              <a:t>.</a:t>
+            </a:r>
+          </a:p>
+        </p:txBody>
+      </p:sp>
+      <p:sp>
+        <p:nvSpPr>
+          <p:cNvPr id="7" name="Rounded Rectangle 6"/>
+          <p:cNvSpPr/>
+          <p:nvPr/>
+        </p:nvSpPr>
+        <p:spPr>
+          <a:xfrm>
+            <a:off x="868680" y="2743200"/>
+            <a:ext cx="10607040" cy="896112"/>
+          </a:xfrm>
+          <a:prstGeom prst="roundRect">
+            <a:avLst>
+              <a:gd name="adj" fmla="val 6000"/>
+            </a:avLst>
+          </a:prstGeom>
+          <a:solidFill>
+            <a:srgbClr val="F4F1E9"/>
+          </a:solidFill>
+          <a:ln w="12700">
+            <a:solidFill>
+              <a:srgbClr val="D9D2C4"/>
+            </a:solidFill>
+          </a:ln>
+          <a:effectLst/>
+        </p:spPr>
+        <p:style>
+          <a:lnRef idx="1">
+            <a:schemeClr val="accent1"/>
+          </a:lnRef>
+          <a:fillRef idx="3">
+            <a:schemeClr val="accent1"/>
+          </a:fillRef>
+          <a:effectRef idx="2">
+            <a:schemeClr val="accent1"/>
+          </a:effectRef>
+          <a:fontRef idx="minor">
+            <a:schemeClr val="lt1"/>
+          </a:fontRef>
+        </p:style>
+        <p:txBody>
+          <a:bodyPr rtlCol="0" anchor="ctr"/>
+          <a:lstStyle/>
+          <a:p>
+            <a:pPr algn="ctr"/>
+          </a:p>
+        </p:txBody>
+      </p:sp>
+      <p:sp>
+        <p:nvSpPr>
+          <p:cNvPr id="8" name="Rectangle 7"/>
+          <p:cNvSpPr/>
+          <p:nvPr/>
+        </p:nvSpPr>
+        <p:spPr>
+          <a:xfrm>
+            <a:off x="868680" y="2743200"/>
+            <a:ext cx="38100" cy="896112"/>
+          </a:xfrm>
+          <a:prstGeom prst="rect">
+            <a:avLst/>
+          </a:prstGeom>
+          <a:solidFill>
+            <a:srgbClr val="E07A5F"/>
+          </a:solidFill>
+          <a:ln>
+            <a:noFill/>
+          </a:ln>
+          <a:effectLst/>
+        </p:spPr>
+        <p:style>
+          <a:lnRef idx="1">
+            <a:schemeClr val="accent1"/>
+          </a:lnRef>
+          <a:fillRef idx="3">
+            <a:schemeClr val="accent1"/>
+          </a:fillRef>
+          <a:effectRef idx="2">
+            <a:schemeClr val="accent1"/>
+          </a:effectRef>
+          <a:fontRef idx="minor">
+            <a:schemeClr val="lt1"/>
+          </a:fontRef>
+        </p:style>
+        <p:txBody>
+          <a:bodyPr rtlCol="0" anchor="ctr"/>
+          <a:lstStyle/>
+          <a:p>
+            <a:pPr algn="ctr"/>
+          </a:p>
+        </p:txBody>
+      </p:sp>
+      <p:sp>
+        <p:nvSpPr>
+          <p:cNvPr id="9" name="TextBox 8"/>
+          <p:cNvSpPr txBox="1"/>
+          <p:nvPr/>
+        </p:nvSpPr>
+        <p:spPr>
+          <a:xfrm>
+            <a:off x="1069848" y="2852928"/>
+            <a:ext cx="10241280" cy="713232"/>
+          </a:xfrm>
+          <a:prstGeom prst="rect">
+            <a:avLst/>
+          </a:prstGeom>
+          <a:noFill/>
+        </p:spPr>
+        <p:txBody>
+          <a:bodyPr wrap="square" anchor="ctr" lIns="0" rIns="0" tIns="0" bIns="0">
+            <a:spAutoFit/>
+          </a:bodyPr>
+          <a:lstStyle/>
+          <a:p>
+            <a:pPr>
+              <a:lnSpc>
+                <a:spcPct val="115000"/>
+              </a:lnSpc>
+              <a:spcBef>
+                <a:spcPts val="0"/>
+              </a:spcBef>
+              <a:spcAft>
+                <a:spcPts val="0"/>
+              </a:spcAft>
+            </a:pPr>
+            <a:r>
+              <a:rPr b="0" sz="1350">
+                <a:solidFill>
+                  <a:srgbClr val="1D3557"/>
+                </a:solidFill>
+                <a:latin typeface="Consolas"/>
+              </a:rPr>
+              <a:t>y[t]  =  (1 − α)·x[t]  +  α·y[t−1]          H(z) = (1−α) / (1 − αz⁻¹)</a:t>
+            </a:r>
+          </a:p>
+          <a:p>
+            <a:pPr>
+              <a:lnSpc>
+                <a:spcPct val="115000"/>
+              </a:lnSpc>
+              <a:spcBef>
+                <a:spcPts val="400"/>
+              </a:spcBef>
+              <a:spcAft>
+                <a:spcPts val="0"/>
+              </a:spcAft>
+            </a:pPr>
+            <a:r>
+              <a:rPr b="0" sz="1350">
+                <a:solidFill>
+                  <a:srgbClr val="1D3557"/>
+                </a:solidFill>
+                <a:latin typeface="Consolas"/>
+              </a:rPr>
+              <a:t>Var(y)/Var(x) = (1−α)/(1+α)       DC delay = α/(1−α)·dt</a:t>
+            </a:r>
+          </a:p>
+        </p:txBody>
+      </p:sp>
+      <p:sp>
+        <p:nvSpPr>
+          <p:cNvPr id="10" name="Rounded Rectangle 9"/>
+          <p:cNvSpPr/>
+          <p:nvPr/>
+        </p:nvSpPr>
+        <p:spPr>
+          <a:xfrm>
+            <a:off x="868680" y="3858768"/>
+            <a:ext cx="10607040" cy="3172968"/>
+          </a:xfrm>
+          <a:prstGeom prst="roundRect">
+            <a:avLst>
+              <a:gd name="adj" fmla="val 6000"/>
+            </a:avLst>
+          </a:prstGeom>
+          <a:solidFill>
+            <a:srgbClr val="FFFFFF"/>
+          </a:solidFill>
+          <a:ln w="12700">
+            <a:solidFill>
+              <a:srgbClr val="D9D2C4"/>
+            </a:solidFill>
+          </a:ln>
+          <a:effectLst/>
+        </p:spPr>
+        <p:style>
+          <a:lnRef idx="1">
+            <a:schemeClr val="accent1"/>
+          </a:lnRef>
+          <a:fillRef idx="3">
+            <a:schemeClr val="accent1"/>
+          </a:fillRef>
+          <a:effectRef idx="2">
+            <a:schemeClr val="accent1"/>
+          </a:effectRef>
+          <a:fontRef idx="minor">
+            <a:schemeClr val="lt1"/>
+          </a:fontRef>
+        </p:style>
+        <p:txBody>
+          <a:bodyPr rtlCol="0" anchor="ctr"/>
+          <a:lstStyle/>
+          <a:p>
+            <a:pPr algn="ctr"/>
+          </a:p>
+        </p:txBody>
+      </p:sp>
+      <p:pic>
+        <p:nvPicPr>
+          <p:cNvPr id="11" name="Picture 10" descr="ema_properties.png"/>
+          <p:cNvPicPr>
+            <a:picLocks noChangeAspect="1"/>
+          </p:cNvPicPr>
+          <p:nvPr/>
+        </p:nvPicPr>
+        <p:blipFill>
+          <a:blip r:embed="rId2"/>
+          <a:stretch>
+            <a:fillRect/>
+          </a:stretch>
+        </p:blipFill>
+        <p:spPr>
+          <a:xfrm>
+            <a:off x="2853027" y="4005072"/>
+            <a:ext cx="6638346" cy="2423160"/>
+          </a:xfrm>
+          <a:prstGeom prst="rect">
+            <a:avLst/>
+          </a:prstGeom>
+        </p:spPr>
+      </p:pic>
+      <p:sp>
+        <p:nvSpPr>
+          <p:cNvPr id="12" name="TextBox 11"/>
+          <p:cNvSpPr txBox="1"/>
+          <p:nvPr/>
+        </p:nvSpPr>
+        <p:spPr>
+          <a:xfrm>
+            <a:off x="1014984" y="6473952"/>
+            <a:ext cx="10314432" cy="457200"/>
+          </a:xfrm>
+          <a:prstGeom prst="rect">
+            <a:avLst/>
+          </a:prstGeom>
+          <a:noFill/>
+        </p:spPr>
+        <p:txBody>
+          <a:bodyPr wrap="square" anchor="t" lIns="0" rIns="0" tIns="0" bIns="0">
+            <a:spAutoFit/>
+          </a:bodyPr>
+          <a:lstStyle/>
+          <a:p>
+            <a:pPr algn="ctr">
+              <a:lnSpc>
+                <a:spcPct val="110000"/>
+              </a:lnSpc>
+              <a:spcBef>
+                <a:spcPts val="0"/>
+              </a:spcBef>
+              <a:spcAft>
+                <a:spcPts val="600"/>
+              </a:spcAft>
+            </a:pPr>
+            <a:r>
+              <a:rPr b="0" sz="1200">
+                <a:solidFill>
+                  <a:srgbClr val="4A5A66"/>
+                </a:solidFill>
+                <a:latin typeface="Consolas"/>
+              </a:rPr>
+              <a:t>Left: amplitude response |H(f)| — higher α narrows the passband (less noise).  Right: group delay τ(f) — same α inflates lag at every frequency.</a:t>
+            </a:r>
+          </a:p>
+        </p:txBody>
+      </p:sp>
+      <p:sp>
+        <p:nvSpPr>
+          <p:cNvPr id="13" name="Rounded Rectangle 12"/>
+          <p:cNvSpPr/>
+          <p:nvPr/>
+        </p:nvSpPr>
+        <p:spPr>
+          <a:xfrm>
+            <a:off x="868680" y="6263640"/>
+            <a:ext cx="10607040" cy="502920"/>
+          </a:xfrm>
+          <a:prstGeom prst="roundRect">
+            <a:avLst>
+              <a:gd name="adj" fmla="val 6000"/>
+            </a:avLst>
+          </a:prstGeom>
+          <a:solidFill>
+            <a:srgbClr val="FAECE7"/>
+          </a:solidFill>
+          <a:ln w="12700">
+            <a:solidFill>
+              <a:srgbClr val="FAECE7"/>
+            </a:solidFill>
+          </a:ln>
+          <a:effectLst/>
+        </p:spPr>
+        <p:style>
+          <a:lnRef idx="1">
+            <a:schemeClr val="accent1"/>
+          </a:lnRef>
+          <a:fillRef idx="3">
+            <a:schemeClr val="accent1"/>
+          </a:fillRef>
+          <a:effectRef idx="2">
+            <a:schemeClr val="accent1"/>
+          </a:effectRef>
+          <a:fontRef idx="minor">
+            <a:schemeClr val="lt1"/>
+          </a:fontRef>
+        </p:style>
+        <p:txBody>
+          <a:bodyPr rtlCol="0" anchor="ctr"/>
+          <a:lstStyle/>
+          <a:p>
+            <a:pPr algn="ctr"/>
+          </a:p>
+        </p:txBody>
+      </p:sp>
+      <p:sp>
+        <p:nvSpPr>
+          <p:cNvPr id="14" name="Rectangle 13"/>
+          <p:cNvSpPr/>
+          <p:nvPr/>
+        </p:nvSpPr>
+        <p:spPr>
+          <a:xfrm>
+            <a:off x="868680" y="6263640"/>
+            <a:ext cx="38100" cy="502920"/>
+          </a:xfrm>
+          <a:prstGeom prst="rect">
+            <a:avLst/>
+          </a:prstGeom>
+          <a:solidFill>
+            <a:srgbClr val="E07A5F"/>
+          </a:solidFill>
+          <a:ln>
+            <a:noFill/>
+          </a:ln>
+          <a:effectLst/>
+        </p:spPr>
+        <p:style>
+          <a:lnRef idx="1">
+            <a:schemeClr val="accent1"/>
+          </a:lnRef>
+          <a:fillRef idx="3">
+            <a:schemeClr val="accent1"/>
+          </a:fillRef>
+          <a:effectRef idx="2">
+            <a:schemeClr val="accent1"/>
+          </a:effectRef>
+          <a:fontRef idx="minor">
+            <a:schemeClr val="lt1"/>
+          </a:fontRef>
+        </p:style>
+        <p:txBody>
+          <a:bodyPr rtlCol="0" anchor="ctr"/>
+          <a:lstStyle/>
+          <a:p>
+            <a:pPr algn="ctr"/>
+          </a:p>
+        </p:txBody>
+      </p:sp>
+      <p:sp>
+        <p:nvSpPr>
+          <p:cNvPr id="15" name="TextBox 14"/>
+          <p:cNvSpPr txBox="1"/>
+          <p:nvPr/>
+        </p:nvSpPr>
+        <p:spPr>
+          <a:xfrm>
+            <a:off x="1069848" y="6355080"/>
+            <a:ext cx="10222992" cy="320040"/>
+          </a:xfrm>
+          <a:prstGeom prst="rect">
+            <a:avLst/>
+          </a:prstGeom>
+          <a:noFill/>
+        </p:spPr>
+        <p:txBody>
+          <a:bodyPr wrap="square" anchor="ctr" lIns="0" rIns="0" tIns="0" bIns="0">
+            <a:spAutoFit/>
+          </a:bodyPr>
+          <a:lstStyle/>
+          <a:p>
+            <a:pPr>
+              <a:lnSpc>
+                <a:spcPct val="112000"/>
+              </a:lnSpc>
+            </a:pPr>
+            <a:r>
+              <a:rPr b="1" sz="1500">
+                <a:solidFill>
+                  <a:srgbClr val="1D3557"/>
+                </a:solidFill>
+                <a:latin typeface="Georgia"/>
+              </a:rPr>
+              <a:t>Tuned α = 0.872.  </a:t>
+            </a:r>
+            <a:r>
+              <a:rPr b="0" sz="1500">
+                <a:solidFill>
+                  <a:srgbClr val="4A5A66"/>
+                </a:solidFill>
+                <a:latin typeface="Calibri"/>
+              </a:rPr>
+              <a:t>Noise std cut to </a:t>
+            </a:r>
+            <a:r>
+              <a:rPr b="1" sz="1500">
+                <a:solidFill>
+                  <a:srgbClr val="1C2B36"/>
+                </a:solidFill>
+                <a:latin typeface="Calibri"/>
+              </a:rPr>
+              <a:t>~26% of raw</a:t>
+            </a:r>
+            <a:r>
+              <a:rPr b="0" sz="1500">
+                <a:solidFill>
+                  <a:srgbClr val="4A5A66"/>
+                </a:solidFill>
+                <a:latin typeface="Calibri"/>
+              </a:rPr>
+              <a:t> (variance × 0.068) — but at </a:t>
+            </a:r>
+            <a:r>
+              <a:rPr b="1" sz="1500">
+                <a:solidFill>
+                  <a:srgbClr val="1C2B36"/>
+                </a:solidFill>
+                <a:latin typeface="Calibri"/>
+              </a:rPr>
+              <a:t>7 ms DC lag</a:t>
+            </a:r>
+            <a:r>
+              <a:rPr b="0" sz="1500">
+                <a:solidFill>
+                  <a:srgbClr val="4A5A66"/>
+                </a:solidFill>
+                <a:latin typeface="Calibri"/>
+              </a:rPr>
+              <a:t>. Both figures share the same α axis: you cannot get one without paying for the other.</a:t>
+            </a:r>
+          </a:p>
+        </p:txBody>
+      </p:sp>
+    </p:spTree>
+  </p:cSld>
+  <p:clrMapOvr>
+    <a:masterClrMapping/>
+  </p:clrMapOvr>
+</p:sld>
+</file>
+
+<file path=ppt/slides/slide4.xml><?xml version="1.0" encoding="utf-8"?>
+<p:sld xmlns:a="http://schemas.openxmlformats.org/drawingml/2006/main" xmlns:p="http://schemas.openxmlformats.org/presentationml/2006/main" xmlns:r="http://schemas.openxmlformats.org/officeDocument/2006/relationships">
+  <p:cSld>
+    <p:bg>
+      <p:bgPr>
+        <a:solidFill>
+          <a:srgbClr val="FBFAF6"/>
+        </a:solidFill>
+        <a:effectLst/>
+      </p:bgPr>
+    </p:bg>
+    <p:spTree>
+      <p:nvGrpSpPr>
+        <p:cNvPr id="1" name=""/>
+        <p:cNvGrpSpPr/>
+        <p:nvPr/>
+      </p:nvGrpSpPr>
+      <p:grpSpPr/>
+      <p:sp>
+        <p:nvSpPr>
+          <p:cNvPr id="2" name="Rectangle 1"/>
+          <p:cNvSpPr/>
+          <p:nvPr/>
+        </p:nvSpPr>
+        <p:spPr>
+          <a:xfrm>
+            <a:off x="566928" y="502920"/>
+            <a:ext cx="17780" cy="5852160"/>
+          </a:xfrm>
+          <a:prstGeom prst="rect">
+            <a:avLst/>
+          </a:prstGeom>
+          <a:solidFill>
+            <a:srgbClr val="D9D2C4"/>
+          </a:solidFill>
+          <a:ln>
+            <a:noFill/>
+          </a:ln>
+          <a:effectLst/>
+        </p:spPr>
+        <p:style>
+          <a:lnRef idx="1">
+            <a:schemeClr val="accent1"/>
+          </a:lnRef>
+          <a:fillRef idx="3">
+            <a:schemeClr val="accent1"/>
+          </a:fillRef>
+          <a:effectRef idx="2">
+            <a:schemeClr val="accent1"/>
+          </a:effectRef>
+          <a:fontRef idx="minor">
+            <a:schemeClr val="lt1"/>
+          </a:fontRef>
+        </p:style>
+        <p:txBody>
+          <a:bodyPr rtlCol="0" anchor="ctr"/>
+          <a:lstStyle/>
+          <a:p>
+            <a:pPr algn="ctr"/>
+          </a:p>
+        </p:txBody>
+      </p:sp>
+      <p:sp>
+        <p:nvSpPr>
+          <p:cNvPr id="3" name="Rectangle 2"/>
+          <p:cNvSpPr/>
+          <p:nvPr/>
+        </p:nvSpPr>
+        <p:spPr>
+          <a:xfrm>
+            <a:off x="566928" y="502920"/>
+            <a:ext cx="30480" cy="566928"/>
+          </a:xfrm>
+          <a:prstGeom prst="rect">
+            <a:avLst/>
+          </a:prstGeom>
+          <a:solidFill>
+            <a:srgbClr val="2A9D8F"/>
+          </a:solidFill>
+          <a:ln>
+            <a:noFill/>
+          </a:ln>
+          <a:effectLst/>
+        </p:spPr>
+        <p:style>
+          <a:lnRef idx="1">
+            <a:schemeClr val="accent1"/>
+          </a:lnRef>
+          <a:fillRef idx="3">
+            <a:schemeClr val="accent1"/>
+          </a:fillRef>
+          <a:effectRef idx="2">
+            <a:schemeClr val="accent1"/>
+          </a:effectRef>
+          <a:fontRef idx="minor">
+            <a:schemeClr val="lt1"/>
+          </a:fontRef>
+        </p:style>
+        <p:txBody>
+          <a:bodyPr rtlCol="0" anchor="ctr"/>
+          <a:lstStyle/>
+          <a:p>
+            <a:pPr algn="ctr"/>
+          </a:p>
+        </p:txBody>
+      </p:sp>
+      <p:sp>
+        <p:nvSpPr>
+          <p:cNvPr id="4" name="TextBox 3"/>
+          <p:cNvSpPr txBox="1"/>
+          <p:nvPr/>
+        </p:nvSpPr>
+        <p:spPr>
+          <a:xfrm>
+            <a:off x="868680" y="548640"/>
+            <a:ext cx="10607040" cy="320040"/>
+          </a:xfrm>
+          <a:prstGeom prst="rect">
+            <a:avLst/>
+          </a:prstGeom>
+          <a:noFill/>
+        </p:spPr>
+        <p:txBody>
+          <a:bodyPr wrap="square" anchor="t" lIns="0" rIns="0" tIns="0" bIns="0">
+            <a:spAutoFit/>
+          </a:bodyPr>
+          <a:lstStyle/>
+          <a:p>
+            <a:pPr>
+              <a:lnSpc>
+                <a:spcPct val="100000"/>
+              </a:lnSpc>
+            </a:pPr>
+            <a:r>
+              <a:rPr sz="1100" b="1">
+                <a:solidFill>
+                  <a:srgbClr val="E07A5F"/>
+                </a:solidFill>
+                <a:latin typeface="Consolas"/>
+              </a:rPr>
+              <a:t>04  </a:t>
+            </a:r>
+            <a:r>
+              <a:rPr sz="1100">
+                <a:solidFill>
+                  <a:srgbClr val="2A9D8F"/>
+                </a:solidFill>
+                <a:latin typeface="Consolas"/>
+              </a:rPr>
+              <a:t>ML2 — METHODS</a:t>
+            </a:r>
+          </a:p>
+        </p:txBody>
+      </p:sp>
+      <p:sp>
+        <p:nvSpPr>
+          <p:cNvPr id="5" name="TextBox 4"/>
+          <p:cNvSpPr txBox="1"/>
+          <p:nvPr/>
+        </p:nvSpPr>
+        <p:spPr>
+          <a:xfrm>
+            <a:off x="868680" y="960120"/>
+            <a:ext cx="10607040" cy="1280160"/>
+          </a:xfrm>
+          <a:prstGeom prst="rect">
+            <a:avLst/>
+          </a:prstGeom>
+          <a:noFill/>
+        </p:spPr>
+        <p:txBody>
+          <a:bodyPr wrap="square" anchor="t" lIns="0" rIns="0" tIns="0" bIns="0">
+            <a:spAutoFit/>
+          </a:bodyPr>
+          <a:lstStyle/>
+          <a:p>
+            <a:pPr algn="l">
+              <a:lnSpc>
+                <a:spcPct val="102000"/>
+              </a:lnSpc>
+              <a:spcBef>
+                <a:spcPts val="0"/>
+              </a:spcBef>
+              <a:spcAft>
+                <a:spcPts val="600"/>
+              </a:spcAft>
+            </a:pPr>
+            <a:r>
+              <a:rPr b="1" sz="2800">
+                <a:solidFill>
+                  <a:srgbClr val="1D3557"/>
+                </a:solidFill>
+                <a:latin typeface="Georgia"/>
+              </a:rPr>
               <a:t>Classical baselines vs learned filters.</a:t>
             </a:r>
           </a:p>
@@ -5673,7 +6391,7 @@
 </p:sld>
 </file>
 
-<file path=ppt/slides/slide4.xml><?xml version="1.0" encoding="utf-8"?>
+<file path=ppt/slides/slide5.xml><?xml version="1.0" encoding="utf-8"?>
 <p:sld xmlns:a="http://schemas.openxmlformats.org/drawingml/2006/main" xmlns:p="http://schemas.openxmlformats.org/presentationml/2006/main" xmlns:r="http://schemas.openxmlformats.org/officeDocument/2006/relationships">
   <p:cSld>
     <p:bg>
@@ -6412,7 +7130,7 @@
 </p:sld>
 </file>
 
-<file path=ppt/slides/slide5.xml><?xml version="1.0" encoding="utf-8"?>
+<file path=ppt/slides/slide6.xml><?xml version="1.0" encoding="utf-8"?>
 <p:sld xmlns:a="http://schemas.openxmlformats.org/drawingml/2006/main" xmlns:p="http://schemas.openxmlformats.org/presentationml/2006/main" xmlns:r="http://schemas.openxmlformats.org/officeDocument/2006/relationships">
   <p:cSld>
     <p:bg>
@@ -6897,7 +7615,654 @@
 </p:sld>
 </file>
 
-<file path=ppt/slides/slide6.xml><?xml version="1.0" encoding="utf-8"?>
+<file path=ppt/slides/slide7.xml><?xml version="1.0" encoding="utf-8"?>
+<p:sld xmlns:a="http://schemas.openxmlformats.org/drawingml/2006/main" xmlns:p="http://schemas.openxmlformats.org/presentationml/2006/main" xmlns:r="http://schemas.openxmlformats.org/officeDocument/2006/relationships">
+  <p:cSld>
+    <p:bg>
+      <p:bgPr>
+        <a:solidFill>
+          <a:srgbClr val="FBFAF6"/>
+        </a:solidFill>
+        <a:effectLst/>
+      </p:bgPr>
+    </p:bg>
+    <p:spTree>
+      <p:nvGrpSpPr>
+        <p:cNvPr id="1" name=""/>
+        <p:cNvGrpSpPr/>
+        <p:nvPr/>
+      </p:nvGrpSpPr>
+      <p:grpSpPr/>
+      <p:sp>
+        <p:nvSpPr>
+          <p:cNvPr id="2" name="Rectangle 1"/>
+          <p:cNvSpPr/>
+          <p:nvPr/>
+        </p:nvSpPr>
+        <p:spPr>
+          <a:xfrm>
+            <a:off x="566928" y="502920"/>
+            <a:ext cx="17780" cy="5852160"/>
+          </a:xfrm>
+          <a:prstGeom prst="rect">
+            <a:avLst/>
+          </a:prstGeom>
+          <a:solidFill>
+            <a:srgbClr val="D9D2C4"/>
+          </a:solidFill>
+          <a:ln>
+            <a:noFill/>
+          </a:ln>
+          <a:effectLst/>
+        </p:spPr>
+        <p:style>
+          <a:lnRef idx="1">
+            <a:schemeClr val="accent1"/>
+          </a:lnRef>
+          <a:fillRef idx="3">
+            <a:schemeClr val="accent1"/>
+          </a:fillRef>
+          <a:effectRef idx="2">
+            <a:schemeClr val="accent1"/>
+          </a:effectRef>
+          <a:fontRef idx="minor">
+            <a:schemeClr val="lt1"/>
+          </a:fontRef>
+        </p:style>
+        <p:txBody>
+          <a:bodyPr rtlCol="0" anchor="ctr"/>
+          <a:lstStyle/>
+          <a:p>
+            <a:pPr algn="ctr"/>
+          </a:p>
+        </p:txBody>
+      </p:sp>
+      <p:sp>
+        <p:nvSpPr>
+          <p:cNvPr id="3" name="Rectangle 2"/>
+          <p:cNvSpPr/>
+          <p:nvPr/>
+        </p:nvSpPr>
+        <p:spPr>
+          <a:xfrm>
+            <a:off x="566928" y="502920"/>
+            <a:ext cx="30480" cy="566928"/>
+          </a:xfrm>
+          <a:prstGeom prst="rect">
+            <a:avLst/>
+          </a:prstGeom>
+          <a:solidFill>
+            <a:srgbClr val="2A9D8F"/>
+          </a:solidFill>
+          <a:ln>
+            <a:noFill/>
+          </a:ln>
+          <a:effectLst/>
+        </p:spPr>
+        <p:style>
+          <a:lnRef idx="1">
+            <a:schemeClr val="accent1"/>
+          </a:lnRef>
+          <a:fillRef idx="3">
+            <a:schemeClr val="accent1"/>
+          </a:fillRef>
+          <a:effectRef idx="2">
+            <a:schemeClr val="accent1"/>
+          </a:effectRef>
+          <a:fontRef idx="minor">
+            <a:schemeClr val="lt1"/>
+          </a:fontRef>
+        </p:style>
+        <p:txBody>
+          <a:bodyPr rtlCol="0" anchor="ctr"/>
+          <a:lstStyle/>
+          <a:p>
+            <a:pPr algn="ctr"/>
+          </a:p>
+        </p:txBody>
+      </p:sp>
+      <p:sp>
+        <p:nvSpPr>
+          <p:cNvPr id="4" name="TextBox 3"/>
+          <p:cNvSpPr txBox="1"/>
+          <p:nvPr/>
+        </p:nvSpPr>
+        <p:spPr>
+          <a:xfrm>
+            <a:off x="868680" y="548640"/>
+            <a:ext cx="10607040" cy="320040"/>
+          </a:xfrm>
+          <a:prstGeom prst="rect">
+            <a:avLst/>
+          </a:prstGeom>
+          <a:noFill/>
+        </p:spPr>
+        <p:txBody>
+          <a:bodyPr wrap="square" anchor="t" lIns="0" rIns="0" tIns="0" bIns="0">
+            <a:spAutoFit/>
+          </a:bodyPr>
+          <a:lstStyle/>
+          <a:p>
+            <a:pPr>
+              <a:lnSpc>
+                <a:spcPct val="100000"/>
+              </a:lnSpc>
+            </a:pPr>
+            <a:r>
+              <a:rPr sz="1100" b="1">
+                <a:solidFill>
+                  <a:srgbClr val="E07A5F"/>
+                </a:solidFill>
+                <a:latin typeface="Consolas"/>
+              </a:rPr>
+              <a:t>06b  </a:t>
+            </a:r>
+            <a:r>
+              <a:rPr sz="1100">
+                <a:solidFill>
+                  <a:srgbClr val="2A9D8F"/>
+                </a:solidFill>
+                <a:latin typeface="Consolas"/>
+              </a:rPr>
+              <a:t>ML2 — RESULTS: VARIANCE &amp; DELAY</a:t>
+            </a:r>
+          </a:p>
+        </p:txBody>
+      </p:sp>
+      <p:sp>
+        <p:nvSpPr>
+          <p:cNvPr id="5" name="TextBox 4"/>
+          <p:cNvSpPr txBox="1"/>
+          <p:nvPr/>
+        </p:nvSpPr>
+        <p:spPr>
+          <a:xfrm>
+            <a:off x="868680" y="960120"/>
+            <a:ext cx="10607040" cy="1280160"/>
+          </a:xfrm>
+          <a:prstGeom prst="rect">
+            <a:avLst/>
+          </a:prstGeom>
+          <a:noFill/>
+        </p:spPr>
+        <p:txBody>
+          <a:bodyPr wrap="square" anchor="t" lIns="0" rIns="0" tIns="0" bIns="0">
+            <a:spAutoFit/>
+          </a:bodyPr>
+          <a:lstStyle/>
+          <a:p>
+            <a:pPr algn="l">
+              <a:lnSpc>
+                <a:spcPct val="102000"/>
+              </a:lnSpc>
+              <a:spcBef>
+                <a:spcPts val="0"/>
+              </a:spcBef>
+              <a:spcAft>
+                <a:spcPts val="600"/>
+              </a:spcAft>
+            </a:pPr>
+            <a:r>
+              <a:rPr b="1" sz="2800">
+                <a:solidFill>
+                  <a:srgbClr val="1D3557"/>
+                </a:solidFill>
+                <a:latin typeface="Georgia"/>
+              </a:rPr>
+              <a:t>Neural filters win on both axes.</a:t>
+            </a:r>
+          </a:p>
+        </p:txBody>
+      </p:sp>
+      <p:sp>
+        <p:nvSpPr>
+          <p:cNvPr id="6" name="TextBox 5"/>
+          <p:cNvSpPr txBox="1"/>
+          <p:nvPr/>
+        </p:nvSpPr>
+        <p:spPr>
+          <a:xfrm>
+            <a:off x="868680" y="1828800"/>
+            <a:ext cx="10607040" cy="502920"/>
+          </a:xfrm>
+          <a:prstGeom prst="rect">
+            <a:avLst/>
+          </a:prstGeom>
+          <a:noFill/>
+        </p:spPr>
+        <p:txBody>
+          <a:bodyPr wrap="square" anchor="t" lIns="0" rIns="0" tIns="0" bIns="0">
+            <a:spAutoFit/>
+          </a:bodyPr>
+          <a:lstStyle/>
+          <a:p>
+            <a:pPr>
+              <a:lnSpc>
+                <a:spcPct val="120000"/>
+              </a:lnSpc>
+            </a:pPr>
+            <a:r>
+              <a:rPr b="0" sz="1500">
+                <a:solidFill>
+                  <a:srgbClr val="4A5A66"/>
+                </a:solidFill>
+                <a:latin typeface="Calibri"/>
+              </a:rPr>
+              <a:t>Variance (RMSE) and phase lag (effective delay) are </a:t>
+            </a:r>
+            <a:r>
+              <a:rPr b="1" sz="1500">
+                <a:solidFill>
+                  <a:srgbClr val="1C2B36"/>
+                </a:solidFill>
+                <a:latin typeface="Calibri"/>
+              </a:rPr>
+              <a:t>independent failure modes</a:t>
+            </a:r>
+            <a:r>
+              <a:rPr b="0" sz="1500">
+                <a:solidFill>
+                  <a:srgbClr val="4A5A66"/>
+                </a:solidFill>
+                <a:latin typeface="Calibri"/>
+              </a:rPr>
+              <a:t>. A good filter must minimize both — not just one.</a:t>
+            </a:r>
+          </a:p>
+        </p:txBody>
+      </p:sp>
+      <p:sp>
+        <p:nvSpPr>
+          <p:cNvPr id="7" name="Rounded Rectangle 6"/>
+          <p:cNvSpPr/>
+          <p:nvPr/>
+        </p:nvSpPr>
+        <p:spPr>
+          <a:xfrm>
+            <a:off x="868680" y="2514600"/>
+            <a:ext cx="5166360" cy="3640101"/>
+          </a:xfrm>
+          <a:prstGeom prst="roundRect">
+            <a:avLst>
+              <a:gd name="adj" fmla="val 6000"/>
+            </a:avLst>
+          </a:prstGeom>
+          <a:solidFill>
+            <a:srgbClr val="FFFFFF"/>
+          </a:solidFill>
+          <a:ln w="12700">
+            <a:solidFill>
+              <a:srgbClr val="D9D2C4"/>
+            </a:solidFill>
+          </a:ln>
+          <a:effectLst/>
+        </p:spPr>
+        <p:style>
+          <a:lnRef idx="1">
+            <a:schemeClr val="accent1"/>
+          </a:lnRef>
+          <a:fillRef idx="3">
+            <a:schemeClr val="accent1"/>
+          </a:fillRef>
+          <a:effectRef idx="2">
+            <a:schemeClr val="accent1"/>
+          </a:effectRef>
+          <a:fontRef idx="minor">
+            <a:schemeClr val="lt1"/>
+          </a:fontRef>
+        </p:style>
+        <p:txBody>
+          <a:bodyPr rtlCol="0" anchor="ctr"/>
+          <a:lstStyle/>
+          <a:p>
+            <a:pPr algn="ctr"/>
+          </a:p>
+        </p:txBody>
+      </p:sp>
+      <p:pic>
+        <p:nvPicPr>
+          <p:cNvPr id="8" name="Picture 7" descr="metric_variance.png"/>
+          <p:cNvPicPr>
+            <a:picLocks noChangeAspect="1"/>
+          </p:cNvPicPr>
+          <p:nvPr/>
+        </p:nvPicPr>
+        <p:blipFill>
+          <a:blip r:embed="rId2"/>
+          <a:stretch>
+            <a:fillRect/>
+          </a:stretch>
+        </p:blipFill>
+        <p:spPr>
+          <a:xfrm>
+            <a:off x="1014984" y="2660904"/>
+            <a:ext cx="4873752" cy="2890293"/>
+          </a:xfrm>
+          <a:prstGeom prst="rect">
+            <a:avLst/>
+          </a:prstGeom>
+        </p:spPr>
+      </p:pic>
+      <p:sp>
+        <p:nvSpPr>
+          <p:cNvPr id="9" name="TextBox 8"/>
+          <p:cNvSpPr txBox="1"/>
+          <p:nvPr/>
+        </p:nvSpPr>
+        <p:spPr>
+          <a:xfrm>
+            <a:off x="1014984" y="5596917"/>
+            <a:ext cx="4873752" cy="457200"/>
+          </a:xfrm>
+          <a:prstGeom prst="rect">
+            <a:avLst/>
+          </a:prstGeom>
+          <a:noFill/>
+        </p:spPr>
+        <p:txBody>
+          <a:bodyPr wrap="square" anchor="t" lIns="0" rIns="0" tIns="0" bIns="0">
+            <a:spAutoFit/>
+          </a:bodyPr>
+          <a:lstStyle/>
+          <a:p>
+            <a:pPr algn="ctr">
+              <a:lnSpc>
+                <a:spcPct val="110000"/>
+              </a:lnSpc>
+              <a:spcBef>
+                <a:spcPts val="0"/>
+              </a:spcBef>
+              <a:spcAft>
+                <a:spcPts val="600"/>
+              </a:spcAft>
+            </a:pPr>
+            <a:r>
+              <a:rPr b="0" sz="1200">
+                <a:solidFill>
+                  <a:srgbClr val="4A5A66"/>
+                </a:solidFill>
+                <a:latin typeface="Consolas"/>
+              </a:rPr>
+              <a:t>Error std (RMSE, rad/s) — lower is better</a:t>
+            </a:r>
+          </a:p>
+        </p:txBody>
+      </p:sp>
+      <p:sp>
+        <p:nvSpPr>
+          <p:cNvPr id="10" name="Rounded Rectangle 9"/>
+          <p:cNvSpPr/>
+          <p:nvPr/>
+        </p:nvSpPr>
+        <p:spPr>
+          <a:xfrm>
+            <a:off x="6309360" y="2514600"/>
+            <a:ext cx="5166360" cy="3640101"/>
+          </a:xfrm>
+          <a:prstGeom prst="roundRect">
+            <a:avLst>
+              <a:gd name="adj" fmla="val 6000"/>
+            </a:avLst>
+          </a:prstGeom>
+          <a:solidFill>
+            <a:srgbClr val="FFFFFF"/>
+          </a:solidFill>
+          <a:ln w="12700">
+            <a:solidFill>
+              <a:srgbClr val="D9D2C4"/>
+            </a:solidFill>
+          </a:ln>
+          <a:effectLst/>
+        </p:spPr>
+        <p:style>
+          <a:lnRef idx="1">
+            <a:schemeClr val="accent1"/>
+          </a:lnRef>
+          <a:fillRef idx="3">
+            <a:schemeClr val="accent1"/>
+          </a:fillRef>
+          <a:effectRef idx="2">
+            <a:schemeClr val="accent1"/>
+          </a:effectRef>
+          <a:fontRef idx="minor">
+            <a:schemeClr val="lt1"/>
+          </a:fontRef>
+        </p:style>
+        <p:txBody>
+          <a:bodyPr rtlCol="0" anchor="ctr"/>
+          <a:lstStyle/>
+          <a:p>
+            <a:pPr algn="ctr"/>
+          </a:p>
+        </p:txBody>
+      </p:sp>
+      <p:pic>
+        <p:nvPicPr>
+          <p:cNvPr id="11" name="Picture 10" descr="metric_delay.png"/>
+          <p:cNvPicPr>
+            <a:picLocks noChangeAspect="1"/>
+          </p:cNvPicPr>
+          <p:nvPr/>
+        </p:nvPicPr>
+        <p:blipFill>
+          <a:blip r:embed="rId3"/>
+          <a:stretch>
+            <a:fillRect/>
+          </a:stretch>
+        </p:blipFill>
+        <p:spPr>
+          <a:xfrm>
+            <a:off x="6455664" y="2660904"/>
+            <a:ext cx="4873752" cy="2890293"/>
+          </a:xfrm>
+          <a:prstGeom prst="rect">
+            <a:avLst/>
+          </a:prstGeom>
+        </p:spPr>
+      </p:pic>
+      <p:sp>
+        <p:nvSpPr>
+          <p:cNvPr id="12" name="TextBox 11"/>
+          <p:cNvSpPr txBox="1"/>
+          <p:nvPr/>
+        </p:nvSpPr>
+        <p:spPr>
+          <a:xfrm>
+            <a:off x="6455664" y="5596917"/>
+            <a:ext cx="4873752" cy="457200"/>
+          </a:xfrm>
+          <a:prstGeom prst="rect">
+            <a:avLst/>
+          </a:prstGeom>
+          <a:noFill/>
+        </p:spPr>
+        <p:txBody>
+          <a:bodyPr wrap="square" anchor="t" lIns="0" rIns="0" tIns="0" bIns="0">
+            <a:spAutoFit/>
+          </a:bodyPr>
+          <a:lstStyle/>
+          <a:p>
+            <a:pPr algn="ctr">
+              <a:lnSpc>
+                <a:spcPct val="110000"/>
+              </a:lnSpc>
+              <a:spcBef>
+                <a:spcPts val="0"/>
+              </a:spcBef>
+              <a:spcAft>
+                <a:spcPts val="600"/>
+              </a:spcAft>
+            </a:pPr>
+            <a:r>
+              <a:rPr b="0" sz="1200">
+                <a:solidFill>
+                  <a:srgbClr val="4A5A66"/>
+                </a:solidFill>
+                <a:latin typeface="Consolas"/>
+              </a:rPr>
+              <a:t>Effective phase lag (ms) — lower is better</a:t>
+            </a:r>
+          </a:p>
+        </p:txBody>
+      </p:sp>
+      <p:sp>
+        <p:nvSpPr>
+          <p:cNvPr id="13" name="Rounded Rectangle 12"/>
+          <p:cNvSpPr/>
+          <p:nvPr/>
+        </p:nvSpPr>
+        <p:spPr>
+          <a:xfrm>
+            <a:off x="868680" y="6035040"/>
+            <a:ext cx="10607040" cy="749808"/>
+          </a:xfrm>
+          <a:prstGeom prst="roundRect">
+            <a:avLst>
+              <a:gd name="adj" fmla="val 6000"/>
+            </a:avLst>
+          </a:prstGeom>
+          <a:solidFill>
+            <a:srgbClr val="E7F2F0"/>
+          </a:solidFill>
+          <a:ln w="12700">
+            <a:solidFill>
+              <a:srgbClr val="E7F2F0"/>
+            </a:solidFill>
+          </a:ln>
+          <a:effectLst/>
+        </p:spPr>
+        <p:style>
+          <a:lnRef idx="1">
+            <a:schemeClr val="accent1"/>
+          </a:lnRef>
+          <a:fillRef idx="3">
+            <a:schemeClr val="accent1"/>
+          </a:fillRef>
+          <a:effectRef idx="2">
+            <a:schemeClr val="accent1"/>
+          </a:effectRef>
+          <a:fontRef idx="minor">
+            <a:schemeClr val="lt1"/>
+          </a:fontRef>
+        </p:style>
+        <p:txBody>
+          <a:bodyPr rtlCol="0" anchor="ctr"/>
+          <a:lstStyle/>
+          <a:p>
+            <a:pPr algn="ctr"/>
+          </a:p>
+        </p:txBody>
+      </p:sp>
+      <p:sp>
+        <p:nvSpPr>
+          <p:cNvPr id="14" name="Rectangle 13"/>
+          <p:cNvSpPr/>
+          <p:nvPr/>
+        </p:nvSpPr>
+        <p:spPr>
+          <a:xfrm>
+            <a:off x="868680" y="6035040"/>
+            <a:ext cx="38100" cy="749808"/>
+          </a:xfrm>
+          <a:prstGeom prst="rect">
+            <a:avLst/>
+          </a:prstGeom>
+          <a:solidFill>
+            <a:srgbClr val="2A9D8F"/>
+          </a:solidFill>
+          <a:ln>
+            <a:noFill/>
+          </a:ln>
+          <a:effectLst/>
+        </p:spPr>
+        <p:style>
+          <a:lnRef idx="1">
+            <a:schemeClr val="accent1"/>
+          </a:lnRef>
+          <a:fillRef idx="3">
+            <a:schemeClr val="accent1"/>
+          </a:fillRef>
+          <a:effectRef idx="2">
+            <a:schemeClr val="accent1"/>
+          </a:effectRef>
+          <a:fontRef idx="minor">
+            <a:schemeClr val="lt1"/>
+          </a:fontRef>
+        </p:style>
+        <p:txBody>
+          <a:bodyPr rtlCol="0" anchor="ctr"/>
+          <a:lstStyle/>
+          <a:p>
+            <a:pPr algn="ctr"/>
+          </a:p>
+        </p:txBody>
+      </p:sp>
+      <p:sp>
+        <p:nvSpPr>
+          <p:cNvPr id="15" name="TextBox 14"/>
+          <p:cNvSpPr txBox="1"/>
+          <p:nvPr/>
+        </p:nvSpPr>
+        <p:spPr>
+          <a:xfrm>
+            <a:off x="1069848" y="6126480"/>
+            <a:ext cx="10222992" cy="566928"/>
+          </a:xfrm>
+          <a:prstGeom prst="rect">
+            <a:avLst/>
+          </a:prstGeom>
+          <a:noFill/>
+        </p:spPr>
+        <p:txBody>
+          <a:bodyPr wrap="square" anchor="ctr" lIns="0" rIns="0" tIns="0" bIns="0">
+            <a:spAutoFit/>
+          </a:bodyPr>
+          <a:lstStyle/>
+          <a:p>
+            <a:pPr>
+              <a:lnSpc>
+                <a:spcPct val="112000"/>
+              </a:lnSpc>
+            </a:pPr>
+            <a:r>
+              <a:rPr b="1" sz="1500">
+                <a:solidFill>
+                  <a:srgbClr val="1D3557"/>
+                </a:solidFill>
+                <a:latin typeface="Georgia"/>
+              </a:rPr>
+              <a:t>EMA: 7 ms lag, GRU/TCN: 1 ms.  </a:t>
+            </a:r>
+            <a:r>
+              <a:rPr b="1" sz="1500">
+                <a:solidFill>
+                  <a:srgbClr val="1C2B36"/>
+                </a:solidFill>
+                <a:latin typeface="Calibri"/>
+              </a:rPr>
+              <a:t>EMA halves RMSE vs raw but costs 7 ms of lag</a:t>
+            </a:r>
+            <a:r>
+              <a:rPr b="0" sz="1500">
+                <a:solidFill>
+                  <a:srgbClr val="4A5A66"/>
+                </a:solidFill>
+                <a:latin typeface="Calibri"/>
+              </a:rPr>
+              <a:t> at α = 0.872. Neural filters cut RMSE a further 39 % AND reduce lag to one sample — faster response, less noise.</a:t>
+            </a:r>
+          </a:p>
+        </p:txBody>
+      </p:sp>
+    </p:spTree>
+  </p:cSld>
+  <p:clrMapOvr>
+    <a:masterClrMapping/>
+  </p:clrMapOvr>
+</p:sld>
+</file>
+
+<file path=ppt/slides/slide8.xml><?xml version="1.0" encoding="utf-8"?>
 <p:sld xmlns:a="http://schemas.openxmlformats.org/drawingml/2006/main" xmlns:p="http://schemas.openxmlformats.org/presentationml/2006/main" xmlns:r="http://schemas.openxmlformats.org/officeDocument/2006/relationships">
   <p:cSld>
     <p:bg>
